--- a/proposals/erth-to-erth-mobile-app/Erth-to-Erth-Pitch.pptx
+++ b/proposals/erth-to-erth-mobile-app/Erth-to-Erth-Pitch.pptx
@@ -27,6 +27,7 @@
     <p:sldId id="275" r:id="rId26"/>
     <p:sldId id="276" r:id="rId27"/>
     <p:sldId id="277" r:id="rId28"/>
+    <p:sldId id="278" r:id="rId29"/>
   </p:sldIdLst>
   <p:sldSz cx="12191695" cy="6858000" type="screen4x3"/>
   <p:notesSz cx="6858000" cy="9144000"/>
@@ -4918,7 +4919,7 @@
                 </a:solidFill>
                 <a:latin typeface="Calibri"/>
               </a:rPr>
-              <a:t>10 / 22</a:t>
+              <a:t>10 / 23</a:t>
             </a:r>
           </a:p>
         </p:txBody>
@@ -6369,7 +6370,7 @@
                 </a:solidFill>
                 <a:latin typeface="Calibri"/>
               </a:rPr>
-              <a:t>11 / 22</a:t>
+              <a:t>11 / 23</a:t>
             </a:r>
           </a:p>
         </p:txBody>
@@ -8556,7 +8557,7 @@
                 </a:solidFill>
                 <a:latin typeface="Calibri"/>
               </a:rPr>
-              <a:t>12 / 22</a:t>
+              <a:t>12 / 23</a:t>
             </a:r>
           </a:p>
         </p:txBody>
@@ -9632,7 +9633,7 @@
                 </a:solidFill>
                 <a:latin typeface="Calibri"/>
               </a:rPr>
-              <a:t>13 / 22</a:t>
+              <a:t>13 / 23</a:t>
             </a:r>
           </a:p>
         </p:txBody>
@@ -11106,7 +11107,7 @@
                 </a:solidFill>
                 <a:latin typeface="Calibri"/>
               </a:rPr>
-              <a:t>14 / 22</a:t>
+              <a:t>14 / 23</a:t>
             </a:r>
           </a:p>
         </p:txBody>
@@ -12779,7 +12780,7 @@
                 </a:solidFill>
                 <a:latin typeface="Calibri"/>
               </a:rPr>
-              <a:t>15 / 22</a:t>
+              <a:t>15 / 23</a:t>
             </a:r>
           </a:p>
         </p:txBody>
@@ -13960,7 +13961,7 @@
                 </a:solidFill>
                 <a:latin typeface="Calibri"/>
               </a:rPr>
-              <a:t>16 / 22</a:t>
+              <a:t>16 / 23</a:t>
             </a:r>
           </a:p>
         </p:txBody>
@@ -14057,7 +14058,7 @@
                 </a:solidFill>
                 <a:latin typeface="Calibri"/>
               </a:rPr>
-              <a:t>HOW WE'LL DELIVER</a:t>
+              <a:t>THE STUDIO · WEB ADMIN PORTAL</a:t>
             </a:r>
           </a:p>
         </p:txBody>
@@ -14092,7 +14093,7 @@
                 </a:solidFill>
                 <a:latin typeface="Georgia"/>
               </a:rPr>
-              <a:t>Roadmap — first nine months.</a:t>
+              <a:t>The internal twin of the mobile app.</a:t>
             </a:r>
           </a:p>
         </p:txBody>
@@ -14142,45 +14143,36 @@
       </p:sp>
       <p:sp>
         <p:nvSpPr>
-          <p:cNvPr id="6" name="Rectangle 5"/>
-          <p:cNvSpPr/>
-          <p:nvPr/>
-        </p:nvSpPr>
-        <p:spPr>
-          <a:xfrm>
-            <a:off x="548640" y="2743200"/>
-            <a:ext cx="11064240" cy="25400"/>
-          </a:xfrm>
-          <a:prstGeom prst="rect">
-            <a:avLst/>
-          </a:prstGeom>
-          <a:solidFill>
-            <a:srgbClr val="D9D2C4"/>
-          </a:solidFill>
-          <a:ln>
-            <a:noFill/>
-          </a:ln>
-          <a:effectLst/>
-        </p:spPr>
-        <p:style>
-          <a:lnRef idx="1">
-            <a:schemeClr val="accent1"/>
-          </a:lnRef>
-          <a:fillRef idx="3">
-            <a:schemeClr val="accent1"/>
-          </a:fillRef>
-          <a:effectRef idx="2">
-            <a:schemeClr val="accent1"/>
-          </a:effectRef>
-          <a:fontRef idx="minor">
-            <a:schemeClr val="lt1"/>
-          </a:fontRef>
-        </p:style>
-        <p:txBody>
-          <a:bodyPr rtlCol="0" anchor="ctr"/>
-          <a:lstStyle/>
-          <a:p>
-            <a:pPr algn="ctr"/>
+          <p:cNvPr id="6" name="TextBox 5"/>
+          <p:cNvSpPr txBox="1"/>
+          <p:nvPr/>
+        </p:nvSpPr>
+        <p:spPr>
+          <a:xfrm>
+            <a:off x="548640" y="1920240"/>
+            <a:ext cx="10972800" cy="731520"/>
+          </a:xfrm>
+          <a:prstGeom prst="rect">
+            <a:avLst/>
+          </a:prstGeom>
+          <a:noFill/>
+        </p:spPr>
+        <p:txBody>
+          <a:bodyPr wrap="square" lIns="0" rIns="0" tIns="0" bIns="0" anchor="t">
+            <a:spAutoFit/>
+          </a:bodyPr>
+          <a:lstStyle/>
+          <a:p>
+            <a:pPr algn="l"/>
+            <a:r>
+              <a:rPr sz="1400" b="0">
+                <a:solidFill>
+                  <a:srgbClr val="6B665C"/>
+                </a:solidFill>
+                <a:latin typeface="Calibri"/>
+              </a:rPr>
+              <a:t>Customers use the mobile app. Your team uses the Studio. Same backend, same brand language — different surface for different users.</a:t>
+            </a:r>
           </a:p>
         </p:txBody>
       </p:sp>
@@ -14192,54 +14184,8 @@
         </p:nvSpPr>
         <p:spPr>
           <a:xfrm>
-            <a:off x="1828800" y="2651760"/>
-            <a:ext cx="182880" cy="182880"/>
-          </a:xfrm>
-          <a:prstGeom prst="roundRect">
-            <a:avLst>
-              <a:gd name="adj" fmla="val 12000"/>
-            </a:avLst>
-          </a:prstGeom>
-          <a:solidFill>
-            <a:srgbClr val="2F4A36"/>
-          </a:solidFill>
-          <a:ln>
-            <a:noFill/>
-          </a:ln>
-          <a:effectLst/>
-        </p:spPr>
-        <p:style>
-          <a:lnRef idx="1">
-            <a:schemeClr val="accent1"/>
-          </a:lnRef>
-          <a:fillRef idx="3">
-            <a:schemeClr val="accent1"/>
-          </a:fillRef>
-          <a:effectRef idx="2">
-            <a:schemeClr val="accent1"/>
-          </a:effectRef>
-          <a:fontRef idx="minor">
-            <a:schemeClr val="lt1"/>
-          </a:fontRef>
-        </p:style>
-        <p:txBody>
-          <a:bodyPr rtlCol="0" anchor="ctr"/>
-          <a:lstStyle/>
-          <a:p>
-            <a:pPr algn="ctr"/>
-          </a:p>
-        </p:txBody>
-      </p:sp>
-      <p:sp>
-        <p:nvSpPr>
-          <p:cNvPr id="8" name="Rounded Rectangle 7"/>
-          <p:cNvSpPr/>
-          <p:nvPr/>
-        </p:nvSpPr>
-        <p:spPr>
-          <a:xfrm>
-            <a:off x="548640" y="3063240"/>
-            <a:ext cx="2743200" cy="3291840"/>
+            <a:off x="4114800" y="2743200"/>
+            <a:ext cx="3931920" cy="777240"/>
           </a:xfrm>
           <a:prstGeom prst="roundRect">
             <a:avLst>
@@ -14280,119 +14226,84 @@
       </p:sp>
       <p:sp>
         <p:nvSpPr>
+          <p:cNvPr id="8" name="TextBox 7"/>
+          <p:cNvSpPr txBox="1"/>
+          <p:nvPr/>
+        </p:nvSpPr>
+        <p:spPr>
+          <a:xfrm>
+            <a:off x="4297680" y="2788920"/>
+            <a:ext cx="3566160" cy="365760"/>
+          </a:xfrm>
+          <a:prstGeom prst="rect">
+            <a:avLst/>
+          </a:prstGeom>
+          <a:noFill/>
+        </p:spPr>
+        <p:txBody>
+          <a:bodyPr wrap="square" lIns="0" rIns="0" tIns="0" bIns="0" anchor="t">
+            <a:spAutoFit/>
+          </a:bodyPr>
+          <a:lstStyle/>
+          <a:p>
+            <a:pPr algn="l"/>
+            <a:r>
+              <a:rPr sz="1000" b="1">
+                <a:solidFill>
+                  <a:srgbClr val="2F4A36"/>
+                </a:solidFill>
+                <a:latin typeface="Calibri"/>
+              </a:rPr>
+              <a:t>SHOPIFY</a:t>
+            </a:r>
+          </a:p>
+        </p:txBody>
+      </p:sp>
+      <p:sp>
+        <p:nvSpPr>
           <p:cNvPr id="9" name="TextBox 8"/>
           <p:cNvSpPr txBox="1"/>
           <p:nvPr/>
         </p:nvSpPr>
         <p:spPr>
           <a:xfrm>
-            <a:off x="822960" y="3200400"/>
-            <a:ext cx="2194560" cy="365760"/>
-          </a:xfrm>
-          <a:prstGeom prst="rect">
-            <a:avLst/>
-          </a:prstGeom>
-          <a:noFill/>
-        </p:spPr>
-        <p:txBody>
-          <a:bodyPr wrap="square" lIns="0" rIns="0" tIns="0" bIns="0" anchor="t">
-            <a:spAutoFit/>
-          </a:bodyPr>
-          <a:lstStyle/>
-          <a:p>
-            <a:pPr algn="l"/>
-            <a:r>
-              <a:rPr sz="1000" b="1">
-                <a:solidFill>
-                  <a:srgbClr val="2F4A36"/>
-                </a:solidFill>
-                <a:latin typeface="Calibri"/>
-              </a:rPr>
-              <a:t>Weeks 1–2</a:t>
-            </a:r>
-          </a:p>
-        </p:txBody>
-      </p:sp>
-      <p:sp>
-        <p:nvSpPr>
-          <p:cNvPr id="10" name="TextBox 9"/>
-          <p:cNvSpPr txBox="1"/>
-          <p:nvPr/>
-        </p:nvSpPr>
-        <p:spPr>
-          <a:xfrm>
-            <a:off x="822960" y="3566160"/>
-            <a:ext cx="2194560" cy="548640"/>
-          </a:xfrm>
-          <a:prstGeom prst="rect">
-            <a:avLst/>
-          </a:prstGeom>
-          <a:noFill/>
-        </p:spPr>
-        <p:txBody>
-          <a:bodyPr wrap="square" lIns="0" rIns="0" tIns="0" bIns="0" anchor="t">
-            <a:spAutoFit/>
-          </a:bodyPr>
-          <a:lstStyle/>
-          <a:p>
-            <a:pPr algn="l"/>
-            <a:r>
-              <a:rPr sz="2200" b="0">
-                <a:solidFill>
-                  <a:srgbClr val="1F1D18"/>
-                </a:solidFill>
-                <a:latin typeface="Georgia"/>
-              </a:rPr>
-              <a:t>Discovery</a:t>
-            </a:r>
-          </a:p>
-        </p:txBody>
-      </p:sp>
-      <p:sp>
-        <p:nvSpPr>
-          <p:cNvPr id="11" name="TextBox 10"/>
-          <p:cNvSpPr txBox="1"/>
-          <p:nvPr/>
-        </p:nvSpPr>
-        <p:spPr>
-          <a:xfrm>
-            <a:off x="822960" y="4389120"/>
-            <a:ext cx="2194560" cy="1828800"/>
-          </a:xfrm>
-          <a:prstGeom prst="rect">
-            <a:avLst/>
-          </a:prstGeom>
-          <a:noFill/>
-        </p:spPr>
-        <p:txBody>
-          <a:bodyPr wrap="square" lIns="0" rIns="0" tIns="0" bIns="0" anchor="t">
-            <a:spAutoFit/>
-          </a:bodyPr>
-          <a:lstStyle/>
-          <a:p>
-            <a:pPr algn="l"/>
-            <a:r>
-              <a:rPr sz="1200" b="0">
+            <a:off x="4297680" y="3108960"/>
+            <a:ext cx="3566160" cy="365760"/>
+          </a:xfrm>
+          <a:prstGeom prst="rect">
+            <a:avLst/>
+          </a:prstGeom>
+          <a:noFill/>
+        </p:spPr>
+        <p:txBody>
+          <a:bodyPr wrap="square" lIns="0" rIns="0" tIns="0" bIns="0" anchor="t">
+            <a:spAutoFit/>
+          </a:bodyPr>
+          <a:lstStyle/>
+          <a:p>
+            <a:pPr algn="l"/>
+            <a:r>
+              <a:rPr sz="1100" b="0">
                 <a:solidFill>
                   <a:srgbClr val="6B665C"/>
                 </a:solidFill>
                 <a:latin typeface="Calibri"/>
               </a:rPr>
-              <a:t>Audit current data, interview customers, lock Phase 1 scope, design system kickoff.</a:t>
-            </a:r>
-          </a:p>
-        </p:txBody>
-      </p:sp>
-      <p:sp>
-        <p:nvSpPr>
-          <p:cNvPr id="12" name="Rounded Rectangle 11"/>
+              <a:t>Catalog · orders · payments — unchanged</a:t>
+            </a:r>
+          </a:p>
+        </p:txBody>
+      </p:sp>
+      <p:sp>
+        <p:nvSpPr>
+          <p:cNvPr id="10" name="Rounded Rectangle 9"/>
           <p:cNvSpPr/>
           <p:nvPr/>
         </p:nvSpPr>
         <p:spPr>
           <a:xfrm>
-            <a:off x="4617720" y="2651760"/>
-            <a:ext cx="182880" cy="182880"/>
+            <a:off x="548640" y="3840480"/>
+            <a:ext cx="11064240" cy="640080"/>
           </a:xfrm>
           <a:prstGeom prst="roundRect">
             <a:avLst>
@@ -14400,7 +14311,7 @@
             </a:avLst>
           </a:prstGeom>
           <a:solidFill>
-            <a:srgbClr val="2F4A36"/>
+            <a:srgbClr val="E3EAD0"/>
           </a:solidFill>
           <a:ln>
             <a:noFill/>
@@ -14431,14 +14342,49 @@
       </p:sp>
       <p:sp>
         <p:nvSpPr>
-          <p:cNvPr id="13" name="Rounded Rectangle 12"/>
+          <p:cNvPr id="11" name="TextBox 10"/>
+          <p:cNvSpPr txBox="1"/>
+          <p:nvPr/>
+        </p:nvSpPr>
+        <p:spPr>
+          <a:xfrm>
+            <a:off x="777240" y="3904487"/>
+            <a:ext cx="10607040" cy="365760"/>
+          </a:xfrm>
+          <a:prstGeom prst="rect">
+            <a:avLst/>
+          </a:prstGeom>
+          <a:noFill/>
+        </p:spPr>
+        <p:txBody>
+          <a:bodyPr wrap="square" lIns="0" rIns="0" tIns="0" bIns="0" anchor="ctr">
+            <a:spAutoFit/>
+          </a:bodyPr>
+          <a:lstStyle/>
+          <a:p>
+            <a:pPr algn="l"/>
+            <a:r>
+              <a:rPr sz="1100" b="1">
+                <a:solidFill>
+                  <a:srgbClr val="2F4A36"/>
+                </a:solidFill>
+                <a:latin typeface="Calibri"/>
+              </a:rPr>
+              <a:t>SHARED API · Postgres · Auth · AI gateway · Object storage</a:t>
+            </a:r>
+          </a:p>
+        </p:txBody>
+      </p:sp>
+      <p:sp>
+        <p:nvSpPr>
+          <p:cNvPr id="12" name="Rounded Rectangle 11"/>
           <p:cNvSpPr/>
           <p:nvPr/>
         </p:nvSpPr>
         <p:spPr>
           <a:xfrm>
-            <a:off x="3337560" y="3063240"/>
-            <a:ext cx="2743200" cy="3291840"/>
+            <a:off x="548640" y="4754880"/>
+            <a:ext cx="5440680" cy="1463040"/>
           </a:xfrm>
           <a:prstGeom prst="roundRect">
             <a:avLst>
@@ -14479,119 +14425,14 @@
       </p:sp>
       <p:sp>
         <p:nvSpPr>
-          <p:cNvPr id="14" name="TextBox 13"/>
-          <p:cNvSpPr txBox="1"/>
-          <p:nvPr/>
-        </p:nvSpPr>
-        <p:spPr>
-          <a:xfrm>
-            <a:off x="3611880" y="3200400"/>
-            <a:ext cx="2194560" cy="365760"/>
-          </a:xfrm>
-          <a:prstGeom prst="rect">
-            <a:avLst/>
-          </a:prstGeom>
-          <a:noFill/>
-        </p:spPr>
-        <p:txBody>
-          <a:bodyPr wrap="square" lIns="0" rIns="0" tIns="0" bIns="0" anchor="t">
-            <a:spAutoFit/>
-          </a:bodyPr>
-          <a:lstStyle/>
-          <a:p>
-            <a:pPr algn="l"/>
-            <a:r>
-              <a:rPr sz="1000" b="1">
-                <a:solidFill>
-                  <a:srgbClr val="2F4A36"/>
-                </a:solidFill>
-                <a:latin typeface="Calibri"/>
-              </a:rPr>
-              <a:t>Weeks 3–14</a:t>
-            </a:r>
-          </a:p>
-        </p:txBody>
-      </p:sp>
-      <p:sp>
-        <p:nvSpPr>
-          <p:cNvPr id="15" name="TextBox 14"/>
-          <p:cNvSpPr txBox="1"/>
-          <p:nvPr/>
-        </p:nvSpPr>
-        <p:spPr>
-          <a:xfrm>
-            <a:off x="3611880" y="3566160"/>
-            <a:ext cx="2194560" cy="548640"/>
-          </a:xfrm>
-          <a:prstGeom prst="rect">
-            <a:avLst/>
-          </a:prstGeom>
-          <a:noFill/>
-        </p:spPr>
-        <p:txBody>
-          <a:bodyPr wrap="square" lIns="0" rIns="0" tIns="0" bIns="0" anchor="t">
-            <a:spAutoFit/>
-          </a:bodyPr>
-          <a:lstStyle/>
-          <a:p>
-            <a:pPr algn="l"/>
-            <a:r>
-              <a:rPr sz="2200" b="0">
-                <a:solidFill>
-                  <a:srgbClr val="1F1D18"/>
-                </a:solidFill>
-                <a:latin typeface="Georgia"/>
-              </a:rPr>
-              <a:t>Phase 1 build</a:t>
-            </a:r>
-          </a:p>
-        </p:txBody>
-      </p:sp>
-      <p:sp>
-        <p:nvSpPr>
-          <p:cNvPr id="16" name="TextBox 15"/>
-          <p:cNvSpPr txBox="1"/>
-          <p:nvPr/>
-        </p:nvSpPr>
-        <p:spPr>
-          <a:xfrm>
-            <a:off x="3611880" y="4389120"/>
-            <a:ext cx="2194560" cy="1828800"/>
-          </a:xfrm>
-          <a:prstGeom prst="rect">
-            <a:avLst/>
-          </a:prstGeom>
-          <a:noFill/>
-        </p:spPr>
-        <p:txBody>
-          <a:bodyPr wrap="square" lIns="0" rIns="0" tIns="0" bIns="0" anchor="t">
-            <a:spAutoFit/>
-          </a:bodyPr>
-          <a:lstStyle/>
-          <a:p>
-            <a:pPr algn="l"/>
-            <a:r>
-              <a:rPr sz="1200" b="0">
-                <a:solidFill>
-                  <a:srgbClr val="6B665C"/>
-                </a:solidFill>
-                <a:latin typeface="Calibri"/>
-              </a:rPr>
-              <a:t>Ship the foundation app: shop, closet, passport, rewards, Tier 1 AI. Launch in week 14.</a:t>
-            </a:r>
-          </a:p>
-        </p:txBody>
-      </p:sp>
-      <p:sp>
-        <p:nvSpPr>
-          <p:cNvPr id="17" name="Rounded Rectangle 16"/>
+          <p:cNvPr id="13" name="Rounded Rectangle 12"/>
           <p:cNvSpPr/>
           <p:nvPr/>
         </p:nvSpPr>
         <p:spPr>
           <a:xfrm>
-            <a:off x="7406640" y="2651760"/>
-            <a:ext cx="182880" cy="182880"/>
+            <a:off x="548640" y="4754880"/>
+            <a:ext cx="5440680" cy="365760"/>
           </a:xfrm>
           <a:prstGeom prst="roundRect">
             <a:avLst>
@@ -14630,14 +14471,84 @@
       </p:sp>
       <p:sp>
         <p:nvSpPr>
-          <p:cNvPr id="18" name="Rounded Rectangle 17"/>
+          <p:cNvPr id="14" name="TextBox 13"/>
+          <p:cNvSpPr txBox="1"/>
+          <p:nvPr/>
+        </p:nvSpPr>
+        <p:spPr>
+          <a:xfrm>
+            <a:off x="777240" y="4773168"/>
+            <a:ext cx="4983480" cy="365760"/>
+          </a:xfrm>
+          <a:prstGeom prst="rect">
+            <a:avLst/>
+          </a:prstGeom>
+          <a:noFill/>
+        </p:spPr>
+        <p:txBody>
+          <a:bodyPr wrap="square" lIns="0" rIns="0" tIns="0" bIns="0" anchor="ctr">
+            <a:spAutoFit/>
+          </a:bodyPr>
+          <a:lstStyle/>
+          <a:p>
+            <a:pPr algn="l"/>
+            <a:r>
+              <a:rPr sz="1000" b="1">
+                <a:solidFill>
+                  <a:srgbClr val="FFFFFF"/>
+                </a:solidFill>
+                <a:latin typeface="Calibri"/>
+              </a:rPr>
+              <a:t>MOBILE APP — IOS &amp; ANDROID</a:t>
+            </a:r>
+          </a:p>
+        </p:txBody>
+      </p:sp>
+      <p:sp>
+        <p:nvSpPr>
+          <p:cNvPr id="15" name="TextBox 14"/>
+          <p:cNvSpPr txBox="1"/>
+          <p:nvPr/>
+        </p:nvSpPr>
+        <p:spPr>
+          <a:xfrm>
+            <a:off x="777240" y="5212080"/>
+            <a:ext cx="4983480" cy="914400"/>
+          </a:xfrm>
+          <a:prstGeom prst="rect">
+            <a:avLst/>
+          </a:prstGeom>
+          <a:noFill/>
+        </p:spPr>
+        <p:txBody>
+          <a:bodyPr wrap="square" lIns="0" rIns="0" tIns="0" bIns="0" anchor="t">
+            <a:spAutoFit/>
+          </a:bodyPr>
+          <a:lstStyle/>
+          <a:p>
+            <a:pPr algn="l"/>
+            <a:r>
+              <a:rPr sz="1100" b="0">
+                <a:solidFill>
+                  <a:srgbClr val="1F1D18"/>
+                </a:solidFill>
+                <a:latin typeface="Calibri"/>
+              </a:rPr>
+              <a:t>Customer-facing · Shop · Closet · Passport · Rewards · Scan · Fit assistant</a:t>
+            </a:r>
+          </a:p>
+        </p:txBody>
+      </p:sp>
+      <p:sp>
+        <p:nvSpPr>
+          <p:cNvPr id="16" name="Rounded Rectangle 15"/>
           <p:cNvSpPr/>
           <p:nvPr/>
         </p:nvSpPr>
         <p:spPr>
           <a:xfrm>
-            <a:off x="6126480" y="3063240"/>
-            <a:ext cx="2743200" cy="3291840"/>
+            <a:off x="6172200" y="4754880"/>
+            <a:ext cx="5440680" cy="1463040"/>
           </a:xfrm>
           <a:prstGeom prst="roundRect">
             <a:avLst>
@@ -14678,119 +14589,14 @@
       </p:sp>
       <p:sp>
         <p:nvSpPr>
-          <p:cNvPr id="19" name="TextBox 18"/>
-          <p:cNvSpPr txBox="1"/>
-          <p:nvPr/>
-        </p:nvSpPr>
-        <p:spPr>
-          <a:xfrm>
-            <a:off x="6400800" y="3200400"/>
-            <a:ext cx="2194560" cy="365760"/>
-          </a:xfrm>
-          <a:prstGeom prst="rect">
-            <a:avLst/>
-          </a:prstGeom>
-          <a:noFill/>
-        </p:spPr>
-        <p:txBody>
-          <a:bodyPr wrap="square" lIns="0" rIns="0" tIns="0" bIns="0" anchor="t">
-            <a:spAutoFit/>
-          </a:bodyPr>
-          <a:lstStyle/>
-          <a:p>
-            <a:pPr algn="l"/>
-            <a:r>
-              <a:rPr sz="1000" b="1">
-                <a:solidFill>
-                  <a:srgbClr val="2F4A36"/>
-                </a:solidFill>
-                <a:latin typeface="Calibri"/>
-              </a:rPr>
-              <a:t>Weeks 15–26</a:t>
-            </a:r>
-          </a:p>
-        </p:txBody>
-      </p:sp>
-      <p:sp>
-        <p:nvSpPr>
-          <p:cNvPr id="20" name="TextBox 19"/>
-          <p:cNvSpPr txBox="1"/>
-          <p:nvPr/>
-        </p:nvSpPr>
-        <p:spPr>
-          <a:xfrm>
-            <a:off x="6400800" y="3566160"/>
-            <a:ext cx="2194560" cy="548640"/>
-          </a:xfrm>
-          <a:prstGeom prst="rect">
-            <a:avLst/>
-          </a:prstGeom>
-          <a:noFill/>
-        </p:spPr>
-        <p:txBody>
-          <a:bodyPr wrap="square" lIns="0" rIns="0" tIns="0" bIns="0" anchor="t">
-            <a:spAutoFit/>
-          </a:bodyPr>
-          <a:lstStyle/>
-          <a:p>
-            <a:pPr algn="l"/>
-            <a:r>
-              <a:rPr sz="2200" b="0">
-                <a:solidFill>
-                  <a:srgbClr val="1F1D18"/>
-                </a:solidFill>
-                <a:latin typeface="Georgia"/>
-              </a:rPr>
-              <a:t>Phase 2 build</a:t>
-            </a:r>
-          </a:p>
-        </p:txBody>
-      </p:sp>
-      <p:sp>
-        <p:nvSpPr>
-          <p:cNvPr id="21" name="TextBox 20"/>
-          <p:cNvSpPr txBox="1"/>
-          <p:nvPr/>
-        </p:nvSpPr>
-        <p:spPr>
-          <a:xfrm>
-            <a:off x="6400800" y="4389120"/>
-            <a:ext cx="2194560" cy="1828800"/>
-          </a:xfrm>
-          <a:prstGeom prst="rect">
-            <a:avLst/>
-          </a:prstGeom>
-          <a:noFill/>
-        </p:spPr>
-        <p:txBody>
-          <a:bodyPr wrap="square" lIns="0" rIns="0" tIns="0" bIns="0" anchor="t">
-            <a:spAutoFit/>
-          </a:bodyPr>
-          <a:lstStyle/>
-          <a:p>
-            <a:pPr algn="l"/>
-            <a:r>
-              <a:rPr sz="1200" b="0">
-                <a:solidFill>
-                  <a:srgbClr val="6B665C"/>
-                </a:solidFill>
-                <a:latin typeface="Calibri"/>
-              </a:rPr>
-              <a:t>Layer in take-back, repair, peer resale, Tier 2 AI. Soft launch the loop.</a:t>
-            </a:r>
-          </a:p>
-        </p:txBody>
-      </p:sp>
-      <p:sp>
-        <p:nvSpPr>
-          <p:cNvPr id="22" name="Rounded Rectangle 21"/>
+          <p:cNvPr id="17" name="Rounded Rectangle 16"/>
           <p:cNvSpPr/>
           <p:nvPr/>
         </p:nvSpPr>
         <p:spPr>
           <a:xfrm>
-            <a:off x="10195560" y="2651760"/>
-            <a:ext cx="182880" cy="182880"/>
+            <a:off x="6172200" y="4754880"/>
+            <a:ext cx="5440680" cy="365760"/>
           </a:xfrm>
           <a:prstGeom prst="roundRect">
             <a:avLst>
@@ -14798,7 +14604,7 @@
             </a:avLst>
           </a:prstGeom>
           <a:solidFill>
-            <a:srgbClr val="2F4A36"/>
+            <a:srgbClr val="1F1D18"/>
           </a:solidFill>
           <a:ln>
             <a:noFill/>
@@ -14829,70 +14635,22 @@
       </p:sp>
       <p:sp>
         <p:nvSpPr>
-          <p:cNvPr id="23" name="Rounded Rectangle 22"/>
-          <p:cNvSpPr/>
-          <p:nvPr/>
-        </p:nvSpPr>
-        <p:spPr>
-          <a:xfrm>
-            <a:off x="8915400" y="3063240"/>
-            <a:ext cx="2743200" cy="3291840"/>
-          </a:xfrm>
-          <a:prstGeom prst="roundRect">
-            <a:avLst>
-              <a:gd name="adj" fmla="val 12000"/>
-            </a:avLst>
-          </a:prstGeom>
-          <a:solidFill>
-            <a:srgbClr val="FFFFFF"/>
-          </a:solidFill>
-          <a:ln w="9525">
-            <a:solidFill>
-              <a:srgbClr val="D9D2C4"/>
-            </a:solidFill>
-          </a:ln>
-          <a:effectLst/>
-        </p:spPr>
-        <p:style>
-          <a:lnRef idx="1">
-            <a:schemeClr val="accent1"/>
-          </a:lnRef>
-          <a:fillRef idx="3">
-            <a:schemeClr val="accent1"/>
-          </a:fillRef>
-          <a:effectRef idx="2">
-            <a:schemeClr val="accent1"/>
-          </a:effectRef>
-          <a:fontRef idx="minor">
-            <a:schemeClr val="lt1"/>
-          </a:fontRef>
-        </p:style>
-        <p:txBody>
-          <a:bodyPr rtlCol="0" anchor="ctr"/>
-          <a:lstStyle/>
-          <a:p>
-            <a:pPr algn="ctr"/>
-          </a:p>
-        </p:txBody>
-      </p:sp>
-      <p:sp>
-        <p:nvSpPr>
-          <p:cNvPr id="24" name="TextBox 23"/>
-          <p:cNvSpPr txBox="1"/>
-          <p:nvPr/>
-        </p:nvSpPr>
-        <p:spPr>
-          <a:xfrm>
-            <a:off x="9189720" y="3200400"/>
-            <a:ext cx="2194560" cy="365760"/>
-          </a:xfrm>
-          <a:prstGeom prst="rect">
-            <a:avLst/>
-          </a:prstGeom>
-          <a:noFill/>
-        </p:spPr>
-        <p:txBody>
-          <a:bodyPr wrap="square" lIns="0" rIns="0" tIns="0" bIns="0" anchor="t">
+          <p:cNvPr id="18" name="TextBox 17"/>
+          <p:cNvSpPr txBox="1"/>
+          <p:nvPr/>
+        </p:nvSpPr>
+        <p:spPr>
+          <a:xfrm>
+            <a:off x="6400800" y="4773168"/>
+            <a:ext cx="4983480" cy="365760"/>
+          </a:xfrm>
+          <a:prstGeom prst="rect">
+            <a:avLst/>
+          </a:prstGeom>
+          <a:noFill/>
+        </p:spPr>
+        <p:txBody>
+          <a:bodyPr wrap="square" lIns="0" rIns="0" tIns="0" bIns="0" anchor="ctr">
             <a:spAutoFit/>
           </a:bodyPr>
           <a:lstStyle/>
@@ -14901,88 +14659,88 @@
             <a:r>
               <a:rPr sz="1000" b="1">
                 <a:solidFill>
+                  <a:srgbClr val="FFFFFF"/>
+                </a:solidFill>
+                <a:latin typeface="Calibri"/>
+              </a:rPr>
+              <a:t>THE STUDIO — WEB ADMIN PORTAL</a:t>
+            </a:r>
+          </a:p>
+        </p:txBody>
+      </p:sp>
+      <p:sp>
+        <p:nvSpPr>
+          <p:cNvPr id="19" name="TextBox 18"/>
+          <p:cNvSpPr txBox="1"/>
+          <p:nvPr/>
+        </p:nvSpPr>
+        <p:spPr>
+          <a:xfrm>
+            <a:off x="6400800" y="5212080"/>
+            <a:ext cx="4983480" cy="914400"/>
+          </a:xfrm>
+          <a:prstGeom prst="rect">
+            <a:avLst/>
+          </a:prstGeom>
+          <a:noFill/>
+        </p:spPr>
+        <p:txBody>
+          <a:bodyPr wrap="square" lIns="0" rIns="0" tIns="0" bIns="0" anchor="t">
+            <a:spAutoFit/>
+          </a:bodyPr>
+          <a:lstStyle/>
+          <a:p>
+            <a:pPr algn="l"/>
+            <a:r>
+              <a:rPr sz="1100" b="0">
+                <a:solidFill>
+                  <a:srgbClr val="1F1D18"/>
+                </a:solidFill>
+                <a:latin typeface="Calibri"/>
+              </a:rPr>
+              <a:t>Internal · Passport editor · take-back queue · repair queue · resale listings · loyalty admin · sustainability report</a:t>
+            </a:r>
+          </a:p>
+        </p:txBody>
+      </p:sp>
+      <p:sp>
+        <p:nvSpPr>
+          <p:cNvPr id="20" name="TextBox 19"/>
+          <p:cNvSpPr txBox="1"/>
+          <p:nvPr/>
+        </p:nvSpPr>
+        <p:spPr>
+          <a:xfrm>
+            <a:off x="548640" y="6400800"/>
+            <a:ext cx="10972800" cy="365760"/>
+          </a:xfrm>
+          <a:prstGeom prst="rect">
+            <a:avLst/>
+          </a:prstGeom>
+          <a:noFill/>
+        </p:spPr>
+        <p:txBody>
+          <a:bodyPr wrap="square" lIns="0" rIns="0" tIns="0" bIns="0" anchor="t">
+            <a:spAutoFit/>
+          </a:bodyPr>
+          <a:lstStyle/>
+          <a:p>
+            <a:pPr algn="l"/>
+            <a:r>
+              <a:rPr sz="1000" b="1">
+                <a:solidFill>
                   <a:srgbClr val="2F4A36"/>
                 </a:solidFill>
                 <a:latin typeface="Calibri"/>
               </a:rPr>
-              <a:t>Weeks 27–36+</a:t>
-            </a:r>
-          </a:p>
-        </p:txBody>
-      </p:sp>
-      <p:sp>
-        <p:nvSpPr>
-          <p:cNvPr id="25" name="TextBox 24"/>
-          <p:cNvSpPr txBox="1"/>
-          <p:nvPr/>
-        </p:nvSpPr>
-        <p:spPr>
-          <a:xfrm>
-            <a:off x="9189720" y="3566160"/>
-            <a:ext cx="2194560" cy="548640"/>
-          </a:xfrm>
-          <a:prstGeom prst="rect">
-            <a:avLst/>
-          </a:prstGeom>
-          <a:noFill/>
-        </p:spPr>
-        <p:txBody>
-          <a:bodyPr wrap="square" lIns="0" rIns="0" tIns="0" bIns="0" anchor="t">
-            <a:spAutoFit/>
-          </a:bodyPr>
-          <a:lstStyle/>
-          <a:p>
-            <a:pPr algn="l"/>
-            <a:r>
-              <a:rPr sz="2200" b="0">
-                <a:solidFill>
-                  <a:srgbClr val="1F1D18"/>
-                </a:solidFill>
-                <a:latin typeface="Georgia"/>
-              </a:rPr>
-              <a:t>Phase 3 build</a:t>
-            </a:r>
-          </a:p>
-        </p:txBody>
-      </p:sp>
-      <p:sp>
-        <p:nvSpPr>
-          <p:cNvPr id="26" name="TextBox 25"/>
-          <p:cNvSpPr txBox="1"/>
-          <p:nvPr/>
-        </p:nvSpPr>
-        <p:spPr>
-          <a:xfrm>
-            <a:off x="9189720" y="4389120"/>
-            <a:ext cx="2194560" cy="1828800"/>
-          </a:xfrm>
-          <a:prstGeom prst="rect">
-            <a:avLst/>
-          </a:prstGeom>
-          <a:noFill/>
-        </p:spPr>
-        <p:txBody>
-          <a:bodyPr wrap="square" lIns="0" rIns="0" tIns="0" bIns="0" anchor="t">
-            <a:spAutoFit/>
-          </a:bodyPr>
-          <a:lstStyle/>
-          <a:p>
-            <a:pPr algn="l"/>
-            <a:r>
-              <a:rPr sz="1200" b="0">
-                <a:solidFill>
-                  <a:srgbClr val="6B665C"/>
-                </a:solidFill>
-                <a:latin typeface="Calibri"/>
-              </a:rPr>
-              <a:t>Community, events, swap circles, ongoing optimisation.</a:t>
-            </a:r>
-          </a:p>
-        </p:txBody>
-      </p:sp>
-      <p:sp>
-        <p:nvSpPr>
-          <p:cNvPr id="27" name="TextBox 26"/>
+              <a:t>BUILT FOR YOUR TEAM   —   editors, ops, customer concierge, analysts. Audit-ready sustainability data for marketing &amp; regulators.</a:t>
+            </a:r>
+          </a:p>
+        </p:txBody>
+      </p:sp>
+      <p:sp>
+        <p:nvSpPr>
+          <p:cNvPr id="21" name="TextBox 20"/>
           <p:cNvSpPr txBox="1"/>
           <p:nvPr/>
         </p:nvSpPr>
@@ -15017,7 +14775,7 @@
       </p:sp>
       <p:sp>
         <p:nvSpPr>
-          <p:cNvPr id="28" name="TextBox 27"/>
+          <p:cNvPr id="22" name="TextBox 21"/>
           <p:cNvSpPr txBox="1"/>
           <p:nvPr/>
         </p:nvSpPr>
@@ -15045,7 +14803,7 @@
                 </a:solidFill>
                 <a:latin typeface="Calibri"/>
               </a:rPr>
-              <a:t>17 / 22</a:t>
+              <a:t>17 / 23</a:t>
             </a:r>
           </a:p>
         </p:txBody>
@@ -15142,7 +14900,7 @@
                 </a:solidFill>
                 <a:latin typeface="Calibri"/>
               </a:rPr>
-              <a:t>HOW WE'LL KNOW IT'S WORKING</a:t>
+              <a:t>HOW WE'LL DELIVER</a:t>
             </a:r>
           </a:p>
         </p:txBody>
@@ -15177,7 +14935,7 @@
                 </a:solidFill>
                 <a:latin typeface="Georgia"/>
               </a:rPr>
-              <a:t>The metrics that matter.</a:t>
+              <a:t>Roadmap — first nine months.</a:t>
             </a:r>
           </a:p>
         </p:txBody>
@@ -15227,14 +14985,104 @@
       </p:sp>
       <p:sp>
         <p:nvSpPr>
-          <p:cNvPr id="6" name="Rounded Rectangle 5"/>
+          <p:cNvPr id="6" name="Rectangle 5"/>
           <p:cNvSpPr/>
           <p:nvPr/>
         </p:nvSpPr>
         <p:spPr>
           <a:xfrm>
-            <a:off x="548640" y="2560320"/>
-            <a:ext cx="3657600" cy="1828800"/>
+            <a:off x="548640" y="2743200"/>
+            <a:ext cx="11064240" cy="25400"/>
+          </a:xfrm>
+          <a:prstGeom prst="rect">
+            <a:avLst/>
+          </a:prstGeom>
+          <a:solidFill>
+            <a:srgbClr val="D9D2C4"/>
+          </a:solidFill>
+          <a:ln>
+            <a:noFill/>
+          </a:ln>
+          <a:effectLst/>
+        </p:spPr>
+        <p:style>
+          <a:lnRef idx="1">
+            <a:schemeClr val="accent1"/>
+          </a:lnRef>
+          <a:fillRef idx="3">
+            <a:schemeClr val="accent1"/>
+          </a:fillRef>
+          <a:effectRef idx="2">
+            <a:schemeClr val="accent1"/>
+          </a:effectRef>
+          <a:fontRef idx="minor">
+            <a:schemeClr val="lt1"/>
+          </a:fontRef>
+        </p:style>
+        <p:txBody>
+          <a:bodyPr rtlCol="0" anchor="ctr"/>
+          <a:lstStyle/>
+          <a:p>
+            <a:pPr algn="ctr"/>
+          </a:p>
+        </p:txBody>
+      </p:sp>
+      <p:sp>
+        <p:nvSpPr>
+          <p:cNvPr id="7" name="Rounded Rectangle 6"/>
+          <p:cNvSpPr/>
+          <p:nvPr/>
+        </p:nvSpPr>
+        <p:spPr>
+          <a:xfrm>
+            <a:off x="1828800" y="2651760"/>
+            <a:ext cx="182880" cy="182880"/>
+          </a:xfrm>
+          <a:prstGeom prst="roundRect">
+            <a:avLst>
+              <a:gd name="adj" fmla="val 12000"/>
+            </a:avLst>
+          </a:prstGeom>
+          <a:solidFill>
+            <a:srgbClr val="2F4A36"/>
+          </a:solidFill>
+          <a:ln>
+            <a:noFill/>
+          </a:ln>
+          <a:effectLst/>
+        </p:spPr>
+        <p:style>
+          <a:lnRef idx="1">
+            <a:schemeClr val="accent1"/>
+          </a:lnRef>
+          <a:fillRef idx="3">
+            <a:schemeClr val="accent1"/>
+          </a:fillRef>
+          <a:effectRef idx="2">
+            <a:schemeClr val="accent1"/>
+          </a:effectRef>
+          <a:fontRef idx="minor">
+            <a:schemeClr val="lt1"/>
+          </a:fontRef>
+        </p:style>
+        <p:txBody>
+          <a:bodyPr rtlCol="0" anchor="ctr"/>
+          <a:lstStyle/>
+          <a:p>
+            <a:pPr algn="ctr"/>
+          </a:p>
+        </p:txBody>
+      </p:sp>
+      <p:sp>
+        <p:nvSpPr>
+          <p:cNvPr id="8" name="Rounded Rectangle 7"/>
+          <p:cNvSpPr/>
+          <p:nvPr/>
+        </p:nvSpPr>
+        <p:spPr>
+          <a:xfrm>
+            <a:off x="548640" y="3063240"/>
+            <a:ext cx="2743200" cy="3291840"/>
           </a:xfrm>
           <a:prstGeom prst="roundRect">
             <a:avLst>
@@ -15275,119 +15123,165 @@
       </p:sp>
       <p:sp>
         <p:nvSpPr>
-          <p:cNvPr id="7" name="TextBox 6"/>
-          <p:cNvSpPr txBox="1"/>
-          <p:nvPr/>
-        </p:nvSpPr>
-        <p:spPr>
-          <a:xfrm>
-            <a:off x="822960" y="2743200"/>
-            <a:ext cx="3108960" cy="365760"/>
-          </a:xfrm>
-          <a:prstGeom prst="rect">
-            <a:avLst/>
-          </a:prstGeom>
-          <a:noFill/>
-        </p:spPr>
-        <p:txBody>
-          <a:bodyPr wrap="square" lIns="0" rIns="0" tIns="0" bIns="0" anchor="t">
-            <a:spAutoFit/>
-          </a:bodyPr>
-          <a:lstStyle/>
-          <a:p>
-            <a:pPr algn="l"/>
-            <a:r>
-              <a:rPr sz="1400" b="1">
+          <p:cNvPr id="9" name="TextBox 8"/>
+          <p:cNvSpPr txBox="1"/>
+          <p:nvPr/>
+        </p:nvSpPr>
+        <p:spPr>
+          <a:xfrm>
+            <a:off x="822960" y="3200400"/>
+            <a:ext cx="2194560" cy="365760"/>
+          </a:xfrm>
+          <a:prstGeom prst="rect">
+            <a:avLst/>
+          </a:prstGeom>
+          <a:noFill/>
+        </p:spPr>
+        <p:txBody>
+          <a:bodyPr wrap="square" lIns="0" rIns="0" tIns="0" bIns="0" anchor="t">
+            <a:spAutoFit/>
+          </a:bodyPr>
+          <a:lstStyle/>
+          <a:p>
+            <a:pPr algn="l"/>
+            <a:r>
+              <a:rPr sz="1000" b="1">
                 <a:solidFill>
                   <a:srgbClr val="2F4A36"/>
                 </a:solidFill>
                 <a:latin typeface="Calibri"/>
               </a:rPr>
-              <a:t>Activation</a:t>
-            </a:r>
-          </a:p>
-        </p:txBody>
-      </p:sp>
-      <p:sp>
-        <p:nvSpPr>
-          <p:cNvPr id="8" name="TextBox 7"/>
-          <p:cNvSpPr txBox="1"/>
-          <p:nvPr/>
-        </p:nvSpPr>
-        <p:spPr>
-          <a:xfrm>
-            <a:off x="822960" y="3154680"/>
-            <a:ext cx="3108960" cy="822960"/>
-          </a:xfrm>
-          <a:prstGeom prst="rect">
-            <a:avLst/>
-          </a:prstGeom>
-          <a:noFill/>
-        </p:spPr>
-        <p:txBody>
-          <a:bodyPr wrap="square" lIns="0" rIns="0" tIns="0" bIns="0" anchor="t">
-            <a:spAutoFit/>
-          </a:bodyPr>
-          <a:lstStyle/>
-          <a:p>
-            <a:pPr algn="l"/>
-            <a:r>
-              <a:rPr sz="1100" b="0">
+              <a:t>Weeks 1–2</a:t>
+            </a:r>
+          </a:p>
+        </p:txBody>
+      </p:sp>
+      <p:sp>
+        <p:nvSpPr>
+          <p:cNvPr id="10" name="TextBox 9"/>
+          <p:cNvSpPr txBox="1"/>
+          <p:nvPr/>
+        </p:nvSpPr>
+        <p:spPr>
+          <a:xfrm>
+            <a:off x="822960" y="3566160"/>
+            <a:ext cx="2194560" cy="548640"/>
+          </a:xfrm>
+          <a:prstGeom prst="rect">
+            <a:avLst/>
+          </a:prstGeom>
+          <a:noFill/>
+        </p:spPr>
+        <p:txBody>
+          <a:bodyPr wrap="square" lIns="0" rIns="0" tIns="0" bIns="0" anchor="t">
+            <a:spAutoFit/>
+          </a:bodyPr>
+          <a:lstStyle/>
+          <a:p>
+            <a:pPr algn="l"/>
+            <a:r>
+              <a:rPr sz="2200" b="0">
+                <a:solidFill>
+                  <a:srgbClr val="1F1D18"/>
+                </a:solidFill>
+                <a:latin typeface="Georgia"/>
+              </a:rPr>
+              <a:t>Discovery</a:t>
+            </a:r>
+          </a:p>
+        </p:txBody>
+      </p:sp>
+      <p:sp>
+        <p:nvSpPr>
+          <p:cNvPr id="11" name="TextBox 10"/>
+          <p:cNvSpPr txBox="1"/>
+          <p:nvPr/>
+        </p:nvSpPr>
+        <p:spPr>
+          <a:xfrm>
+            <a:off x="822960" y="4389120"/>
+            <a:ext cx="2194560" cy="1828800"/>
+          </a:xfrm>
+          <a:prstGeom prst="rect">
+            <a:avLst/>
+          </a:prstGeom>
+          <a:noFill/>
+        </p:spPr>
+        <p:txBody>
+          <a:bodyPr wrap="square" lIns="0" rIns="0" tIns="0" bIns="0" anchor="t">
+            <a:spAutoFit/>
+          </a:bodyPr>
+          <a:lstStyle/>
+          <a:p>
+            <a:pPr algn="l"/>
+            <a:r>
+              <a:rPr sz="1200" b="0">
                 <a:solidFill>
                   <a:srgbClr val="6B665C"/>
                 </a:solidFill>
                 <a:latin typeface="Calibri"/>
               </a:rPr>
-              <a:t>% of buyers who install the app and register at least one garment in 30 days</a:t>
-            </a:r>
-          </a:p>
-        </p:txBody>
-      </p:sp>
-      <p:sp>
-        <p:nvSpPr>
-          <p:cNvPr id="9" name="TextBox 8"/>
-          <p:cNvSpPr txBox="1"/>
-          <p:nvPr/>
-        </p:nvSpPr>
-        <p:spPr>
-          <a:xfrm>
-            <a:off x="822960" y="3931920"/>
-            <a:ext cx="3108960" cy="365760"/>
-          </a:xfrm>
-          <a:prstGeom prst="rect">
-            <a:avLst/>
-          </a:prstGeom>
-          <a:noFill/>
-        </p:spPr>
-        <p:txBody>
-          <a:bodyPr wrap="square" lIns="0" rIns="0" tIns="0" bIns="0" anchor="t">
-            <a:spAutoFit/>
-          </a:bodyPr>
-          <a:lstStyle/>
-          <a:p>
-            <a:pPr algn="l"/>
-            <a:r>
-              <a:rPr sz="1400" b="0">
-                <a:solidFill>
-                  <a:srgbClr val="1F1D18"/>
-                </a:solidFill>
-                <a:latin typeface="Georgia"/>
-              </a:rPr>
-              <a:t>Target ≥ 35% by month 6</a:t>
-            </a:r>
-          </a:p>
-        </p:txBody>
-      </p:sp>
-      <p:sp>
-        <p:nvSpPr>
-          <p:cNvPr id="10" name="Rounded Rectangle 9"/>
+              <a:t>Audit current data, interview customers, lock Phase 1 scope, design system kickoff.</a:t>
+            </a:r>
+          </a:p>
+        </p:txBody>
+      </p:sp>
+      <p:sp>
+        <p:nvSpPr>
+          <p:cNvPr id="12" name="Rounded Rectangle 11"/>
           <p:cNvSpPr/>
           <p:nvPr/>
         </p:nvSpPr>
         <p:spPr>
           <a:xfrm>
-            <a:off x="4297680" y="2560320"/>
-            <a:ext cx="3657600" cy="1828800"/>
+            <a:off x="4617720" y="2651760"/>
+            <a:ext cx="182880" cy="182880"/>
+          </a:xfrm>
+          <a:prstGeom prst="roundRect">
+            <a:avLst>
+              <a:gd name="adj" fmla="val 12000"/>
+            </a:avLst>
+          </a:prstGeom>
+          <a:solidFill>
+            <a:srgbClr val="2F4A36"/>
+          </a:solidFill>
+          <a:ln>
+            <a:noFill/>
+          </a:ln>
+          <a:effectLst/>
+        </p:spPr>
+        <p:style>
+          <a:lnRef idx="1">
+            <a:schemeClr val="accent1"/>
+          </a:lnRef>
+          <a:fillRef idx="3">
+            <a:schemeClr val="accent1"/>
+          </a:fillRef>
+          <a:effectRef idx="2">
+            <a:schemeClr val="accent1"/>
+          </a:effectRef>
+          <a:fontRef idx="minor">
+            <a:schemeClr val="lt1"/>
+          </a:fontRef>
+        </p:style>
+        <p:txBody>
+          <a:bodyPr rtlCol="0" anchor="ctr"/>
+          <a:lstStyle/>
+          <a:p>
+            <a:pPr algn="ctr"/>
+          </a:p>
+        </p:txBody>
+      </p:sp>
+      <p:sp>
+        <p:nvSpPr>
+          <p:cNvPr id="13" name="Rounded Rectangle 12"/>
+          <p:cNvSpPr/>
+          <p:nvPr/>
+        </p:nvSpPr>
+        <p:spPr>
+          <a:xfrm>
+            <a:off x="3337560" y="3063240"/>
+            <a:ext cx="2743200" cy="3291840"/>
           </a:xfrm>
           <a:prstGeom prst="roundRect">
             <a:avLst>
@@ -15428,119 +15322,165 @@
       </p:sp>
       <p:sp>
         <p:nvSpPr>
-          <p:cNvPr id="11" name="TextBox 10"/>
-          <p:cNvSpPr txBox="1"/>
-          <p:nvPr/>
-        </p:nvSpPr>
-        <p:spPr>
-          <a:xfrm>
-            <a:off x="4572000" y="2743200"/>
-            <a:ext cx="3108960" cy="365760"/>
-          </a:xfrm>
-          <a:prstGeom prst="rect">
-            <a:avLst/>
-          </a:prstGeom>
-          <a:noFill/>
-        </p:spPr>
-        <p:txBody>
-          <a:bodyPr wrap="square" lIns="0" rIns="0" tIns="0" bIns="0" anchor="t">
-            <a:spAutoFit/>
-          </a:bodyPr>
-          <a:lstStyle/>
-          <a:p>
-            <a:pPr algn="l"/>
-            <a:r>
-              <a:rPr sz="1400" b="1">
+          <p:cNvPr id="14" name="TextBox 13"/>
+          <p:cNvSpPr txBox="1"/>
+          <p:nvPr/>
+        </p:nvSpPr>
+        <p:spPr>
+          <a:xfrm>
+            <a:off x="3611880" y="3200400"/>
+            <a:ext cx="2194560" cy="365760"/>
+          </a:xfrm>
+          <a:prstGeom prst="rect">
+            <a:avLst/>
+          </a:prstGeom>
+          <a:noFill/>
+        </p:spPr>
+        <p:txBody>
+          <a:bodyPr wrap="square" lIns="0" rIns="0" tIns="0" bIns="0" anchor="t">
+            <a:spAutoFit/>
+          </a:bodyPr>
+          <a:lstStyle/>
+          <a:p>
+            <a:pPr algn="l"/>
+            <a:r>
+              <a:rPr sz="1000" b="1">
                 <a:solidFill>
                   <a:srgbClr val="2F4A36"/>
                 </a:solidFill>
                 <a:latin typeface="Calibri"/>
               </a:rPr>
-              <a:t>Repeat rate</a:t>
-            </a:r>
-          </a:p>
-        </p:txBody>
-      </p:sp>
-      <p:sp>
-        <p:nvSpPr>
-          <p:cNvPr id="12" name="TextBox 11"/>
-          <p:cNvSpPr txBox="1"/>
-          <p:nvPr/>
-        </p:nvSpPr>
-        <p:spPr>
-          <a:xfrm>
-            <a:off x="4572000" y="3154680"/>
-            <a:ext cx="3108960" cy="822960"/>
-          </a:xfrm>
-          <a:prstGeom prst="rect">
-            <a:avLst/>
-          </a:prstGeom>
-          <a:noFill/>
-        </p:spPr>
-        <p:txBody>
-          <a:bodyPr wrap="square" lIns="0" rIns="0" tIns="0" bIns="0" anchor="t">
-            <a:spAutoFit/>
-          </a:bodyPr>
-          <a:lstStyle/>
-          <a:p>
-            <a:pPr algn="l"/>
-            <a:r>
-              <a:rPr sz="1100" b="0">
+              <a:t>Weeks 3–14</a:t>
+            </a:r>
+          </a:p>
+        </p:txBody>
+      </p:sp>
+      <p:sp>
+        <p:nvSpPr>
+          <p:cNvPr id="15" name="TextBox 14"/>
+          <p:cNvSpPr txBox="1"/>
+          <p:nvPr/>
+        </p:nvSpPr>
+        <p:spPr>
+          <a:xfrm>
+            <a:off x="3611880" y="3566160"/>
+            <a:ext cx="2194560" cy="548640"/>
+          </a:xfrm>
+          <a:prstGeom prst="rect">
+            <a:avLst/>
+          </a:prstGeom>
+          <a:noFill/>
+        </p:spPr>
+        <p:txBody>
+          <a:bodyPr wrap="square" lIns="0" rIns="0" tIns="0" bIns="0" anchor="t">
+            <a:spAutoFit/>
+          </a:bodyPr>
+          <a:lstStyle/>
+          <a:p>
+            <a:pPr algn="l"/>
+            <a:r>
+              <a:rPr sz="2200" b="0">
+                <a:solidFill>
+                  <a:srgbClr val="1F1D18"/>
+                </a:solidFill>
+                <a:latin typeface="Georgia"/>
+              </a:rPr>
+              <a:t>Phase 1 build</a:t>
+            </a:r>
+          </a:p>
+        </p:txBody>
+      </p:sp>
+      <p:sp>
+        <p:nvSpPr>
+          <p:cNvPr id="16" name="TextBox 15"/>
+          <p:cNvSpPr txBox="1"/>
+          <p:nvPr/>
+        </p:nvSpPr>
+        <p:spPr>
+          <a:xfrm>
+            <a:off x="3611880" y="4389120"/>
+            <a:ext cx="2194560" cy="1828800"/>
+          </a:xfrm>
+          <a:prstGeom prst="rect">
+            <a:avLst/>
+          </a:prstGeom>
+          <a:noFill/>
+        </p:spPr>
+        <p:txBody>
+          <a:bodyPr wrap="square" lIns="0" rIns="0" tIns="0" bIns="0" anchor="t">
+            <a:spAutoFit/>
+          </a:bodyPr>
+          <a:lstStyle/>
+          <a:p>
+            <a:pPr algn="l"/>
+            <a:r>
+              <a:rPr sz="1200" b="0">
                 <a:solidFill>
                   <a:srgbClr val="6B665C"/>
                 </a:solidFill>
                 <a:latin typeface="Calibri"/>
               </a:rPr>
-              <a:t>% of app users who place a second order within 90 days</a:t>
-            </a:r>
-          </a:p>
-        </p:txBody>
-      </p:sp>
-      <p:sp>
-        <p:nvSpPr>
-          <p:cNvPr id="13" name="TextBox 12"/>
-          <p:cNvSpPr txBox="1"/>
-          <p:nvPr/>
-        </p:nvSpPr>
-        <p:spPr>
-          <a:xfrm>
-            <a:off x="4572000" y="3931920"/>
-            <a:ext cx="3108960" cy="365760"/>
-          </a:xfrm>
-          <a:prstGeom prst="rect">
-            <a:avLst/>
-          </a:prstGeom>
-          <a:noFill/>
-        </p:spPr>
-        <p:txBody>
-          <a:bodyPr wrap="square" lIns="0" rIns="0" tIns="0" bIns="0" anchor="t">
-            <a:spAutoFit/>
-          </a:bodyPr>
-          <a:lstStyle/>
-          <a:p>
-            <a:pPr algn="l"/>
-            <a:r>
-              <a:rPr sz="1400" b="0">
-                <a:solidFill>
-                  <a:srgbClr val="1F1D18"/>
-                </a:solidFill>
-                <a:latin typeface="Georgia"/>
-              </a:rPr>
-              <a:t>Target +25% vs. non-app cohort</a:t>
-            </a:r>
-          </a:p>
-        </p:txBody>
-      </p:sp>
-      <p:sp>
-        <p:nvSpPr>
-          <p:cNvPr id="14" name="Rounded Rectangle 13"/>
+              <a:t>Ship the foundation app: shop, closet, passport, rewards, Tier 1 AI. Launch in week 14.</a:t>
+            </a:r>
+          </a:p>
+        </p:txBody>
+      </p:sp>
+      <p:sp>
+        <p:nvSpPr>
+          <p:cNvPr id="17" name="Rounded Rectangle 16"/>
           <p:cNvSpPr/>
           <p:nvPr/>
         </p:nvSpPr>
         <p:spPr>
           <a:xfrm>
-            <a:off x="8046720" y="2560320"/>
-            <a:ext cx="3657600" cy="1828800"/>
+            <a:off x="7406640" y="2651760"/>
+            <a:ext cx="182880" cy="182880"/>
+          </a:xfrm>
+          <a:prstGeom prst="roundRect">
+            <a:avLst>
+              <a:gd name="adj" fmla="val 12000"/>
+            </a:avLst>
+          </a:prstGeom>
+          <a:solidFill>
+            <a:srgbClr val="2F4A36"/>
+          </a:solidFill>
+          <a:ln>
+            <a:noFill/>
+          </a:ln>
+          <a:effectLst/>
+        </p:spPr>
+        <p:style>
+          <a:lnRef idx="1">
+            <a:schemeClr val="accent1"/>
+          </a:lnRef>
+          <a:fillRef idx="3">
+            <a:schemeClr val="accent1"/>
+          </a:fillRef>
+          <a:effectRef idx="2">
+            <a:schemeClr val="accent1"/>
+          </a:effectRef>
+          <a:fontRef idx="minor">
+            <a:schemeClr val="lt1"/>
+          </a:fontRef>
+        </p:style>
+        <p:txBody>
+          <a:bodyPr rtlCol="0" anchor="ctr"/>
+          <a:lstStyle/>
+          <a:p>
+            <a:pPr algn="ctr"/>
+          </a:p>
+        </p:txBody>
+      </p:sp>
+      <p:sp>
+        <p:nvSpPr>
+          <p:cNvPr id="18" name="Rounded Rectangle 17"/>
+          <p:cNvSpPr/>
+          <p:nvPr/>
+        </p:nvSpPr>
+        <p:spPr>
+          <a:xfrm>
+            <a:off x="6126480" y="3063240"/>
+            <a:ext cx="2743200" cy="3291840"/>
           </a:xfrm>
           <a:prstGeom prst="roundRect">
             <a:avLst>
@@ -15581,119 +15521,165 @@
       </p:sp>
       <p:sp>
         <p:nvSpPr>
-          <p:cNvPr id="15" name="TextBox 14"/>
-          <p:cNvSpPr txBox="1"/>
-          <p:nvPr/>
-        </p:nvSpPr>
-        <p:spPr>
-          <a:xfrm>
-            <a:off x="8321040" y="2743200"/>
-            <a:ext cx="3108960" cy="365760"/>
-          </a:xfrm>
-          <a:prstGeom prst="rect">
-            <a:avLst/>
-          </a:prstGeom>
-          <a:noFill/>
-        </p:spPr>
-        <p:txBody>
-          <a:bodyPr wrap="square" lIns="0" rIns="0" tIns="0" bIns="0" anchor="t">
-            <a:spAutoFit/>
-          </a:bodyPr>
-          <a:lstStyle/>
-          <a:p>
-            <a:pPr algn="l"/>
-            <a:r>
-              <a:rPr sz="1400" b="1">
+          <p:cNvPr id="19" name="TextBox 18"/>
+          <p:cNvSpPr txBox="1"/>
+          <p:nvPr/>
+        </p:nvSpPr>
+        <p:spPr>
+          <a:xfrm>
+            <a:off x="6400800" y="3200400"/>
+            <a:ext cx="2194560" cy="365760"/>
+          </a:xfrm>
+          <a:prstGeom prst="rect">
+            <a:avLst/>
+          </a:prstGeom>
+          <a:noFill/>
+        </p:spPr>
+        <p:txBody>
+          <a:bodyPr wrap="square" lIns="0" rIns="0" tIns="0" bIns="0" anchor="t">
+            <a:spAutoFit/>
+          </a:bodyPr>
+          <a:lstStyle/>
+          <a:p>
+            <a:pPr algn="l"/>
+            <a:r>
+              <a:rPr sz="1000" b="1">
                 <a:solidFill>
                   <a:srgbClr val="2F4A36"/>
                 </a:solidFill>
                 <a:latin typeface="Calibri"/>
               </a:rPr>
-              <a:t>Return rate</a:t>
-            </a:r>
-          </a:p>
-        </p:txBody>
-      </p:sp>
-      <p:sp>
-        <p:nvSpPr>
-          <p:cNvPr id="16" name="TextBox 15"/>
-          <p:cNvSpPr txBox="1"/>
-          <p:nvPr/>
-        </p:nvSpPr>
-        <p:spPr>
-          <a:xfrm>
-            <a:off x="8321040" y="3154680"/>
-            <a:ext cx="3108960" cy="822960"/>
-          </a:xfrm>
-          <a:prstGeom prst="rect">
-            <a:avLst/>
-          </a:prstGeom>
-          <a:noFill/>
-        </p:spPr>
-        <p:txBody>
-          <a:bodyPr wrap="square" lIns="0" rIns="0" tIns="0" bIns="0" anchor="t">
-            <a:spAutoFit/>
-          </a:bodyPr>
-          <a:lstStyle/>
-          <a:p>
-            <a:pPr algn="l"/>
-            <a:r>
-              <a:rPr sz="1100" b="0">
+              <a:t>Weeks 15–26</a:t>
+            </a:r>
+          </a:p>
+        </p:txBody>
+      </p:sp>
+      <p:sp>
+        <p:nvSpPr>
+          <p:cNvPr id="20" name="TextBox 19"/>
+          <p:cNvSpPr txBox="1"/>
+          <p:nvPr/>
+        </p:nvSpPr>
+        <p:spPr>
+          <a:xfrm>
+            <a:off x="6400800" y="3566160"/>
+            <a:ext cx="2194560" cy="548640"/>
+          </a:xfrm>
+          <a:prstGeom prst="rect">
+            <a:avLst/>
+          </a:prstGeom>
+          <a:noFill/>
+        </p:spPr>
+        <p:txBody>
+          <a:bodyPr wrap="square" lIns="0" rIns="0" tIns="0" bIns="0" anchor="t">
+            <a:spAutoFit/>
+          </a:bodyPr>
+          <a:lstStyle/>
+          <a:p>
+            <a:pPr algn="l"/>
+            <a:r>
+              <a:rPr sz="2200" b="0">
+                <a:solidFill>
+                  <a:srgbClr val="1F1D18"/>
+                </a:solidFill>
+                <a:latin typeface="Georgia"/>
+              </a:rPr>
+              <a:t>Phase 2 build</a:t>
+            </a:r>
+          </a:p>
+        </p:txBody>
+      </p:sp>
+      <p:sp>
+        <p:nvSpPr>
+          <p:cNvPr id="21" name="TextBox 20"/>
+          <p:cNvSpPr txBox="1"/>
+          <p:nvPr/>
+        </p:nvSpPr>
+        <p:spPr>
+          <a:xfrm>
+            <a:off x="6400800" y="4389120"/>
+            <a:ext cx="2194560" cy="1828800"/>
+          </a:xfrm>
+          <a:prstGeom prst="rect">
+            <a:avLst/>
+          </a:prstGeom>
+          <a:noFill/>
+        </p:spPr>
+        <p:txBody>
+          <a:bodyPr wrap="square" lIns="0" rIns="0" tIns="0" bIns="0" anchor="t">
+            <a:spAutoFit/>
+          </a:bodyPr>
+          <a:lstStyle/>
+          <a:p>
+            <a:pPr algn="l"/>
+            <a:r>
+              <a:rPr sz="1200" b="0">
                 <a:solidFill>
                   <a:srgbClr val="6B665C"/>
                 </a:solidFill>
                 <a:latin typeface="Calibri"/>
               </a:rPr>
-              <a:t>Returns / orders, app cohort vs. control</a:t>
-            </a:r>
-          </a:p>
-        </p:txBody>
-      </p:sp>
-      <p:sp>
-        <p:nvSpPr>
-          <p:cNvPr id="17" name="TextBox 16"/>
-          <p:cNvSpPr txBox="1"/>
-          <p:nvPr/>
-        </p:nvSpPr>
-        <p:spPr>
-          <a:xfrm>
-            <a:off x="8321040" y="3931920"/>
-            <a:ext cx="3108960" cy="365760"/>
-          </a:xfrm>
-          <a:prstGeom prst="rect">
-            <a:avLst/>
-          </a:prstGeom>
-          <a:noFill/>
-        </p:spPr>
-        <p:txBody>
-          <a:bodyPr wrap="square" lIns="0" rIns="0" tIns="0" bIns="0" anchor="t">
-            <a:spAutoFit/>
-          </a:bodyPr>
-          <a:lstStyle/>
-          <a:p>
-            <a:pPr algn="l"/>
-            <a:r>
-              <a:rPr sz="1400" b="0">
-                <a:solidFill>
-                  <a:srgbClr val="1F1D18"/>
-                </a:solidFill>
-                <a:latin typeface="Georgia"/>
-              </a:rPr>
-              <a:t>Target -20% on app users with fit assistant</a:t>
-            </a:r>
-          </a:p>
-        </p:txBody>
-      </p:sp>
-      <p:sp>
-        <p:nvSpPr>
-          <p:cNvPr id="18" name="Rounded Rectangle 17"/>
+              <a:t>Layer in take-back, repair, peer resale, Tier 2 AI. Soft launch the loop.</a:t>
+            </a:r>
+          </a:p>
+        </p:txBody>
+      </p:sp>
+      <p:sp>
+        <p:nvSpPr>
+          <p:cNvPr id="22" name="Rounded Rectangle 21"/>
           <p:cNvSpPr/>
           <p:nvPr/>
         </p:nvSpPr>
         <p:spPr>
           <a:xfrm>
-            <a:off x="548640" y="4480560"/>
-            <a:ext cx="3657600" cy="1828800"/>
+            <a:off x="10195560" y="2651760"/>
+            <a:ext cx="182880" cy="182880"/>
+          </a:xfrm>
+          <a:prstGeom prst="roundRect">
+            <a:avLst>
+              <a:gd name="adj" fmla="val 12000"/>
+            </a:avLst>
+          </a:prstGeom>
+          <a:solidFill>
+            <a:srgbClr val="2F4A36"/>
+          </a:solidFill>
+          <a:ln>
+            <a:noFill/>
+          </a:ln>
+          <a:effectLst/>
+        </p:spPr>
+        <p:style>
+          <a:lnRef idx="1">
+            <a:schemeClr val="accent1"/>
+          </a:lnRef>
+          <a:fillRef idx="3">
+            <a:schemeClr val="accent1"/>
+          </a:fillRef>
+          <a:effectRef idx="2">
+            <a:schemeClr val="accent1"/>
+          </a:effectRef>
+          <a:fontRef idx="minor">
+            <a:schemeClr val="lt1"/>
+          </a:fontRef>
+        </p:style>
+        <p:txBody>
+          <a:bodyPr rtlCol="0" anchor="ctr"/>
+          <a:lstStyle/>
+          <a:p>
+            <a:pPr algn="ctr"/>
+          </a:p>
+        </p:txBody>
+      </p:sp>
+      <p:sp>
+        <p:nvSpPr>
+          <p:cNvPr id="23" name="Rounded Rectangle 22"/>
+          <p:cNvSpPr/>
+          <p:nvPr/>
+        </p:nvSpPr>
+        <p:spPr>
+          <a:xfrm>
+            <a:off x="8915400" y="3063240"/>
+            <a:ext cx="2743200" cy="3291840"/>
           </a:xfrm>
           <a:prstGeom prst="roundRect">
             <a:avLst>
@@ -15734,418 +15720,112 @@
       </p:sp>
       <p:sp>
         <p:nvSpPr>
-          <p:cNvPr id="19" name="TextBox 18"/>
-          <p:cNvSpPr txBox="1"/>
-          <p:nvPr/>
-        </p:nvSpPr>
-        <p:spPr>
-          <a:xfrm>
-            <a:off x="822960" y="4663440"/>
-            <a:ext cx="3108960" cy="365760"/>
-          </a:xfrm>
-          <a:prstGeom prst="rect">
-            <a:avLst/>
-          </a:prstGeom>
-          <a:noFill/>
-        </p:spPr>
-        <p:txBody>
-          <a:bodyPr wrap="square" lIns="0" rIns="0" tIns="0" bIns="0" anchor="t">
-            <a:spAutoFit/>
-          </a:bodyPr>
-          <a:lstStyle/>
-          <a:p>
-            <a:pPr algn="l"/>
-            <a:r>
-              <a:rPr sz="1400" b="1">
+          <p:cNvPr id="24" name="TextBox 23"/>
+          <p:cNvSpPr txBox="1"/>
+          <p:nvPr/>
+        </p:nvSpPr>
+        <p:spPr>
+          <a:xfrm>
+            <a:off x="9189720" y="3200400"/>
+            <a:ext cx="2194560" cy="365760"/>
+          </a:xfrm>
+          <a:prstGeom prst="rect">
+            <a:avLst/>
+          </a:prstGeom>
+          <a:noFill/>
+        </p:spPr>
+        <p:txBody>
+          <a:bodyPr wrap="square" lIns="0" rIns="0" tIns="0" bIns="0" anchor="t">
+            <a:spAutoFit/>
+          </a:bodyPr>
+          <a:lstStyle/>
+          <a:p>
+            <a:pPr algn="l"/>
+            <a:r>
+              <a:rPr sz="1000" b="1">
                 <a:solidFill>
                   <a:srgbClr val="2F4A36"/>
                 </a:solidFill>
                 <a:latin typeface="Calibri"/>
               </a:rPr>
-              <a:t>Closet depth</a:t>
-            </a:r>
-          </a:p>
-        </p:txBody>
-      </p:sp>
-      <p:sp>
-        <p:nvSpPr>
-          <p:cNvPr id="20" name="TextBox 19"/>
-          <p:cNvSpPr txBox="1"/>
-          <p:nvPr/>
-        </p:nvSpPr>
-        <p:spPr>
-          <a:xfrm>
-            <a:off x="822960" y="5074920"/>
-            <a:ext cx="3108960" cy="822960"/>
-          </a:xfrm>
-          <a:prstGeom prst="rect">
-            <a:avLst/>
-          </a:prstGeom>
-          <a:noFill/>
-        </p:spPr>
-        <p:txBody>
-          <a:bodyPr wrap="square" lIns="0" rIns="0" tIns="0" bIns="0" anchor="t">
-            <a:spAutoFit/>
-          </a:bodyPr>
-          <a:lstStyle/>
-          <a:p>
-            <a:pPr algn="l"/>
-            <a:r>
-              <a:rPr sz="1100" b="0">
+              <a:t>Weeks 27–36+</a:t>
+            </a:r>
+          </a:p>
+        </p:txBody>
+      </p:sp>
+      <p:sp>
+        <p:nvSpPr>
+          <p:cNvPr id="25" name="TextBox 24"/>
+          <p:cNvSpPr txBox="1"/>
+          <p:nvPr/>
+        </p:nvSpPr>
+        <p:spPr>
+          <a:xfrm>
+            <a:off x="9189720" y="3566160"/>
+            <a:ext cx="2194560" cy="548640"/>
+          </a:xfrm>
+          <a:prstGeom prst="rect">
+            <a:avLst/>
+          </a:prstGeom>
+          <a:noFill/>
+        </p:spPr>
+        <p:txBody>
+          <a:bodyPr wrap="square" lIns="0" rIns="0" tIns="0" bIns="0" anchor="t">
+            <a:spAutoFit/>
+          </a:bodyPr>
+          <a:lstStyle/>
+          <a:p>
+            <a:pPr algn="l"/>
+            <a:r>
+              <a:rPr sz="2200" b="0">
+                <a:solidFill>
+                  <a:srgbClr val="1F1D18"/>
+                </a:solidFill>
+                <a:latin typeface="Georgia"/>
+              </a:rPr>
+              <a:t>Phase 3 build</a:t>
+            </a:r>
+          </a:p>
+        </p:txBody>
+      </p:sp>
+      <p:sp>
+        <p:nvSpPr>
+          <p:cNvPr id="26" name="TextBox 25"/>
+          <p:cNvSpPr txBox="1"/>
+          <p:nvPr/>
+        </p:nvSpPr>
+        <p:spPr>
+          <a:xfrm>
+            <a:off x="9189720" y="4389120"/>
+            <a:ext cx="2194560" cy="1828800"/>
+          </a:xfrm>
+          <a:prstGeom prst="rect">
+            <a:avLst/>
+          </a:prstGeom>
+          <a:noFill/>
+        </p:spPr>
+        <p:txBody>
+          <a:bodyPr wrap="square" lIns="0" rIns="0" tIns="0" bIns="0" anchor="t">
+            <a:spAutoFit/>
+          </a:bodyPr>
+          <a:lstStyle/>
+          <a:p>
+            <a:pPr algn="l"/>
+            <a:r>
+              <a:rPr sz="1200" b="0">
                 <a:solidFill>
                   <a:srgbClr val="6B665C"/>
                 </a:solidFill>
                 <a:latin typeface="Calibri"/>
               </a:rPr>
-              <a:t>Average garments registered per active user</a:t>
-            </a:r>
-          </a:p>
-        </p:txBody>
-      </p:sp>
-      <p:sp>
-        <p:nvSpPr>
-          <p:cNvPr id="21" name="TextBox 20"/>
-          <p:cNvSpPr txBox="1"/>
-          <p:nvPr/>
-        </p:nvSpPr>
-        <p:spPr>
-          <a:xfrm>
-            <a:off x="822960" y="5852160"/>
-            <a:ext cx="3108960" cy="365760"/>
-          </a:xfrm>
-          <a:prstGeom prst="rect">
-            <a:avLst/>
-          </a:prstGeom>
-          <a:noFill/>
-        </p:spPr>
-        <p:txBody>
-          <a:bodyPr wrap="square" lIns="0" rIns="0" tIns="0" bIns="0" anchor="t">
-            <a:spAutoFit/>
-          </a:bodyPr>
-          <a:lstStyle/>
-          <a:p>
-            <a:pPr algn="l"/>
-            <a:r>
-              <a:rPr sz="1400" b="0">
-                <a:solidFill>
-                  <a:srgbClr val="1F1D18"/>
-                </a:solidFill>
-                <a:latin typeface="Georgia"/>
-              </a:rPr>
-              <a:t>Target ≥ 4 by month 9</a:t>
-            </a:r>
-          </a:p>
-        </p:txBody>
-      </p:sp>
-      <p:sp>
-        <p:nvSpPr>
-          <p:cNvPr id="22" name="Rounded Rectangle 21"/>
-          <p:cNvSpPr/>
-          <p:nvPr/>
-        </p:nvSpPr>
-        <p:spPr>
-          <a:xfrm>
-            <a:off x="4297680" y="4480560"/>
-            <a:ext cx="3657600" cy="1828800"/>
-          </a:xfrm>
-          <a:prstGeom prst="roundRect">
-            <a:avLst>
-              <a:gd name="adj" fmla="val 12000"/>
-            </a:avLst>
-          </a:prstGeom>
-          <a:solidFill>
-            <a:srgbClr val="FFFFFF"/>
-          </a:solidFill>
-          <a:ln w="9525">
-            <a:solidFill>
-              <a:srgbClr val="D9D2C4"/>
-            </a:solidFill>
-          </a:ln>
-          <a:effectLst/>
-        </p:spPr>
-        <p:style>
-          <a:lnRef idx="1">
-            <a:schemeClr val="accent1"/>
-          </a:lnRef>
-          <a:fillRef idx="3">
-            <a:schemeClr val="accent1"/>
-          </a:fillRef>
-          <a:effectRef idx="2">
-            <a:schemeClr val="accent1"/>
-          </a:effectRef>
-          <a:fontRef idx="minor">
-            <a:schemeClr val="lt1"/>
-          </a:fontRef>
-        </p:style>
-        <p:txBody>
-          <a:bodyPr rtlCol="0" anchor="ctr"/>
-          <a:lstStyle/>
-          <a:p>
-            <a:pPr algn="ctr"/>
-          </a:p>
-        </p:txBody>
-      </p:sp>
-      <p:sp>
-        <p:nvSpPr>
-          <p:cNvPr id="23" name="TextBox 22"/>
-          <p:cNvSpPr txBox="1"/>
-          <p:nvPr/>
-        </p:nvSpPr>
-        <p:spPr>
-          <a:xfrm>
-            <a:off x="4572000" y="4663440"/>
-            <a:ext cx="3108960" cy="365760"/>
-          </a:xfrm>
-          <a:prstGeom prst="rect">
-            <a:avLst/>
-          </a:prstGeom>
-          <a:noFill/>
-        </p:spPr>
-        <p:txBody>
-          <a:bodyPr wrap="square" lIns="0" rIns="0" tIns="0" bIns="0" anchor="t">
-            <a:spAutoFit/>
-          </a:bodyPr>
-          <a:lstStyle/>
-          <a:p>
-            <a:pPr algn="l"/>
-            <a:r>
-              <a:rPr sz="1400" b="1">
-                <a:solidFill>
-                  <a:srgbClr val="2F4A36"/>
-                </a:solidFill>
-                <a:latin typeface="Calibri"/>
-              </a:rPr>
-              <a:t>Circular actions</a:t>
-            </a:r>
-          </a:p>
-        </p:txBody>
-      </p:sp>
-      <p:sp>
-        <p:nvSpPr>
-          <p:cNvPr id="24" name="TextBox 23"/>
-          <p:cNvSpPr txBox="1"/>
-          <p:nvPr/>
-        </p:nvSpPr>
-        <p:spPr>
-          <a:xfrm>
-            <a:off x="4572000" y="5074920"/>
-            <a:ext cx="3108960" cy="822960"/>
-          </a:xfrm>
-          <a:prstGeom prst="rect">
-            <a:avLst/>
-          </a:prstGeom>
-          <a:noFill/>
-        </p:spPr>
-        <p:txBody>
-          <a:bodyPr wrap="square" lIns="0" rIns="0" tIns="0" bIns="0" anchor="t">
-            <a:spAutoFit/>
-          </a:bodyPr>
-          <a:lstStyle/>
-          <a:p>
-            <a:pPr algn="l"/>
-            <a:r>
-              <a:rPr sz="1100" b="0">
-                <a:solidFill>
-                  <a:srgbClr val="6B665C"/>
-                </a:solidFill>
-                <a:latin typeface="Calibri"/>
-              </a:rPr>
-              <a:t>Repair / resale / recycle events per active user / quarter</a:t>
-            </a:r>
-          </a:p>
-        </p:txBody>
-      </p:sp>
-      <p:sp>
-        <p:nvSpPr>
-          <p:cNvPr id="25" name="TextBox 24"/>
-          <p:cNvSpPr txBox="1"/>
-          <p:nvPr/>
-        </p:nvSpPr>
-        <p:spPr>
-          <a:xfrm>
-            <a:off x="4572000" y="5852160"/>
-            <a:ext cx="3108960" cy="365760"/>
-          </a:xfrm>
-          <a:prstGeom prst="rect">
-            <a:avLst/>
-          </a:prstGeom>
-          <a:noFill/>
-        </p:spPr>
-        <p:txBody>
-          <a:bodyPr wrap="square" lIns="0" rIns="0" tIns="0" bIns="0" anchor="t">
-            <a:spAutoFit/>
-          </a:bodyPr>
-          <a:lstStyle/>
-          <a:p>
-            <a:pPr algn="l"/>
-            <a:r>
-              <a:rPr sz="1400" b="0">
-                <a:solidFill>
-                  <a:srgbClr val="1F1D18"/>
-                </a:solidFill>
-                <a:latin typeface="Georgia"/>
-              </a:rPr>
-              <a:t>Target ≥ 1 by month 12</a:t>
-            </a:r>
-          </a:p>
-        </p:txBody>
-      </p:sp>
-      <p:sp>
-        <p:nvSpPr>
-          <p:cNvPr id="26" name="Rounded Rectangle 25"/>
-          <p:cNvSpPr/>
-          <p:nvPr/>
-        </p:nvSpPr>
-        <p:spPr>
-          <a:xfrm>
-            <a:off x="8046720" y="4480560"/>
-            <a:ext cx="3657600" cy="1828800"/>
-          </a:xfrm>
-          <a:prstGeom prst="roundRect">
-            <a:avLst>
-              <a:gd name="adj" fmla="val 12000"/>
-            </a:avLst>
-          </a:prstGeom>
-          <a:solidFill>
-            <a:srgbClr val="FFFFFF"/>
-          </a:solidFill>
-          <a:ln w="9525">
-            <a:solidFill>
-              <a:srgbClr val="D9D2C4"/>
-            </a:solidFill>
-          </a:ln>
-          <a:effectLst/>
-        </p:spPr>
-        <p:style>
-          <a:lnRef idx="1">
-            <a:schemeClr val="accent1"/>
-          </a:lnRef>
-          <a:fillRef idx="3">
-            <a:schemeClr val="accent1"/>
-          </a:fillRef>
-          <a:effectRef idx="2">
-            <a:schemeClr val="accent1"/>
-          </a:effectRef>
-          <a:fontRef idx="minor">
-            <a:schemeClr val="lt1"/>
-          </a:fontRef>
-        </p:style>
-        <p:txBody>
-          <a:bodyPr rtlCol="0" anchor="ctr"/>
-          <a:lstStyle/>
-          <a:p>
-            <a:pPr algn="ctr"/>
+              <a:t>Community, events, swap circles, ongoing optimisation.</a:t>
+            </a:r>
           </a:p>
         </p:txBody>
       </p:sp>
       <p:sp>
         <p:nvSpPr>
           <p:cNvPr id="27" name="TextBox 26"/>
-          <p:cNvSpPr txBox="1"/>
-          <p:nvPr/>
-        </p:nvSpPr>
-        <p:spPr>
-          <a:xfrm>
-            <a:off x="8321040" y="4663440"/>
-            <a:ext cx="3108960" cy="365760"/>
-          </a:xfrm>
-          <a:prstGeom prst="rect">
-            <a:avLst/>
-          </a:prstGeom>
-          <a:noFill/>
-        </p:spPr>
-        <p:txBody>
-          <a:bodyPr wrap="square" lIns="0" rIns="0" tIns="0" bIns="0" anchor="t">
-            <a:spAutoFit/>
-          </a:bodyPr>
-          <a:lstStyle/>
-          <a:p>
-            <a:pPr algn="l"/>
-            <a:r>
-              <a:rPr sz="1400" b="1">
-                <a:solidFill>
-                  <a:srgbClr val="2F4A36"/>
-                </a:solidFill>
-                <a:latin typeface="Calibri"/>
-              </a:rPr>
-              <a:t>NPS</a:t>
-            </a:r>
-          </a:p>
-        </p:txBody>
-      </p:sp>
-      <p:sp>
-        <p:nvSpPr>
-          <p:cNvPr id="28" name="TextBox 27"/>
-          <p:cNvSpPr txBox="1"/>
-          <p:nvPr/>
-        </p:nvSpPr>
-        <p:spPr>
-          <a:xfrm>
-            <a:off x="8321040" y="5074920"/>
-            <a:ext cx="3108960" cy="822960"/>
-          </a:xfrm>
-          <a:prstGeom prst="rect">
-            <a:avLst/>
-          </a:prstGeom>
-          <a:noFill/>
-        </p:spPr>
-        <p:txBody>
-          <a:bodyPr wrap="square" lIns="0" rIns="0" tIns="0" bIns="0" anchor="t">
-            <a:spAutoFit/>
-          </a:bodyPr>
-          <a:lstStyle/>
-          <a:p>
-            <a:pPr algn="l"/>
-            <a:r>
-              <a:rPr sz="1100" b="0">
-                <a:solidFill>
-                  <a:srgbClr val="6B665C"/>
-                </a:solidFill>
-                <a:latin typeface="Calibri"/>
-              </a:rPr>
-              <a:t>App-cohort net promoter score</a:t>
-            </a:r>
-          </a:p>
-        </p:txBody>
-      </p:sp>
-      <p:sp>
-        <p:nvSpPr>
-          <p:cNvPr id="29" name="TextBox 28"/>
-          <p:cNvSpPr txBox="1"/>
-          <p:nvPr/>
-        </p:nvSpPr>
-        <p:spPr>
-          <a:xfrm>
-            <a:off x="8321040" y="5852160"/>
-            <a:ext cx="3108960" cy="365760"/>
-          </a:xfrm>
-          <a:prstGeom prst="rect">
-            <a:avLst/>
-          </a:prstGeom>
-          <a:noFill/>
-        </p:spPr>
-        <p:txBody>
-          <a:bodyPr wrap="square" lIns="0" rIns="0" tIns="0" bIns="0" anchor="t">
-            <a:spAutoFit/>
-          </a:bodyPr>
-          <a:lstStyle/>
-          <a:p>
-            <a:pPr algn="l"/>
-            <a:r>
-              <a:rPr sz="1400" b="0">
-                <a:solidFill>
-                  <a:srgbClr val="1F1D18"/>
-                </a:solidFill>
-                <a:latin typeface="Georgia"/>
-              </a:rPr>
-              <a:t>Target ≥ 60</a:t>
-            </a:r>
-          </a:p>
-        </p:txBody>
-      </p:sp>
-      <p:sp>
-        <p:nvSpPr>
-          <p:cNvPr id="30" name="TextBox 29"/>
           <p:cNvSpPr txBox="1"/>
           <p:nvPr/>
         </p:nvSpPr>
@@ -16180,7 +15860,7 @@
       </p:sp>
       <p:sp>
         <p:nvSpPr>
-          <p:cNvPr id="31" name="TextBox 30"/>
+          <p:cNvPr id="28" name="TextBox 27"/>
           <p:cNvSpPr txBox="1"/>
           <p:nvPr/>
         </p:nvSpPr>
@@ -16208,7 +15888,7 @@
                 </a:solidFill>
                 <a:latin typeface="Calibri"/>
               </a:rPr>
-              <a:t>18 / 22</a:t>
+              <a:t>18 / 23</a:t>
             </a:r>
           </a:p>
         </p:txBody>
@@ -16305,7 +15985,7 @@
                 </a:solidFill>
                 <a:latin typeface="Calibri"/>
               </a:rPr>
-              <a:t>HOW IT WILL FEEL</a:t>
+              <a:t>HOW WE'LL KNOW IT'S WORKING</a:t>
             </a:r>
           </a:p>
         </p:txBody>
@@ -16340,7 +16020,7 @@
                 </a:solidFill>
                 <a:latin typeface="Georgia"/>
               </a:rPr>
-              <a:t>Design principles.</a:t>
+              <a:t>The metrics that matter.</a:t>
             </a:r>
           </a:p>
         </p:txBody>
@@ -16396,8 +16076,8 @@
         </p:nvSpPr>
         <p:spPr>
           <a:xfrm>
-            <a:off x="548640" y="2468880"/>
-            <a:ext cx="5486400" cy="1280160"/>
+            <a:off x="548640" y="2560320"/>
+            <a:ext cx="3657600" cy="1828800"/>
           </a:xfrm>
           <a:prstGeom prst="roundRect">
             <a:avLst>
@@ -16444,8 +16124,8 @@
         </p:nvSpPr>
         <p:spPr>
           <a:xfrm>
-            <a:off x="822960" y="2651760"/>
-            <a:ext cx="4937760" cy="365760"/>
+            <a:off x="822960" y="2743200"/>
+            <a:ext cx="3108960" cy="365760"/>
           </a:xfrm>
           <a:prstGeom prst="rect">
             <a:avLst/>
@@ -16466,7 +16146,7 @@
                 </a:solidFill>
                 <a:latin typeface="Calibri"/>
               </a:rPr>
-              <a:t>Calm, not addictive</a:t>
+              <a:t>Activation</a:t>
             </a:r>
           </a:p>
         </p:txBody>
@@ -16479,8 +16159,8 @@
         </p:nvSpPr>
         <p:spPr>
           <a:xfrm>
-            <a:off x="822960" y="3063240"/>
-            <a:ext cx="4937760" cy="914400"/>
+            <a:off x="822960" y="3154680"/>
+            <a:ext cx="3108960" cy="822960"/>
           </a:xfrm>
           <a:prstGeom prst="rect">
             <a:avLst/>
@@ -16501,21 +16181,56 @@
                 </a:solidFill>
                 <a:latin typeface="Calibri"/>
               </a:rPr>
-              <a:t>No streaks, no anxiety design, no infinite scroll. The app should make customers feel grounded, not hooked.</a:t>
-            </a:r>
-          </a:p>
-        </p:txBody>
-      </p:sp>
-      <p:sp>
-        <p:nvSpPr>
-          <p:cNvPr id="9" name="Rounded Rectangle 8"/>
+              <a:t>% of buyers who install the app and register at least one garment in 30 days</a:t>
+            </a:r>
+          </a:p>
+        </p:txBody>
+      </p:sp>
+      <p:sp>
+        <p:nvSpPr>
+          <p:cNvPr id="9" name="TextBox 8"/>
+          <p:cNvSpPr txBox="1"/>
+          <p:nvPr/>
+        </p:nvSpPr>
+        <p:spPr>
+          <a:xfrm>
+            <a:off x="822960" y="3931920"/>
+            <a:ext cx="3108960" cy="365760"/>
+          </a:xfrm>
+          <a:prstGeom prst="rect">
+            <a:avLst/>
+          </a:prstGeom>
+          <a:noFill/>
+        </p:spPr>
+        <p:txBody>
+          <a:bodyPr wrap="square" lIns="0" rIns="0" tIns="0" bIns="0" anchor="t">
+            <a:spAutoFit/>
+          </a:bodyPr>
+          <a:lstStyle/>
+          <a:p>
+            <a:pPr algn="l"/>
+            <a:r>
+              <a:rPr sz="1400" b="0">
+                <a:solidFill>
+                  <a:srgbClr val="1F1D18"/>
+                </a:solidFill>
+                <a:latin typeface="Georgia"/>
+              </a:rPr>
+              <a:t>Target ≥ 35% by month 6</a:t>
+            </a:r>
+          </a:p>
+        </p:txBody>
+      </p:sp>
+      <p:sp>
+        <p:nvSpPr>
+          <p:cNvPr id="10" name="Rounded Rectangle 9"/>
           <p:cNvSpPr/>
           <p:nvPr/>
         </p:nvSpPr>
         <p:spPr>
           <a:xfrm>
-            <a:off x="6172200" y="2468880"/>
-            <a:ext cx="5486400" cy="1280160"/>
+            <a:off x="4297680" y="2560320"/>
+            <a:ext cx="3657600" cy="1828800"/>
           </a:xfrm>
           <a:prstGeom prst="roundRect">
             <a:avLst>
@@ -16556,14 +16271,14 @@
       </p:sp>
       <p:sp>
         <p:nvSpPr>
-          <p:cNvPr id="10" name="TextBox 9"/>
-          <p:cNvSpPr txBox="1"/>
-          <p:nvPr/>
-        </p:nvSpPr>
-        <p:spPr>
-          <a:xfrm>
-            <a:off x="6446520" y="2651760"/>
-            <a:ext cx="4937760" cy="365760"/>
+          <p:cNvPr id="11" name="TextBox 10"/>
+          <p:cNvSpPr txBox="1"/>
+          <p:nvPr/>
+        </p:nvSpPr>
+        <p:spPr>
+          <a:xfrm>
+            <a:off x="4572000" y="2743200"/>
+            <a:ext cx="3108960" cy="365760"/>
           </a:xfrm>
           <a:prstGeom prst="rect">
             <a:avLst/>
@@ -16584,21 +16299,21 @@
                 </a:solidFill>
                 <a:latin typeface="Calibri"/>
               </a:rPr>
-              <a:t>Permission before data</a:t>
-            </a:r>
-          </a:p>
-        </p:txBody>
-      </p:sp>
-      <p:sp>
-        <p:nvSpPr>
-          <p:cNvPr id="11" name="TextBox 10"/>
-          <p:cNvSpPr txBox="1"/>
-          <p:nvPr/>
-        </p:nvSpPr>
-        <p:spPr>
-          <a:xfrm>
-            <a:off x="6446520" y="3063240"/>
-            <a:ext cx="4937760" cy="914400"/>
+              <a:t>Repeat rate</a:t>
+            </a:r>
+          </a:p>
+        </p:txBody>
+      </p:sp>
+      <p:sp>
+        <p:nvSpPr>
+          <p:cNvPr id="12" name="TextBox 11"/>
+          <p:cNvSpPr txBox="1"/>
+          <p:nvPr/>
+        </p:nvSpPr>
+        <p:spPr>
+          <a:xfrm>
+            <a:off x="4572000" y="3154680"/>
+            <a:ext cx="3108960" cy="822960"/>
           </a:xfrm>
           <a:prstGeom prst="rect">
             <a:avLst/>
@@ -16619,21 +16334,56 @@
                 </a:solidFill>
                 <a:latin typeface="Calibri"/>
               </a:rPr>
-              <a:t>Every data category is opt-in with a plain-English reason. The customer can read what we know, anytime.</a:t>
-            </a:r>
-          </a:p>
-        </p:txBody>
-      </p:sp>
-      <p:sp>
-        <p:nvSpPr>
-          <p:cNvPr id="12" name="Rounded Rectangle 11"/>
+              <a:t>% of app users who place a second order within 90 days</a:t>
+            </a:r>
+          </a:p>
+        </p:txBody>
+      </p:sp>
+      <p:sp>
+        <p:nvSpPr>
+          <p:cNvPr id="13" name="TextBox 12"/>
+          <p:cNvSpPr txBox="1"/>
+          <p:nvPr/>
+        </p:nvSpPr>
+        <p:spPr>
+          <a:xfrm>
+            <a:off x="4572000" y="3931920"/>
+            <a:ext cx="3108960" cy="365760"/>
+          </a:xfrm>
+          <a:prstGeom prst="rect">
+            <a:avLst/>
+          </a:prstGeom>
+          <a:noFill/>
+        </p:spPr>
+        <p:txBody>
+          <a:bodyPr wrap="square" lIns="0" rIns="0" tIns="0" bIns="0" anchor="t">
+            <a:spAutoFit/>
+          </a:bodyPr>
+          <a:lstStyle/>
+          <a:p>
+            <a:pPr algn="l"/>
+            <a:r>
+              <a:rPr sz="1400" b="0">
+                <a:solidFill>
+                  <a:srgbClr val="1F1D18"/>
+                </a:solidFill>
+                <a:latin typeface="Georgia"/>
+              </a:rPr>
+              <a:t>Target +25% vs. non-app cohort</a:t>
+            </a:r>
+          </a:p>
+        </p:txBody>
+      </p:sp>
+      <p:sp>
+        <p:nvSpPr>
+          <p:cNvPr id="14" name="Rounded Rectangle 13"/>
           <p:cNvSpPr/>
           <p:nvPr/>
         </p:nvSpPr>
         <p:spPr>
           <a:xfrm>
-            <a:off x="548640" y="3886200"/>
-            <a:ext cx="5486400" cy="1280160"/>
+            <a:off x="8046720" y="2560320"/>
+            <a:ext cx="3657600" cy="1828800"/>
           </a:xfrm>
           <a:prstGeom prst="roundRect">
             <a:avLst>
@@ -16674,14 +16424,14 @@
       </p:sp>
       <p:sp>
         <p:nvSpPr>
-          <p:cNvPr id="13" name="TextBox 12"/>
-          <p:cNvSpPr txBox="1"/>
-          <p:nvPr/>
-        </p:nvSpPr>
-        <p:spPr>
-          <a:xfrm>
-            <a:off x="822960" y="4069080"/>
-            <a:ext cx="4937760" cy="365760"/>
+          <p:cNvPr id="15" name="TextBox 14"/>
+          <p:cNvSpPr txBox="1"/>
+          <p:nvPr/>
+        </p:nvSpPr>
+        <p:spPr>
+          <a:xfrm>
+            <a:off x="8321040" y="2743200"/>
+            <a:ext cx="3108960" cy="365760"/>
           </a:xfrm>
           <a:prstGeom prst="rect">
             <a:avLst/>
@@ -16702,21 +16452,21 @@
                 </a:solidFill>
                 <a:latin typeface="Calibri"/>
               </a:rPr>
-              <a:t>Material honesty</a:t>
-            </a:r>
-          </a:p>
-        </p:txBody>
-      </p:sp>
-      <p:sp>
-        <p:nvSpPr>
-          <p:cNvPr id="14" name="TextBox 13"/>
-          <p:cNvSpPr txBox="1"/>
-          <p:nvPr/>
-        </p:nvSpPr>
-        <p:spPr>
-          <a:xfrm>
-            <a:off x="822960" y="4480560"/>
-            <a:ext cx="4937760" cy="914400"/>
+              <a:t>Return rate</a:t>
+            </a:r>
+          </a:p>
+        </p:txBody>
+      </p:sp>
+      <p:sp>
+        <p:nvSpPr>
+          <p:cNvPr id="16" name="TextBox 15"/>
+          <p:cNvSpPr txBox="1"/>
+          <p:nvPr/>
+        </p:nvSpPr>
+        <p:spPr>
+          <a:xfrm>
+            <a:off x="8321040" y="3154680"/>
+            <a:ext cx="3108960" cy="822960"/>
           </a:xfrm>
           <a:prstGeom prst="rect">
             <a:avLst/>
@@ -16737,21 +16487,56 @@
                 </a:solidFill>
                 <a:latin typeface="Calibri"/>
               </a:rPr>
-              <a:t>When the materials, origin, or impact are imperfect, we say so. The brand's credibility is in the honesty.</a:t>
-            </a:r>
-          </a:p>
-        </p:txBody>
-      </p:sp>
-      <p:sp>
-        <p:nvSpPr>
-          <p:cNvPr id="15" name="Rounded Rectangle 14"/>
+              <a:t>Returns / orders, app cohort vs. control</a:t>
+            </a:r>
+          </a:p>
+        </p:txBody>
+      </p:sp>
+      <p:sp>
+        <p:nvSpPr>
+          <p:cNvPr id="17" name="TextBox 16"/>
+          <p:cNvSpPr txBox="1"/>
+          <p:nvPr/>
+        </p:nvSpPr>
+        <p:spPr>
+          <a:xfrm>
+            <a:off x="8321040" y="3931920"/>
+            <a:ext cx="3108960" cy="365760"/>
+          </a:xfrm>
+          <a:prstGeom prst="rect">
+            <a:avLst/>
+          </a:prstGeom>
+          <a:noFill/>
+        </p:spPr>
+        <p:txBody>
+          <a:bodyPr wrap="square" lIns="0" rIns="0" tIns="0" bIns="0" anchor="t">
+            <a:spAutoFit/>
+          </a:bodyPr>
+          <a:lstStyle/>
+          <a:p>
+            <a:pPr algn="l"/>
+            <a:r>
+              <a:rPr sz="1400" b="0">
+                <a:solidFill>
+                  <a:srgbClr val="1F1D18"/>
+                </a:solidFill>
+                <a:latin typeface="Georgia"/>
+              </a:rPr>
+              <a:t>Target -20% on app users with fit assistant</a:t>
+            </a:r>
+          </a:p>
+        </p:txBody>
+      </p:sp>
+      <p:sp>
+        <p:nvSpPr>
+          <p:cNvPr id="18" name="Rounded Rectangle 17"/>
           <p:cNvSpPr/>
           <p:nvPr/>
         </p:nvSpPr>
         <p:spPr>
           <a:xfrm>
-            <a:off x="6172200" y="3886200"/>
-            <a:ext cx="5486400" cy="1280160"/>
+            <a:off x="548640" y="4480560"/>
+            <a:ext cx="3657600" cy="1828800"/>
           </a:xfrm>
           <a:prstGeom prst="roundRect">
             <a:avLst>
@@ -16792,14 +16577,14 @@
       </p:sp>
       <p:sp>
         <p:nvSpPr>
-          <p:cNvPr id="16" name="TextBox 15"/>
-          <p:cNvSpPr txBox="1"/>
-          <p:nvPr/>
-        </p:nvSpPr>
-        <p:spPr>
-          <a:xfrm>
-            <a:off x="6446520" y="4069080"/>
-            <a:ext cx="4937760" cy="365760"/>
+          <p:cNvPr id="19" name="TextBox 18"/>
+          <p:cNvSpPr txBox="1"/>
+          <p:nvPr/>
+        </p:nvSpPr>
+        <p:spPr>
+          <a:xfrm>
+            <a:off x="822960" y="4663440"/>
+            <a:ext cx="3108960" cy="365760"/>
           </a:xfrm>
           <a:prstGeom prst="rect">
             <a:avLst/>
@@ -16820,21 +16605,21 @@
                 </a:solidFill>
                 <a:latin typeface="Calibri"/>
               </a:rPr>
-              <a:t>Slow tech</a:t>
-            </a:r>
-          </a:p>
-        </p:txBody>
-      </p:sp>
-      <p:sp>
-        <p:nvSpPr>
-          <p:cNvPr id="17" name="TextBox 16"/>
-          <p:cNvSpPr txBox="1"/>
-          <p:nvPr/>
-        </p:nvSpPr>
-        <p:spPr>
-          <a:xfrm>
-            <a:off x="6446520" y="4480560"/>
-            <a:ext cx="4937760" cy="914400"/>
+              <a:t>Closet depth</a:t>
+            </a:r>
+          </a:p>
+        </p:txBody>
+      </p:sp>
+      <p:sp>
+        <p:nvSpPr>
+          <p:cNvPr id="20" name="TextBox 19"/>
+          <p:cNvSpPr txBox="1"/>
+          <p:nvPr/>
+        </p:nvSpPr>
+        <p:spPr>
+          <a:xfrm>
+            <a:off x="822960" y="5074920"/>
+            <a:ext cx="3108960" cy="822960"/>
           </a:xfrm>
           <a:prstGeom prst="rect">
             <a:avLst/>
@@ -16855,21 +16640,56 @@
                 </a:solidFill>
                 <a:latin typeface="Calibri"/>
               </a:rPr>
-              <a:t>Fast where it matters (checkout, scan), unhurried where it doesn't (reading, reflection).</a:t>
-            </a:r>
-          </a:p>
-        </p:txBody>
-      </p:sp>
-      <p:sp>
-        <p:nvSpPr>
-          <p:cNvPr id="18" name="Rounded Rectangle 17"/>
+              <a:t>Average garments registered per active user</a:t>
+            </a:r>
+          </a:p>
+        </p:txBody>
+      </p:sp>
+      <p:sp>
+        <p:nvSpPr>
+          <p:cNvPr id="21" name="TextBox 20"/>
+          <p:cNvSpPr txBox="1"/>
+          <p:nvPr/>
+        </p:nvSpPr>
+        <p:spPr>
+          <a:xfrm>
+            <a:off x="822960" y="5852160"/>
+            <a:ext cx="3108960" cy="365760"/>
+          </a:xfrm>
+          <a:prstGeom prst="rect">
+            <a:avLst/>
+          </a:prstGeom>
+          <a:noFill/>
+        </p:spPr>
+        <p:txBody>
+          <a:bodyPr wrap="square" lIns="0" rIns="0" tIns="0" bIns="0" anchor="t">
+            <a:spAutoFit/>
+          </a:bodyPr>
+          <a:lstStyle/>
+          <a:p>
+            <a:pPr algn="l"/>
+            <a:r>
+              <a:rPr sz="1400" b="0">
+                <a:solidFill>
+                  <a:srgbClr val="1F1D18"/>
+                </a:solidFill>
+                <a:latin typeface="Georgia"/>
+              </a:rPr>
+              <a:t>Target ≥ 4 by month 9</a:t>
+            </a:r>
+          </a:p>
+        </p:txBody>
+      </p:sp>
+      <p:sp>
+        <p:nvSpPr>
+          <p:cNvPr id="22" name="Rounded Rectangle 21"/>
           <p:cNvSpPr/>
           <p:nvPr/>
         </p:nvSpPr>
         <p:spPr>
           <a:xfrm>
-            <a:off x="548640" y="5303520"/>
-            <a:ext cx="5486400" cy="1280160"/>
+            <a:off x="4297680" y="4480560"/>
+            <a:ext cx="3657600" cy="1828800"/>
           </a:xfrm>
           <a:prstGeom prst="roundRect">
             <a:avLst>
@@ -16910,14 +16730,14 @@
       </p:sp>
       <p:sp>
         <p:nvSpPr>
-          <p:cNvPr id="19" name="TextBox 18"/>
-          <p:cNvSpPr txBox="1"/>
-          <p:nvPr/>
-        </p:nvSpPr>
-        <p:spPr>
-          <a:xfrm>
-            <a:off x="822960" y="5486400"/>
-            <a:ext cx="4937760" cy="365760"/>
+          <p:cNvPr id="23" name="TextBox 22"/>
+          <p:cNvSpPr txBox="1"/>
+          <p:nvPr/>
+        </p:nvSpPr>
+        <p:spPr>
+          <a:xfrm>
+            <a:off x="4572000" y="4663440"/>
+            <a:ext cx="3108960" cy="365760"/>
           </a:xfrm>
           <a:prstGeom prst="rect">
             <a:avLst/>
@@ -16938,21 +16758,21 @@
                 </a:solidFill>
                 <a:latin typeface="Calibri"/>
               </a:rPr>
-              <a:t>AI in service of people</a:t>
-            </a:r>
-          </a:p>
-        </p:txBody>
-      </p:sp>
-      <p:sp>
-        <p:nvSpPr>
-          <p:cNvPr id="20" name="TextBox 19"/>
-          <p:cNvSpPr txBox="1"/>
-          <p:nvPr/>
-        </p:nvSpPr>
-        <p:spPr>
-          <a:xfrm>
-            <a:off x="822960" y="5897880"/>
-            <a:ext cx="4937760" cy="914400"/>
+              <a:t>Circular actions</a:t>
+            </a:r>
+          </a:p>
+        </p:txBody>
+      </p:sp>
+      <p:sp>
+        <p:nvSpPr>
+          <p:cNvPr id="24" name="TextBox 23"/>
+          <p:cNvSpPr txBox="1"/>
+          <p:nvPr/>
+        </p:nvSpPr>
+        <p:spPr>
+          <a:xfrm>
+            <a:off x="4572000" y="5074920"/>
+            <a:ext cx="3108960" cy="822960"/>
           </a:xfrm>
           <a:prstGeom prst="rect">
             <a:avLst/>
@@ -16973,21 +16793,56 @@
                 </a:solidFill>
                 <a:latin typeface="Calibri"/>
               </a:rPr>
-              <a:t>AI helps customers choose, repair, and resell — never to manipulate, upsell, or replace human craft.</a:t>
-            </a:r>
-          </a:p>
-        </p:txBody>
-      </p:sp>
-      <p:sp>
-        <p:nvSpPr>
-          <p:cNvPr id="21" name="Rounded Rectangle 20"/>
+              <a:t>Repair / resale / recycle events per active user / quarter</a:t>
+            </a:r>
+          </a:p>
+        </p:txBody>
+      </p:sp>
+      <p:sp>
+        <p:nvSpPr>
+          <p:cNvPr id="25" name="TextBox 24"/>
+          <p:cNvSpPr txBox="1"/>
+          <p:nvPr/>
+        </p:nvSpPr>
+        <p:spPr>
+          <a:xfrm>
+            <a:off x="4572000" y="5852160"/>
+            <a:ext cx="3108960" cy="365760"/>
+          </a:xfrm>
+          <a:prstGeom prst="rect">
+            <a:avLst/>
+          </a:prstGeom>
+          <a:noFill/>
+        </p:spPr>
+        <p:txBody>
+          <a:bodyPr wrap="square" lIns="0" rIns="0" tIns="0" bIns="0" anchor="t">
+            <a:spAutoFit/>
+          </a:bodyPr>
+          <a:lstStyle/>
+          <a:p>
+            <a:pPr algn="l"/>
+            <a:r>
+              <a:rPr sz="1400" b="0">
+                <a:solidFill>
+                  <a:srgbClr val="1F1D18"/>
+                </a:solidFill>
+                <a:latin typeface="Georgia"/>
+              </a:rPr>
+              <a:t>Target ≥ 1 by month 12</a:t>
+            </a:r>
+          </a:p>
+        </p:txBody>
+      </p:sp>
+      <p:sp>
+        <p:nvSpPr>
+          <p:cNvPr id="26" name="Rounded Rectangle 25"/>
           <p:cNvSpPr/>
           <p:nvPr/>
         </p:nvSpPr>
         <p:spPr>
           <a:xfrm>
-            <a:off x="6172200" y="5303520"/>
-            <a:ext cx="5486400" cy="1280160"/>
+            <a:off x="8046720" y="4480560"/>
+            <a:ext cx="3657600" cy="1828800"/>
           </a:xfrm>
           <a:prstGeom prst="roundRect">
             <a:avLst>
@@ -17028,14 +16883,14 @@
       </p:sp>
       <p:sp>
         <p:nvSpPr>
-          <p:cNvPr id="22" name="TextBox 21"/>
-          <p:cNvSpPr txBox="1"/>
-          <p:nvPr/>
-        </p:nvSpPr>
-        <p:spPr>
-          <a:xfrm>
-            <a:off x="6446520" y="5486400"/>
-            <a:ext cx="4937760" cy="365760"/>
+          <p:cNvPr id="27" name="TextBox 26"/>
+          <p:cNvSpPr txBox="1"/>
+          <p:nvPr/>
+        </p:nvSpPr>
+        <p:spPr>
+          <a:xfrm>
+            <a:off x="8321040" y="4663440"/>
+            <a:ext cx="3108960" cy="365760"/>
           </a:xfrm>
           <a:prstGeom prst="rect">
             <a:avLst/>
@@ -17056,21 +16911,21 @@
                 </a:solidFill>
                 <a:latin typeface="Calibri"/>
               </a:rPr>
-              <a:t>Earth-first language</a:t>
-            </a:r>
-          </a:p>
-        </p:txBody>
-      </p:sp>
-      <p:sp>
-        <p:nvSpPr>
-          <p:cNvPr id="23" name="TextBox 22"/>
-          <p:cNvSpPr txBox="1"/>
-          <p:nvPr/>
-        </p:nvSpPr>
-        <p:spPr>
-          <a:xfrm>
-            <a:off x="6446520" y="5897880"/>
-            <a:ext cx="4937760" cy="914400"/>
+              <a:t>NPS</a:t>
+            </a:r>
+          </a:p>
+        </p:txBody>
+      </p:sp>
+      <p:sp>
+        <p:nvSpPr>
+          <p:cNvPr id="28" name="TextBox 27"/>
+          <p:cNvSpPr txBox="1"/>
+          <p:nvPr/>
+        </p:nvSpPr>
+        <p:spPr>
+          <a:xfrm>
+            <a:off x="8321040" y="5074920"/>
+            <a:ext cx="3108960" cy="822960"/>
           </a:xfrm>
           <a:prstGeom prst="rect">
             <a:avLst/>
@@ -17091,14 +16946,49 @@
                 </a:solidFill>
                 <a:latin typeface="Calibri"/>
               </a:rPr>
-              <a:t>The brand voice is steady, generous, never alarmist or preachy.</a:t>
-            </a:r>
-          </a:p>
-        </p:txBody>
-      </p:sp>
-      <p:sp>
-        <p:nvSpPr>
-          <p:cNvPr id="24" name="TextBox 23"/>
+              <a:t>App-cohort net promoter score</a:t>
+            </a:r>
+          </a:p>
+        </p:txBody>
+      </p:sp>
+      <p:sp>
+        <p:nvSpPr>
+          <p:cNvPr id="29" name="TextBox 28"/>
+          <p:cNvSpPr txBox="1"/>
+          <p:nvPr/>
+        </p:nvSpPr>
+        <p:spPr>
+          <a:xfrm>
+            <a:off x="8321040" y="5852160"/>
+            <a:ext cx="3108960" cy="365760"/>
+          </a:xfrm>
+          <a:prstGeom prst="rect">
+            <a:avLst/>
+          </a:prstGeom>
+          <a:noFill/>
+        </p:spPr>
+        <p:txBody>
+          <a:bodyPr wrap="square" lIns="0" rIns="0" tIns="0" bIns="0" anchor="t">
+            <a:spAutoFit/>
+          </a:bodyPr>
+          <a:lstStyle/>
+          <a:p>
+            <a:pPr algn="l"/>
+            <a:r>
+              <a:rPr sz="1400" b="0">
+                <a:solidFill>
+                  <a:srgbClr val="1F1D18"/>
+                </a:solidFill>
+                <a:latin typeface="Georgia"/>
+              </a:rPr>
+              <a:t>Target ≥ 60</a:t>
+            </a:r>
+          </a:p>
+        </p:txBody>
+      </p:sp>
+      <p:sp>
+        <p:nvSpPr>
+          <p:cNvPr id="30" name="TextBox 29"/>
           <p:cNvSpPr txBox="1"/>
           <p:nvPr/>
         </p:nvSpPr>
@@ -17133,7 +17023,7 @@
       </p:sp>
       <p:sp>
         <p:nvSpPr>
-          <p:cNvPr id="25" name="TextBox 24"/>
+          <p:cNvPr id="31" name="TextBox 30"/>
           <p:cNvSpPr txBox="1"/>
           <p:nvPr/>
         </p:nvSpPr>
@@ -17161,7 +17051,7 @@
                 </a:solidFill>
                 <a:latin typeface="Calibri"/>
               </a:rPr>
-              <a:t>19 / 22</a:t>
+              <a:t>19 / 23</a:t>
             </a:r>
           </a:p>
         </p:txBody>
@@ -17901,7 +17791,7 @@
                 </a:solidFill>
                 <a:latin typeface="Calibri"/>
               </a:rPr>
-              <a:t>2 / 22</a:t>
+              <a:t>2 / 23</a:t>
             </a:r>
           </a:p>
         </p:txBody>
@@ -17998,7 +17888,7 @@
                 </a:solidFill>
                 <a:latin typeface="Calibri"/>
               </a:rPr>
-              <a:t>WORKING TOGETHER</a:t>
+              <a:t>HOW IT WILL FEEL</a:t>
             </a:r>
           </a:p>
         </p:txBody>
@@ -18033,7 +17923,7 @@
                 </a:solidFill>
                 <a:latin typeface="Georgia"/>
               </a:rPr>
-              <a:t>How we'd partner.</a:t>
+              <a:t>Design principles.</a:t>
             </a:r>
           </a:p>
         </p:txBody>
@@ -18089,8 +17979,8 @@
         </p:nvSpPr>
         <p:spPr>
           <a:xfrm>
-            <a:off x="548640" y="2286000"/>
-            <a:ext cx="5486400" cy="1828800"/>
+            <a:off x="548640" y="2468880"/>
+            <a:ext cx="5486400" cy="1280160"/>
           </a:xfrm>
           <a:prstGeom prst="roundRect">
             <a:avLst>
@@ -18137,29 +18027,29 @@
         </p:nvSpPr>
         <p:spPr>
           <a:xfrm>
-            <a:off x="822960" y="2560320"/>
-            <a:ext cx="4937760" cy="457200"/>
-          </a:xfrm>
-          <a:prstGeom prst="rect">
-            <a:avLst/>
-          </a:prstGeom>
-          <a:noFill/>
-        </p:spPr>
-        <p:txBody>
-          <a:bodyPr wrap="square" lIns="0" rIns="0" tIns="0" bIns="0" anchor="t">
-            <a:spAutoFit/>
-          </a:bodyPr>
-          <a:lstStyle/>
-          <a:p>
-            <a:pPr algn="l"/>
-            <a:r>
-              <a:rPr sz="2000" b="0">
+            <a:off x="822960" y="2651760"/>
+            <a:ext cx="4937760" cy="365760"/>
+          </a:xfrm>
+          <a:prstGeom prst="rect">
+            <a:avLst/>
+          </a:prstGeom>
+          <a:noFill/>
+        </p:spPr>
+        <p:txBody>
+          <a:bodyPr wrap="square" lIns="0" rIns="0" tIns="0" bIns="0" anchor="t">
+            <a:spAutoFit/>
+          </a:bodyPr>
+          <a:lstStyle/>
+          <a:p>
+            <a:pPr algn="l"/>
+            <a:r>
+              <a:rPr sz="1400" b="1">
                 <a:solidFill>
                   <a:srgbClr val="2F4A36"/>
                 </a:solidFill>
-                <a:latin typeface="Georgia"/>
-              </a:rPr>
-              <a:t>Discovery sprint</a:t>
+                <a:latin typeface="Calibri"/>
+              </a:rPr>
+              <a:t>Calm, not addictive</a:t>
             </a:r>
           </a:p>
         </p:txBody>
@@ -18172,29 +18062,29 @@
         </p:nvSpPr>
         <p:spPr>
           <a:xfrm>
-            <a:off x="822960" y="3154680"/>
-            <a:ext cx="4937760" cy="1005840"/>
-          </a:xfrm>
-          <a:prstGeom prst="rect">
-            <a:avLst/>
-          </a:prstGeom>
-          <a:noFill/>
-        </p:spPr>
-        <p:txBody>
-          <a:bodyPr wrap="square" lIns="0" rIns="0" tIns="0" bIns="0" anchor="t">
-            <a:spAutoFit/>
-          </a:bodyPr>
-          <a:lstStyle/>
-          <a:p>
-            <a:pPr algn="l"/>
-            <a:r>
-              <a:rPr sz="1200" b="0">
+            <a:off x="822960" y="3063240"/>
+            <a:ext cx="4937760" cy="914400"/>
+          </a:xfrm>
+          <a:prstGeom prst="rect">
+            <a:avLst/>
+          </a:prstGeom>
+          <a:noFill/>
+        </p:spPr>
+        <p:txBody>
+          <a:bodyPr wrap="square" lIns="0" rIns="0" tIns="0" bIns="0" anchor="t">
+            <a:spAutoFit/>
+          </a:bodyPr>
+          <a:lstStyle/>
+          <a:p>
+            <a:pPr algn="l"/>
+            <a:r>
+              <a:rPr sz="1100" b="0">
                 <a:solidFill>
                   <a:srgbClr val="6B665C"/>
                 </a:solidFill>
                 <a:latin typeface="Calibri"/>
               </a:rPr>
-              <a:t>Two weeks. Customer interviews, data audit, scope-locking. Walks away with a signed Phase 1 spec — even if you don't build with us.</a:t>
+              <a:t>No streaks, no anxiety design, no infinite scroll. The app should make customers feel grounded, not hooked.</a:t>
             </a:r>
           </a:p>
         </p:txBody>
@@ -18207,8 +18097,8 @@
         </p:nvSpPr>
         <p:spPr>
           <a:xfrm>
-            <a:off x="6172200" y="2286000"/>
-            <a:ext cx="5486400" cy="1828800"/>
+            <a:off x="6172200" y="2468880"/>
+            <a:ext cx="5486400" cy="1280160"/>
           </a:xfrm>
           <a:prstGeom prst="roundRect">
             <a:avLst>
@@ -18255,29 +18145,29 @@
         </p:nvSpPr>
         <p:spPr>
           <a:xfrm>
-            <a:off x="6446520" y="2560320"/>
-            <a:ext cx="4937760" cy="457200"/>
-          </a:xfrm>
-          <a:prstGeom prst="rect">
-            <a:avLst/>
-          </a:prstGeom>
-          <a:noFill/>
-        </p:spPr>
-        <p:txBody>
-          <a:bodyPr wrap="square" lIns="0" rIns="0" tIns="0" bIns="0" anchor="t">
-            <a:spAutoFit/>
-          </a:bodyPr>
-          <a:lstStyle/>
-          <a:p>
-            <a:pPr algn="l"/>
-            <a:r>
-              <a:rPr sz="2000" b="0">
+            <a:off x="6446520" y="2651760"/>
+            <a:ext cx="4937760" cy="365760"/>
+          </a:xfrm>
+          <a:prstGeom prst="rect">
+            <a:avLst/>
+          </a:prstGeom>
+          <a:noFill/>
+        </p:spPr>
+        <p:txBody>
+          <a:bodyPr wrap="square" lIns="0" rIns="0" tIns="0" bIns="0" anchor="t">
+            <a:spAutoFit/>
+          </a:bodyPr>
+          <a:lstStyle/>
+          <a:p>
+            <a:pPr algn="l"/>
+            <a:r>
+              <a:rPr sz="1400" b="1">
                 <a:solidFill>
                   <a:srgbClr val="2F4A36"/>
                 </a:solidFill>
-                <a:latin typeface="Georgia"/>
-              </a:rPr>
-              <a:t>Embedded delivery</a:t>
+                <a:latin typeface="Calibri"/>
+              </a:rPr>
+              <a:t>Permission before data</a:t>
             </a:r>
           </a:p>
         </p:txBody>
@@ -18290,29 +18180,29 @@
         </p:nvSpPr>
         <p:spPr>
           <a:xfrm>
-            <a:off x="6446520" y="3154680"/>
-            <a:ext cx="4937760" cy="1005840"/>
-          </a:xfrm>
-          <a:prstGeom prst="rect">
-            <a:avLst/>
-          </a:prstGeom>
-          <a:noFill/>
-        </p:spPr>
-        <p:txBody>
-          <a:bodyPr wrap="square" lIns="0" rIns="0" tIns="0" bIns="0" anchor="t">
-            <a:spAutoFit/>
-          </a:bodyPr>
-          <a:lstStyle/>
-          <a:p>
-            <a:pPr algn="l"/>
-            <a:r>
-              <a:rPr sz="1200" b="0">
+            <a:off x="6446520" y="3063240"/>
+            <a:ext cx="4937760" cy="914400"/>
+          </a:xfrm>
+          <a:prstGeom prst="rect">
+            <a:avLst/>
+          </a:prstGeom>
+          <a:noFill/>
+        </p:spPr>
+        <p:txBody>
+          <a:bodyPr wrap="square" lIns="0" rIns="0" tIns="0" bIns="0" anchor="t">
+            <a:spAutoFit/>
+          </a:bodyPr>
+          <a:lstStyle/>
+          <a:p>
+            <a:pPr algn="l"/>
+            <a:r>
+              <a:rPr sz="1100" b="0">
                 <a:solidFill>
                   <a:srgbClr val="6B665C"/>
                 </a:solidFill>
                 <a:latin typeface="Calibri"/>
               </a:rPr>
-              <a:t>A small team — a lead engineer, a mobile engineer, a designer — works as an extension of yours. Weekly demos, never a black box.</a:t>
+              <a:t>Every data category is opt-in with a plain-English reason. The customer can read what we know, anytime.</a:t>
             </a:r>
           </a:p>
         </p:txBody>
@@ -18325,8 +18215,8 @@
         </p:nvSpPr>
         <p:spPr>
           <a:xfrm>
-            <a:off x="548640" y="4251960"/>
-            <a:ext cx="5486400" cy="1828800"/>
+            <a:off x="548640" y="3886200"/>
+            <a:ext cx="5486400" cy="1280160"/>
           </a:xfrm>
           <a:prstGeom prst="roundRect">
             <a:avLst>
@@ -18373,29 +18263,29 @@
         </p:nvSpPr>
         <p:spPr>
           <a:xfrm>
-            <a:off x="822960" y="4526280"/>
-            <a:ext cx="4937760" cy="457200"/>
-          </a:xfrm>
-          <a:prstGeom prst="rect">
-            <a:avLst/>
-          </a:prstGeom>
-          <a:noFill/>
-        </p:spPr>
-        <p:txBody>
-          <a:bodyPr wrap="square" lIns="0" rIns="0" tIns="0" bIns="0" anchor="t">
-            <a:spAutoFit/>
-          </a:bodyPr>
-          <a:lstStyle/>
-          <a:p>
-            <a:pPr algn="l"/>
-            <a:r>
-              <a:rPr sz="2000" b="0">
+            <a:off x="822960" y="4069080"/>
+            <a:ext cx="4937760" cy="365760"/>
+          </a:xfrm>
+          <a:prstGeom prst="rect">
+            <a:avLst/>
+          </a:prstGeom>
+          <a:noFill/>
+        </p:spPr>
+        <p:txBody>
+          <a:bodyPr wrap="square" lIns="0" rIns="0" tIns="0" bIns="0" anchor="t">
+            <a:spAutoFit/>
+          </a:bodyPr>
+          <a:lstStyle/>
+          <a:p>
+            <a:pPr algn="l"/>
+            <a:r>
+              <a:rPr sz="1400" b="1">
                 <a:solidFill>
                   <a:srgbClr val="2F4A36"/>
                 </a:solidFill>
-                <a:latin typeface="Georgia"/>
-              </a:rPr>
-              <a:t>Steady operations</a:t>
+                <a:latin typeface="Calibri"/>
+              </a:rPr>
+              <a:t>Material honesty</a:t>
             </a:r>
           </a:p>
         </p:txBody>
@@ -18408,29 +18298,29 @@
         </p:nvSpPr>
         <p:spPr>
           <a:xfrm>
-            <a:off x="822960" y="5120640"/>
-            <a:ext cx="4937760" cy="1005840"/>
-          </a:xfrm>
-          <a:prstGeom prst="rect">
-            <a:avLst/>
-          </a:prstGeom>
-          <a:noFill/>
-        </p:spPr>
-        <p:txBody>
-          <a:bodyPr wrap="square" lIns="0" rIns="0" tIns="0" bIns="0" anchor="t">
-            <a:spAutoFit/>
-          </a:bodyPr>
-          <a:lstStyle/>
-          <a:p>
-            <a:pPr algn="l"/>
-            <a:r>
-              <a:rPr sz="1200" b="0">
+            <a:off x="822960" y="4480560"/>
+            <a:ext cx="4937760" cy="914400"/>
+          </a:xfrm>
+          <a:prstGeom prst="rect">
+            <a:avLst/>
+          </a:prstGeom>
+          <a:noFill/>
+        </p:spPr>
+        <p:txBody>
+          <a:bodyPr wrap="square" lIns="0" rIns="0" tIns="0" bIns="0" anchor="t">
+            <a:spAutoFit/>
+          </a:bodyPr>
+          <a:lstStyle/>
+          <a:p>
+            <a:pPr algn="l"/>
+            <a:r>
+              <a:rPr sz="1100" b="0">
                 <a:solidFill>
                   <a:srgbClr val="6B665C"/>
                 </a:solidFill>
                 <a:latin typeface="Calibri"/>
               </a:rPr>
-              <a:t>After launch, one engineer maintains the app, one analyst watches the metrics, the team is on call for incidents.</a:t>
+              <a:t>When the materials, origin, or impact are imperfect, we say so. The brand's credibility is in the honesty.</a:t>
             </a:r>
           </a:p>
         </p:txBody>
@@ -18443,8 +18333,8 @@
         </p:nvSpPr>
         <p:spPr>
           <a:xfrm>
-            <a:off x="6172200" y="4251960"/>
-            <a:ext cx="5486400" cy="1828800"/>
+            <a:off x="6172200" y="3886200"/>
+            <a:ext cx="5486400" cy="1280160"/>
           </a:xfrm>
           <a:prstGeom prst="roundRect">
             <a:avLst>
@@ -18491,29 +18381,29 @@
         </p:nvSpPr>
         <p:spPr>
           <a:xfrm>
-            <a:off x="6446520" y="4526280"/>
-            <a:ext cx="4937760" cy="457200"/>
-          </a:xfrm>
-          <a:prstGeom prst="rect">
-            <a:avLst/>
-          </a:prstGeom>
-          <a:noFill/>
-        </p:spPr>
-        <p:txBody>
-          <a:bodyPr wrap="square" lIns="0" rIns="0" tIns="0" bIns="0" anchor="t">
-            <a:spAutoFit/>
-          </a:bodyPr>
-          <a:lstStyle/>
-          <a:p>
-            <a:pPr algn="l"/>
-            <a:r>
-              <a:rPr sz="2000" b="0">
+            <a:off x="6446520" y="4069080"/>
+            <a:ext cx="4937760" cy="365760"/>
+          </a:xfrm>
+          <a:prstGeom prst="rect">
+            <a:avLst/>
+          </a:prstGeom>
+          <a:noFill/>
+        </p:spPr>
+        <p:txBody>
+          <a:bodyPr wrap="square" lIns="0" rIns="0" tIns="0" bIns="0" anchor="t">
+            <a:spAutoFit/>
+          </a:bodyPr>
+          <a:lstStyle/>
+          <a:p>
+            <a:pPr algn="l"/>
+            <a:r>
+              <a:rPr sz="1400" b="1">
                 <a:solidFill>
                   <a:srgbClr val="2F4A36"/>
                 </a:solidFill>
-                <a:latin typeface="Georgia"/>
-              </a:rPr>
-              <a:t>Always your data</a:t>
+                <a:latin typeface="Calibri"/>
+              </a:rPr>
+              <a:t>Slow tech</a:t>
             </a:r>
           </a:p>
         </p:txBody>
@@ -18526,36 +18416,272 @@
         </p:nvSpPr>
         <p:spPr>
           <a:xfrm>
-            <a:off x="6446520" y="5120640"/>
-            <a:ext cx="4937760" cy="1005840"/>
-          </a:xfrm>
-          <a:prstGeom prst="rect">
-            <a:avLst/>
-          </a:prstGeom>
-          <a:noFill/>
-        </p:spPr>
-        <p:txBody>
-          <a:bodyPr wrap="square" lIns="0" rIns="0" tIns="0" bIns="0" anchor="t">
-            <a:spAutoFit/>
-          </a:bodyPr>
-          <a:lstStyle/>
-          <a:p>
-            <a:pPr algn="l"/>
-            <a:r>
-              <a:rPr sz="1200" b="0">
+            <a:off x="6446520" y="4480560"/>
+            <a:ext cx="4937760" cy="914400"/>
+          </a:xfrm>
+          <a:prstGeom prst="rect">
+            <a:avLst/>
+          </a:prstGeom>
+          <a:noFill/>
+        </p:spPr>
+        <p:txBody>
+          <a:bodyPr wrap="square" lIns="0" rIns="0" tIns="0" bIns="0" anchor="t">
+            <a:spAutoFit/>
+          </a:bodyPr>
+          <a:lstStyle/>
+          <a:p>
+            <a:pPr algn="l"/>
+            <a:r>
+              <a:rPr sz="1100" b="0">
                 <a:solidFill>
                   <a:srgbClr val="6B665C"/>
                 </a:solidFill>
                 <a:latin typeface="Calibri"/>
               </a:rPr>
-              <a:t>Source code, customer data, model logs all live in your accounts — Shopify, Supabase, your cloud. We hold no lock-in.</a:t>
-            </a:r>
-          </a:p>
-        </p:txBody>
-      </p:sp>
-      <p:sp>
-        <p:nvSpPr>
-          <p:cNvPr id="18" name="TextBox 17"/>
+              <a:t>Fast where it matters (checkout, scan), unhurried where it doesn't (reading, reflection).</a:t>
+            </a:r>
+          </a:p>
+        </p:txBody>
+      </p:sp>
+      <p:sp>
+        <p:nvSpPr>
+          <p:cNvPr id="18" name="Rounded Rectangle 17"/>
+          <p:cNvSpPr/>
+          <p:nvPr/>
+        </p:nvSpPr>
+        <p:spPr>
+          <a:xfrm>
+            <a:off x="548640" y="5303520"/>
+            <a:ext cx="5486400" cy="1280160"/>
+          </a:xfrm>
+          <a:prstGeom prst="roundRect">
+            <a:avLst>
+              <a:gd name="adj" fmla="val 12000"/>
+            </a:avLst>
+          </a:prstGeom>
+          <a:solidFill>
+            <a:srgbClr val="FFFFFF"/>
+          </a:solidFill>
+          <a:ln w="9525">
+            <a:solidFill>
+              <a:srgbClr val="D9D2C4"/>
+            </a:solidFill>
+          </a:ln>
+          <a:effectLst/>
+        </p:spPr>
+        <p:style>
+          <a:lnRef idx="1">
+            <a:schemeClr val="accent1"/>
+          </a:lnRef>
+          <a:fillRef idx="3">
+            <a:schemeClr val="accent1"/>
+          </a:fillRef>
+          <a:effectRef idx="2">
+            <a:schemeClr val="accent1"/>
+          </a:effectRef>
+          <a:fontRef idx="minor">
+            <a:schemeClr val="lt1"/>
+          </a:fontRef>
+        </p:style>
+        <p:txBody>
+          <a:bodyPr rtlCol="0" anchor="ctr"/>
+          <a:lstStyle/>
+          <a:p>
+            <a:pPr algn="ctr"/>
+          </a:p>
+        </p:txBody>
+      </p:sp>
+      <p:sp>
+        <p:nvSpPr>
+          <p:cNvPr id="19" name="TextBox 18"/>
+          <p:cNvSpPr txBox="1"/>
+          <p:nvPr/>
+        </p:nvSpPr>
+        <p:spPr>
+          <a:xfrm>
+            <a:off x="822960" y="5486400"/>
+            <a:ext cx="4937760" cy="365760"/>
+          </a:xfrm>
+          <a:prstGeom prst="rect">
+            <a:avLst/>
+          </a:prstGeom>
+          <a:noFill/>
+        </p:spPr>
+        <p:txBody>
+          <a:bodyPr wrap="square" lIns="0" rIns="0" tIns="0" bIns="0" anchor="t">
+            <a:spAutoFit/>
+          </a:bodyPr>
+          <a:lstStyle/>
+          <a:p>
+            <a:pPr algn="l"/>
+            <a:r>
+              <a:rPr sz="1400" b="1">
+                <a:solidFill>
+                  <a:srgbClr val="2F4A36"/>
+                </a:solidFill>
+                <a:latin typeface="Calibri"/>
+              </a:rPr>
+              <a:t>AI in service of people</a:t>
+            </a:r>
+          </a:p>
+        </p:txBody>
+      </p:sp>
+      <p:sp>
+        <p:nvSpPr>
+          <p:cNvPr id="20" name="TextBox 19"/>
+          <p:cNvSpPr txBox="1"/>
+          <p:nvPr/>
+        </p:nvSpPr>
+        <p:spPr>
+          <a:xfrm>
+            <a:off x="822960" y="5897880"/>
+            <a:ext cx="4937760" cy="914400"/>
+          </a:xfrm>
+          <a:prstGeom prst="rect">
+            <a:avLst/>
+          </a:prstGeom>
+          <a:noFill/>
+        </p:spPr>
+        <p:txBody>
+          <a:bodyPr wrap="square" lIns="0" rIns="0" tIns="0" bIns="0" anchor="t">
+            <a:spAutoFit/>
+          </a:bodyPr>
+          <a:lstStyle/>
+          <a:p>
+            <a:pPr algn="l"/>
+            <a:r>
+              <a:rPr sz="1100" b="0">
+                <a:solidFill>
+                  <a:srgbClr val="6B665C"/>
+                </a:solidFill>
+                <a:latin typeface="Calibri"/>
+              </a:rPr>
+              <a:t>AI helps customers choose, repair, and resell — never to manipulate, upsell, or replace human craft.</a:t>
+            </a:r>
+          </a:p>
+        </p:txBody>
+      </p:sp>
+      <p:sp>
+        <p:nvSpPr>
+          <p:cNvPr id="21" name="Rounded Rectangle 20"/>
+          <p:cNvSpPr/>
+          <p:nvPr/>
+        </p:nvSpPr>
+        <p:spPr>
+          <a:xfrm>
+            <a:off x="6172200" y="5303520"/>
+            <a:ext cx="5486400" cy="1280160"/>
+          </a:xfrm>
+          <a:prstGeom prst="roundRect">
+            <a:avLst>
+              <a:gd name="adj" fmla="val 12000"/>
+            </a:avLst>
+          </a:prstGeom>
+          <a:solidFill>
+            <a:srgbClr val="FFFFFF"/>
+          </a:solidFill>
+          <a:ln w="9525">
+            <a:solidFill>
+              <a:srgbClr val="D9D2C4"/>
+            </a:solidFill>
+          </a:ln>
+          <a:effectLst/>
+        </p:spPr>
+        <p:style>
+          <a:lnRef idx="1">
+            <a:schemeClr val="accent1"/>
+          </a:lnRef>
+          <a:fillRef idx="3">
+            <a:schemeClr val="accent1"/>
+          </a:fillRef>
+          <a:effectRef idx="2">
+            <a:schemeClr val="accent1"/>
+          </a:effectRef>
+          <a:fontRef idx="minor">
+            <a:schemeClr val="lt1"/>
+          </a:fontRef>
+        </p:style>
+        <p:txBody>
+          <a:bodyPr rtlCol="0" anchor="ctr"/>
+          <a:lstStyle/>
+          <a:p>
+            <a:pPr algn="ctr"/>
+          </a:p>
+        </p:txBody>
+      </p:sp>
+      <p:sp>
+        <p:nvSpPr>
+          <p:cNvPr id="22" name="TextBox 21"/>
+          <p:cNvSpPr txBox="1"/>
+          <p:nvPr/>
+        </p:nvSpPr>
+        <p:spPr>
+          <a:xfrm>
+            <a:off x="6446520" y="5486400"/>
+            <a:ext cx="4937760" cy="365760"/>
+          </a:xfrm>
+          <a:prstGeom prst="rect">
+            <a:avLst/>
+          </a:prstGeom>
+          <a:noFill/>
+        </p:spPr>
+        <p:txBody>
+          <a:bodyPr wrap="square" lIns="0" rIns="0" tIns="0" bIns="0" anchor="t">
+            <a:spAutoFit/>
+          </a:bodyPr>
+          <a:lstStyle/>
+          <a:p>
+            <a:pPr algn="l"/>
+            <a:r>
+              <a:rPr sz="1400" b="1">
+                <a:solidFill>
+                  <a:srgbClr val="2F4A36"/>
+                </a:solidFill>
+                <a:latin typeface="Calibri"/>
+              </a:rPr>
+              <a:t>Earth-first language</a:t>
+            </a:r>
+          </a:p>
+        </p:txBody>
+      </p:sp>
+      <p:sp>
+        <p:nvSpPr>
+          <p:cNvPr id="23" name="TextBox 22"/>
+          <p:cNvSpPr txBox="1"/>
+          <p:nvPr/>
+        </p:nvSpPr>
+        <p:spPr>
+          <a:xfrm>
+            <a:off x="6446520" y="5897880"/>
+            <a:ext cx="4937760" cy="914400"/>
+          </a:xfrm>
+          <a:prstGeom prst="rect">
+            <a:avLst/>
+          </a:prstGeom>
+          <a:noFill/>
+        </p:spPr>
+        <p:txBody>
+          <a:bodyPr wrap="square" lIns="0" rIns="0" tIns="0" bIns="0" anchor="t">
+            <a:spAutoFit/>
+          </a:bodyPr>
+          <a:lstStyle/>
+          <a:p>
+            <a:pPr algn="l"/>
+            <a:r>
+              <a:rPr sz="1100" b="0">
+                <a:solidFill>
+                  <a:srgbClr val="6B665C"/>
+                </a:solidFill>
+                <a:latin typeface="Calibri"/>
+              </a:rPr>
+              <a:t>The brand voice is steady, generous, never alarmist or preachy.</a:t>
+            </a:r>
+          </a:p>
+        </p:txBody>
+      </p:sp>
+      <p:sp>
+        <p:nvSpPr>
+          <p:cNvPr id="24" name="TextBox 23"/>
           <p:cNvSpPr txBox="1"/>
           <p:nvPr/>
         </p:nvSpPr>
@@ -18590,7 +18716,7 @@
       </p:sp>
       <p:sp>
         <p:nvSpPr>
-          <p:cNvPr id="19" name="TextBox 18"/>
+          <p:cNvPr id="25" name="TextBox 24"/>
           <p:cNvSpPr txBox="1"/>
           <p:nvPr/>
         </p:nvSpPr>
@@ -18618,7 +18744,7 @@
                 </a:solidFill>
                 <a:latin typeface="Calibri"/>
               </a:rPr>
-              <a:t>20 / 22</a:t>
+              <a:t>20 / 23</a:t>
             </a:r>
           </a:p>
         </p:txBody>
@@ -18715,7 +18841,7 @@
                 </a:solidFill>
                 <a:latin typeface="Calibri"/>
               </a:rPr>
-              <a:t>WHY THIS WORKS FOR ERTH TO ERTH</a:t>
+              <a:t>WORKING TOGETHER</a:t>
             </a:r>
           </a:p>
         </p:txBody>
@@ -18750,7 +18876,7 @@
                 </a:solidFill>
                 <a:latin typeface="Georgia"/>
               </a:rPr>
-              <a:t>The bet behind the build.</a:t>
+              <a:t>How we'd partner.</a:t>
             </a:r>
           </a:p>
         </p:txBody>
@@ -18800,23 +18926,27 @@
       </p:sp>
       <p:sp>
         <p:nvSpPr>
-          <p:cNvPr id="6" name="Rectangle 5"/>
+          <p:cNvPr id="6" name="Rounded Rectangle 5"/>
           <p:cNvSpPr/>
           <p:nvPr/>
         </p:nvSpPr>
         <p:spPr>
           <a:xfrm>
             <a:off x="548640" y="2286000"/>
-            <a:ext cx="73152" cy="868680"/>
-          </a:xfrm>
-          <a:prstGeom prst="rect">
-            <a:avLst/>
+            <a:ext cx="5486400" cy="1828800"/>
+          </a:xfrm>
+          <a:prstGeom prst="roundRect">
+            <a:avLst>
+              <a:gd name="adj" fmla="val 12000"/>
+            </a:avLst>
           </a:prstGeom>
           <a:solidFill>
-            <a:srgbClr val="2F4A36"/>
+            <a:srgbClr val="FFFFFF"/>
           </a:solidFill>
-          <a:ln>
-            <a:noFill/>
+          <a:ln w="9525">
+            <a:solidFill>
+              <a:srgbClr val="D9D2C4"/>
+            </a:solidFill>
           </a:ln>
           <a:effectLst/>
         </p:spPr>
@@ -18850,8 +18980,8 @@
         </p:nvSpPr>
         <p:spPr>
           <a:xfrm>
-            <a:off x="868680" y="2331720"/>
-            <a:ext cx="10515600" cy="365760"/>
+            <a:off x="822960" y="2560320"/>
+            <a:ext cx="4937760" cy="457200"/>
           </a:xfrm>
           <a:prstGeom prst="rect">
             <a:avLst/>
@@ -18868,11 +18998,11 @@
             <a:r>
               <a:rPr sz="2000" b="0">
                 <a:solidFill>
-                  <a:srgbClr val="1F1D18"/>
+                  <a:srgbClr val="2F4A36"/>
                 </a:solidFill>
                 <a:latin typeface="Georgia"/>
               </a:rPr>
-              <a:t>Your story is your moat</a:t>
+              <a:t>Discovery sprint</a:t>
             </a:r>
           </a:p>
         </p:txBody>
@@ -18885,8 +19015,8 @@
         </p:nvSpPr>
         <p:spPr>
           <a:xfrm>
-            <a:off x="868680" y="2788920"/>
-            <a:ext cx="10515600" cy="365760"/>
+            <a:off x="822960" y="3154680"/>
+            <a:ext cx="4937760" cy="1005840"/>
           </a:xfrm>
           <a:prstGeom prst="rect">
             <a:avLst/>
@@ -18907,30 +19037,34 @@
                 </a:solidFill>
                 <a:latin typeface="Calibri"/>
               </a:rPr>
-              <a:t>Most fashion apps are bigger, faster, glossier — but none of them can tell your story honestly. The passport is yours to own.</a:t>
-            </a:r>
-          </a:p>
-        </p:txBody>
-      </p:sp>
-      <p:sp>
-        <p:nvSpPr>
-          <p:cNvPr id="9" name="Rectangle 8"/>
+              <a:t>Two weeks. Customer interviews, data audit, scope-locking. Walks away with a signed Phase 1 spec — even if you don't build with us.</a:t>
+            </a:r>
+          </a:p>
+        </p:txBody>
+      </p:sp>
+      <p:sp>
+        <p:nvSpPr>
+          <p:cNvPr id="9" name="Rounded Rectangle 8"/>
           <p:cNvSpPr/>
           <p:nvPr/>
         </p:nvSpPr>
         <p:spPr>
           <a:xfrm>
-            <a:off x="548640" y="3246120"/>
-            <a:ext cx="73152" cy="868680"/>
-          </a:xfrm>
-          <a:prstGeom prst="rect">
-            <a:avLst/>
+            <a:off x="6172200" y="2286000"/>
+            <a:ext cx="5486400" cy="1828800"/>
+          </a:xfrm>
+          <a:prstGeom prst="roundRect">
+            <a:avLst>
+              <a:gd name="adj" fmla="val 12000"/>
+            </a:avLst>
           </a:prstGeom>
           <a:solidFill>
-            <a:srgbClr val="2F4A36"/>
+            <a:srgbClr val="FFFFFF"/>
           </a:solidFill>
-          <a:ln>
-            <a:noFill/>
+          <a:ln w="9525">
+            <a:solidFill>
+              <a:srgbClr val="D9D2C4"/>
+            </a:solidFill>
           </a:ln>
           <a:effectLst/>
         </p:spPr>
@@ -18964,8 +19098,8 @@
         </p:nvSpPr>
         <p:spPr>
           <a:xfrm>
-            <a:off x="868680" y="3291840"/>
-            <a:ext cx="10515600" cy="365760"/>
+            <a:off x="6446520" y="2560320"/>
+            <a:ext cx="4937760" cy="457200"/>
           </a:xfrm>
           <a:prstGeom prst="rect">
             <a:avLst/>
@@ -18982,11 +19116,11 @@
             <a:r>
               <a:rPr sz="2000" b="0">
                 <a:solidFill>
-                  <a:srgbClr val="1F1D18"/>
+                  <a:srgbClr val="2F4A36"/>
                 </a:solidFill>
                 <a:latin typeface="Georgia"/>
               </a:rPr>
-              <a:t>The most engaged customer is the next purchase</a:t>
+              <a:t>Embedded delivery</a:t>
             </a:r>
           </a:p>
         </p:txBody>
@@ -18999,8 +19133,8 @@
         </p:nvSpPr>
         <p:spPr>
           <a:xfrm>
-            <a:off x="868680" y="3749040"/>
-            <a:ext cx="10515600" cy="365760"/>
+            <a:off x="6446520" y="3154680"/>
+            <a:ext cx="4937760" cy="1005840"/>
           </a:xfrm>
           <a:prstGeom prst="rect">
             <a:avLst/>
@@ -19021,30 +19155,34 @@
                 </a:solidFill>
                 <a:latin typeface="Calibri"/>
               </a:rPr>
-              <a:t>App users buy more, return less, and refer better — not because of dark patterns, but because the relationship is deeper.</a:t>
-            </a:r>
-          </a:p>
-        </p:txBody>
-      </p:sp>
-      <p:sp>
-        <p:nvSpPr>
-          <p:cNvPr id="12" name="Rectangle 11"/>
+              <a:t>A small team — a lead engineer, a mobile engineer, a designer — works as an extension of yours. Weekly demos, never a black box.</a:t>
+            </a:r>
+          </a:p>
+        </p:txBody>
+      </p:sp>
+      <p:sp>
+        <p:nvSpPr>
+          <p:cNvPr id="12" name="Rounded Rectangle 11"/>
           <p:cNvSpPr/>
           <p:nvPr/>
         </p:nvSpPr>
         <p:spPr>
           <a:xfrm>
-            <a:off x="548640" y="4206240"/>
-            <a:ext cx="73152" cy="868680"/>
-          </a:xfrm>
-          <a:prstGeom prst="rect">
-            <a:avLst/>
+            <a:off x="548640" y="4251960"/>
+            <a:ext cx="5486400" cy="1828800"/>
+          </a:xfrm>
+          <a:prstGeom prst="roundRect">
+            <a:avLst>
+              <a:gd name="adj" fmla="val 12000"/>
+            </a:avLst>
           </a:prstGeom>
           <a:solidFill>
-            <a:srgbClr val="2F4A36"/>
+            <a:srgbClr val="FFFFFF"/>
           </a:solidFill>
-          <a:ln>
-            <a:noFill/>
+          <a:ln w="9525">
+            <a:solidFill>
+              <a:srgbClr val="D9D2C4"/>
+            </a:solidFill>
           </a:ln>
           <a:effectLst/>
         </p:spPr>
@@ -19078,8 +19216,8 @@
         </p:nvSpPr>
         <p:spPr>
           <a:xfrm>
-            <a:off x="868680" y="4251960"/>
-            <a:ext cx="10515600" cy="365760"/>
+            <a:off x="822960" y="4526280"/>
+            <a:ext cx="4937760" cy="457200"/>
           </a:xfrm>
           <a:prstGeom prst="rect">
             <a:avLst/>
@@ -19096,11 +19234,11 @@
             <a:r>
               <a:rPr sz="2000" b="0">
                 <a:solidFill>
-                  <a:srgbClr val="1F1D18"/>
+                  <a:srgbClr val="2F4A36"/>
                 </a:solidFill>
                 <a:latin typeface="Georgia"/>
               </a:rPr>
-              <a:t>Circular features generate proof, not just rhetoric</a:t>
+              <a:t>Steady operations</a:t>
             </a:r>
           </a:p>
         </p:txBody>
@@ -19113,8 +19251,8 @@
         </p:nvSpPr>
         <p:spPr>
           <a:xfrm>
-            <a:off x="868680" y="4709160"/>
-            <a:ext cx="10515600" cy="365760"/>
+            <a:off x="822960" y="5120640"/>
+            <a:ext cx="4937760" cy="1005840"/>
           </a:xfrm>
           <a:prstGeom prst="rect">
             <a:avLst/>
@@ -19135,30 +19273,34 @@
                 </a:solidFill>
                 <a:latin typeface="Calibri"/>
               </a:rPr>
-              <a:t>Every repair, resale, and recycle event becomes data, content, and credibility — for marketing, regulators, and investors.</a:t>
-            </a:r>
-          </a:p>
-        </p:txBody>
-      </p:sp>
-      <p:sp>
-        <p:nvSpPr>
-          <p:cNvPr id="15" name="Rectangle 14"/>
+              <a:t>After launch, one engineer maintains the app, one analyst watches the metrics, the team is on call for incidents.</a:t>
+            </a:r>
+          </a:p>
+        </p:txBody>
+      </p:sp>
+      <p:sp>
+        <p:nvSpPr>
+          <p:cNvPr id="15" name="Rounded Rectangle 14"/>
           <p:cNvSpPr/>
           <p:nvPr/>
         </p:nvSpPr>
         <p:spPr>
           <a:xfrm>
-            <a:off x="548640" y="5166360"/>
-            <a:ext cx="73152" cy="868680"/>
-          </a:xfrm>
-          <a:prstGeom prst="rect">
-            <a:avLst/>
+            <a:off x="6172200" y="4251960"/>
+            <a:ext cx="5486400" cy="1828800"/>
+          </a:xfrm>
+          <a:prstGeom prst="roundRect">
+            <a:avLst>
+              <a:gd name="adj" fmla="val 12000"/>
+            </a:avLst>
           </a:prstGeom>
           <a:solidFill>
-            <a:srgbClr val="2F4A36"/>
+            <a:srgbClr val="FFFFFF"/>
           </a:solidFill>
-          <a:ln>
-            <a:noFill/>
+          <a:ln w="9525">
+            <a:solidFill>
+              <a:srgbClr val="D9D2C4"/>
+            </a:solidFill>
           </a:ln>
           <a:effectLst/>
         </p:spPr>
@@ -19192,8 +19334,8 @@
         </p:nvSpPr>
         <p:spPr>
           <a:xfrm>
-            <a:off x="868680" y="5212080"/>
-            <a:ext cx="10515600" cy="365760"/>
+            <a:off x="6446520" y="4526280"/>
+            <a:ext cx="4937760" cy="457200"/>
           </a:xfrm>
           <a:prstGeom prst="rect">
             <a:avLst/>
@@ -19210,11 +19352,11 @@
             <a:r>
               <a:rPr sz="2000" b="0">
                 <a:solidFill>
-                  <a:srgbClr val="1F1D18"/>
+                  <a:srgbClr val="2F4A36"/>
                 </a:solidFill>
                 <a:latin typeface="Georgia"/>
               </a:rPr>
-              <a:t>Built to grow with you</a:t>
+              <a:t>Always your data</a:t>
             </a:r>
           </a:p>
         </p:txBody>
@@ -19227,8 +19369,8 @@
         </p:nvSpPr>
         <p:spPr>
           <a:xfrm>
-            <a:off x="868680" y="5669280"/>
-            <a:ext cx="10515600" cy="365760"/>
+            <a:off x="6446520" y="5120640"/>
+            <a:ext cx="4937760" cy="1005840"/>
           </a:xfrm>
           <a:prstGeom prst="rect">
             <a:avLst/>
@@ -19249,7 +19391,7 @@
                 </a:solidFill>
                 <a:latin typeface="Calibri"/>
               </a:rPr>
-              <a:t>Start small in Phase 1. Every later phase compounds the closet you've already built. No throwaway work.</a:t>
+              <a:t>Source code, customer data, model logs all live in your accounts — Shopify, Supabase, your cloud. We hold no lock-in.</a:t>
             </a:r>
           </a:p>
         </p:txBody>
@@ -19319,7 +19461,7 @@
                 </a:solidFill>
                 <a:latin typeface="Calibri"/>
               </a:rPr>
-              <a:t>21 / 22</a:t>
+              <a:t>21 / 23</a:t>
             </a:r>
           </a:p>
         </p:txBody>
@@ -19388,14 +19530,127 @@
       </p:sp>
       <p:sp>
         <p:nvSpPr>
-          <p:cNvPr id="3" name="Rectangle 2"/>
+          <p:cNvPr id="3" name="TextBox 2"/>
+          <p:cNvSpPr txBox="1"/>
+          <p:nvPr/>
+        </p:nvSpPr>
+        <p:spPr>
+          <a:xfrm>
+            <a:off x="548640" y="502920"/>
+            <a:ext cx="7315200" cy="274320"/>
+          </a:xfrm>
+          <a:prstGeom prst="rect">
+            <a:avLst/>
+          </a:prstGeom>
+          <a:noFill/>
+        </p:spPr>
+        <p:txBody>
+          <a:bodyPr wrap="square" lIns="0" rIns="0" tIns="0" bIns="0" anchor="t">
+            <a:spAutoFit/>
+          </a:bodyPr>
+          <a:lstStyle/>
+          <a:p>
+            <a:pPr algn="l"/>
+            <a:r>
+              <a:rPr sz="1000" b="1">
+                <a:solidFill>
+                  <a:srgbClr val="2F4A36"/>
+                </a:solidFill>
+                <a:latin typeface="Calibri"/>
+              </a:rPr>
+              <a:t>WHY THIS WORKS FOR ERTH TO ERTH</a:t>
+            </a:r>
+          </a:p>
+        </p:txBody>
+      </p:sp>
+      <p:sp>
+        <p:nvSpPr>
+          <p:cNvPr id="4" name="TextBox 3"/>
+          <p:cNvSpPr txBox="1"/>
+          <p:nvPr/>
+        </p:nvSpPr>
+        <p:spPr>
+          <a:xfrm>
+            <a:off x="548640" y="777240"/>
+            <a:ext cx="10972800" cy="914400"/>
+          </a:xfrm>
+          <a:prstGeom prst="rect">
+            <a:avLst/>
+          </a:prstGeom>
+          <a:noFill/>
+        </p:spPr>
+        <p:txBody>
+          <a:bodyPr wrap="square" lIns="0" rIns="0" tIns="0" bIns="0" anchor="t">
+            <a:spAutoFit/>
+          </a:bodyPr>
+          <a:lstStyle/>
+          <a:p>
+            <a:pPr algn="l"/>
+            <a:r>
+              <a:rPr sz="3400" b="0">
+                <a:solidFill>
+                  <a:srgbClr val="1F1D18"/>
+                </a:solidFill>
+                <a:latin typeface="Georgia"/>
+              </a:rPr>
+              <a:t>The bet behind the build.</a:t>
+            </a:r>
+          </a:p>
+        </p:txBody>
+      </p:sp>
+      <p:sp>
+        <p:nvSpPr>
+          <p:cNvPr id="5" name="Rectangle 4"/>
           <p:cNvSpPr/>
           <p:nvPr/>
         </p:nvSpPr>
         <p:spPr>
           <a:xfrm>
-            <a:off x="0" y="0"/>
-            <a:ext cx="12191695" cy="6858000"/>
+            <a:off x="548640" y="1691640"/>
+            <a:ext cx="640080" cy="25400"/>
+          </a:xfrm>
+          <a:prstGeom prst="rect">
+            <a:avLst/>
+          </a:prstGeom>
+          <a:solidFill>
+            <a:srgbClr val="2F4A36"/>
+          </a:solidFill>
+          <a:ln>
+            <a:noFill/>
+          </a:ln>
+        </p:spPr>
+        <p:style>
+          <a:lnRef idx="1">
+            <a:schemeClr val="accent1"/>
+          </a:lnRef>
+          <a:fillRef idx="3">
+            <a:schemeClr val="accent1"/>
+          </a:fillRef>
+          <a:effectRef idx="2">
+            <a:schemeClr val="accent1"/>
+          </a:effectRef>
+          <a:fontRef idx="minor">
+            <a:schemeClr val="lt1"/>
+          </a:fontRef>
+        </p:style>
+        <p:txBody>
+          <a:bodyPr rtlCol="0" anchor="ctr"/>
+          <a:lstStyle/>
+          <a:p>
+            <a:pPr algn="ctr"/>
+          </a:p>
+        </p:txBody>
+      </p:sp>
+      <p:sp>
+        <p:nvSpPr>
+          <p:cNvPr id="6" name="Rectangle 5"/>
+          <p:cNvSpPr/>
+          <p:nvPr/>
+        </p:nvSpPr>
+        <p:spPr>
+          <a:xfrm>
+            <a:off x="548640" y="2286000"/>
+            <a:ext cx="73152" cy="868680"/>
           </a:xfrm>
           <a:prstGeom prst="rect">
             <a:avLst/>
@@ -19432,6 +19687,594 @@
       </p:sp>
       <p:sp>
         <p:nvSpPr>
+          <p:cNvPr id="7" name="TextBox 6"/>
+          <p:cNvSpPr txBox="1"/>
+          <p:nvPr/>
+        </p:nvSpPr>
+        <p:spPr>
+          <a:xfrm>
+            <a:off x="868680" y="2331720"/>
+            <a:ext cx="10515600" cy="365760"/>
+          </a:xfrm>
+          <a:prstGeom prst="rect">
+            <a:avLst/>
+          </a:prstGeom>
+          <a:noFill/>
+        </p:spPr>
+        <p:txBody>
+          <a:bodyPr wrap="square" lIns="0" rIns="0" tIns="0" bIns="0" anchor="t">
+            <a:spAutoFit/>
+          </a:bodyPr>
+          <a:lstStyle/>
+          <a:p>
+            <a:pPr algn="l"/>
+            <a:r>
+              <a:rPr sz="2000" b="0">
+                <a:solidFill>
+                  <a:srgbClr val="1F1D18"/>
+                </a:solidFill>
+                <a:latin typeface="Georgia"/>
+              </a:rPr>
+              <a:t>Your story is your moat</a:t>
+            </a:r>
+          </a:p>
+        </p:txBody>
+      </p:sp>
+      <p:sp>
+        <p:nvSpPr>
+          <p:cNvPr id="8" name="TextBox 7"/>
+          <p:cNvSpPr txBox="1"/>
+          <p:nvPr/>
+        </p:nvSpPr>
+        <p:spPr>
+          <a:xfrm>
+            <a:off x="868680" y="2788920"/>
+            <a:ext cx="10515600" cy="365760"/>
+          </a:xfrm>
+          <a:prstGeom prst="rect">
+            <a:avLst/>
+          </a:prstGeom>
+          <a:noFill/>
+        </p:spPr>
+        <p:txBody>
+          <a:bodyPr wrap="square" lIns="0" rIns="0" tIns="0" bIns="0" anchor="t">
+            <a:spAutoFit/>
+          </a:bodyPr>
+          <a:lstStyle/>
+          <a:p>
+            <a:pPr algn="l"/>
+            <a:r>
+              <a:rPr sz="1200" b="0">
+                <a:solidFill>
+                  <a:srgbClr val="6B665C"/>
+                </a:solidFill>
+                <a:latin typeface="Calibri"/>
+              </a:rPr>
+              <a:t>Most fashion apps are bigger, faster, glossier — but none of them can tell your story honestly. The passport is yours to own.</a:t>
+            </a:r>
+          </a:p>
+        </p:txBody>
+      </p:sp>
+      <p:sp>
+        <p:nvSpPr>
+          <p:cNvPr id="9" name="Rectangle 8"/>
+          <p:cNvSpPr/>
+          <p:nvPr/>
+        </p:nvSpPr>
+        <p:spPr>
+          <a:xfrm>
+            <a:off x="548640" y="3246120"/>
+            <a:ext cx="73152" cy="868680"/>
+          </a:xfrm>
+          <a:prstGeom prst="rect">
+            <a:avLst/>
+          </a:prstGeom>
+          <a:solidFill>
+            <a:srgbClr val="2F4A36"/>
+          </a:solidFill>
+          <a:ln>
+            <a:noFill/>
+          </a:ln>
+          <a:effectLst/>
+        </p:spPr>
+        <p:style>
+          <a:lnRef idx="1">
+            <a:schemeClr val="accent1"/>
+          </a:lnRef>
+          <a:fillRef idx="3">
+            <a:schemeClr val="accent1"/>
+          </a:fillRef>
+          <a:effectRef idx="2">
+            <a:schemeClr val="accent1"/>
+          </a:effectRef>
+          <a:fontRef idx="minor">
+            <a:schemeClr val="lt1"/>
+          </a:fontRef>
+        </p:style>
+        <p:txBody>
+          <a:bodyPr rtlCol="0" anchor="ctr"/>
+          <a:lstStyle/>
+          <a:p>
+            <a:pPr algn="ctr"/>
+          </a:p>
+        </p:txBody>
+      </p:sp>
+      <p:sp>
+        <p:nvSpPr>
+          <p:cNvPr id="10" name="TextBox 9"/>
+          <p:cNvSpPr txBox="1"/>
+          <p:nvPr/>
+        </p:nvSpPr>
+        <p:spPr>
+          <a:xfrm>
+            <a:off x="868680" y="3291840"/>
+            <a:ext cx="10515600" cy="365760"/>
+          </a:xfrm>
+          <a:prstGeom prst="rect">
+            <a:avLst/>
+          </a:prstGeom>
+          <a:noFill/>
+        </p:spPr>
+        <p:txBody>
+          <a:bodyPr wrap="square" lIns="0" rIns="0" tIns="0" bIns="0" anchor="t">
+            <a:spAutoFit/>
+          </a:bodyPr>
+          <a:lstStyle/>
+          <a:p>
+            <a:pPr algn="l"/>
+            <a:r>
+              <a:rPr sz="2000" b="0">
+                <a:solidFill>
+                  <a:srgbClr val="1F1D18"/>
+                </a:solidFill>
+                <a:latin typeface="Georgia"/>
+              </a:rPr>
+              <a:t>The most engaged customer is the next purchase</a:t>
+            </a:r>
+          </a:p>
+        </p:txBody>
+      </p:sp>
+      <p:sp>
+        <p:nvSpPr>
+          <p:cNvPr id="11" name="TextBox 10"/>
+          <p:cNvSpPr txBox="1"/>
+          <p:nvPr/>
+        </p:nvSpPr>
+        <p:spPr>
+          <a:xfrm>
+            <a:off x="868680" y="3749040"/>
+            <a:ext cx="10515600" cy="365760"/>
+          </a:xfrm>
+          <a:prstGeom prst="rect">
+            <a:avLst/>
+          </a:prstGeom>
+          <a:noFill/>
+        </p:spPr>
+        <p:txBody>
+          <a:bodyPr wrap="square" lIns="0" rIns="0" tIns="0" bIns="0" anchor="t">
+            <a:spAutoFit/>
+          </a:bodyPr>
+          <a:lstStyle/>
+          <a:p>
+            <a:pPr algn="l"/>
+            <a:r>
+              <a:rPr sz="1200" b="0">
+                <a:solidFill>
+                  <a:srgbClr val="6B665C"/>
+                </a:solidFill>
+                <a:latin typeface="Calibri"/>
+              </a:rPr>
+              <a:t>App users buy more, return less, and refer better — not because of dark patterns, but because the relationship is deeper.</a:t>
+            </a:r>
+          </a:p>
+        </p:txBody>
+      </p:sp>
+      <p:sp>
+        <p:nvSpPr>
+          <p:cNvPr id="12" name="Rectangle 11"/>
+          <p:cNvSpPr/>
+          <p:nvPr/>
+        </p:nvSpPr>
+        <p:spPr>
+          <a:xfrm>
+            <a:off x="548640" y="4206240"/>
+            <a:ext cx="73152" cy="868680"/>
+          </a:xfrm>
+          <a:prstGeom prst="rect">
+            <a:avLst/>
+          </a:prstGeom>
+          <a:solidFill>
+            <a:srgbClr val="2F4A36"/>
+          </a:solidFill>
+          <a:ln>
+            <a:noFill/>
+          </a:ln>
+          <a:effectLst/>
+        </p:spPr>
+        <p:style>
+          <a:lnRef idx="1">
+            <a:schemeClr val="accent1"/>
+          </a:lnRef>
+          <a:fillRef idx="3">
+            <a:schemeClr val="accent1"/>
+          </a:fillRef>
+          <a:effectRef idx="2">
+            <a:schemeClr val="accent1"/>
+          </a:effectRef>
+          <a:fontRef idx="minor">
+            <a:schemeClr val="lt1"/>
+          </a:fontRef>
+        </p:style>
+        <p:txBody>
+          <a:bodyPr rtlCol="0" anchor="ctr"/>
+          <a:lstStyle/>
+          <a:p>
+            <a:pPr algn="ctr"/>
+          </a:p>
+        </p:txBody>
+      </p:sp>
+      <p:sp>
+        <p:nvSpPr>
+          <p:cNvPr id="13" name="TextBox 12"/>
+          <p:cNvSpPr txBox="1"/>
+          <p:nvPr/>
+        </p:nvSpPr>
+        <p:spPr>
+          <a:xfrm>
+            <a:off x="868680" y="4251960"/>
+            <a:ext cx="10515600" cy="365760"/>
+          </a:xfrm>
+          <a:prstGeom prst="rect">
+            <a:avLst/>
+          </a:prstGeom>
+          <a:noFill/>
+        </p:spPr>
+        <p:txBody>
+          <a:bodyPr wrap="square" lIns="0" rIns="0" tIns="0" bIns="0" anchor="t">
+            <a:spAutoFit/>
+          </a:bodyPr>
+          <a:lstStyle/>
+          <a:p>
+            <a:pPr algn="l"/>
+            <a:r>
+              <a:rPr sz="2000" b="0">
+                <a:solidFill>
+                  <a:srgbClr val="1F1D18"/>
+                </a:solidFill>
+                <a:latin typeface="Georgia"/>
+              </a:rPr>
+              <a:t>Circular features generate proof, not just rhetoric</a:t>
+            </a:r>
+          </a:p>
+        </p:txBody>
+      </p:sp>
+      <p:sp>
+        <p:nvSpPr>
+          <p:cNvPr id="14" name="TextBox 13"/>
+          <p:cNvSpPr txBox="1"/>
+          <p:nvPr/>
+        </p:nvSpPr>
+        <p:spPr>
+          <a:xfrm>
+            <a:off x="868680" y="4709160"/>
+            <a:ext cx="10515600" cy="365760"/>
+          </a:xfrm>
+          <a:prstGeom prst="rect">
+            <a:avLst/>
+          </a:prstGeom>
+          <a:noFill/>
+        </p:spPr>
+        <p:txBody>
+          <a:bodyPr wrap="square" lIns="0" rIns="0" tIns="0" bIns="0" anchor="t">
+            <a:spAutoFit/>
+          </a:bodyPr>
+          <a:lstStyle/>
+          <a:p>
+            <a:pPr algn="l"/>
+            <a:r>
+              <a:rPr sz="1200" b="0">
+                <a:solidFill>
+                  <a:srgbClr val="6B665C"/>
+                </a:solidFill>
+                <a:latin typeface="Calibri"/>
+              </a:rPr>
+              <a:t>Every repair, resale, and recycle event becomes data, content, and credibility — for marketing, regulators, and investors.</a:t>
+            </a:r>
+          </a:p>
+        </p:txBody>
+      </p:sp>
+      <p:sp>
+        <p:nvSpPr>
+          <p:cNvPr id="15" name="Rectangle 14"/>
+          <p:cNvSpPr/>
+          <p:nvPr/>
+        </p:nvSpPr>
+        <p:spPr>
+          <a:xfrm>
+            <a:off x="548640" y="5166360"/>
+            <a:ext cx="73152" cy="868680"/>
+          </a:xfrm>
+          <a:prstGeom prst="rect">
+            <a:avLst/>
+          </a:prstGeom>
+          <a:solidFill>
+            <a:srgbClr val="2F4A36"/>
+          </a:solidFill>
+          <a:ln>
+            <a:noFill/>
+          </a:ln>
+          <a:effectLst/>
+        </p:spPr>
+        <p:style>
+          <a:lnRef idx="1">
+            <a:schemeClr val="accent1"/>
+          </a:lnRef>
+          <a:fillRef idx="3">
+            <a:schemeClr val="accent1"/>
+          </a:fillRef>
+          <a:effectRef idx="2">
+            <a:schemeClr val="accent1"/>
+          </a:effectRef>
+          <a:fontRef idx="minor">
+            <a:schemeClr val="lt1"/>
+          </a:fontRef>
+        </p:style>
+        <p:txBody>
+          <a:bodyPr rtlCol="0" anchor="ctr"/>
+          <a:lstStyle/>
+          <a:p>
+            <a:pPr algn="ctr"/>
+          </a:p>
+        </p:txBody>
+      </p:sp>
+      <p:sp>
+        <p:nvSpPr>
+          <p:cNvPr id="16" name="TextBox 15"/>
+          <p:cNvSpPr txBox="1"/>
+          <p:nvPr/>
+        </p:nvSpPr>
+        <p:spPr>
+          <a:xfrm>
+            <a:off x="868680" y="5212080"/>
+            <a:ext cx="10515600" cy="365760"/>
+          </a:xfrm>
+          <a:prstGeom prst="rect">
+            <a:avLst/>
+          </a:prstGeom>
+          <a:noFill/>
+        </p:spPr>
+        <p:txBody>
+          <a:bodyPr wrap="square" lIns="0" rIns="0" tIns="0" bIns="0" anchor="t">
+            <a:spAutoFit/>
+          </a:bodyPr>
+          <a:lstStyle/>
+          <a:p>
+            <a:pPr algn="l"/>
+            <a:r>
+              <a:rPr sz="2000" b="0">
+                <a:solidFill>
+                  <a:srgbClr val="1F1D18"/>
+                </a:solidFill>
+                <a:latin typeface="Georgia"/>
+              </a:rPr>
+              <a:t>Built to grow with you</a:t>
+            </a:r>
+          </a:p>
+        </p:txBody>
+      </p:sp>
+      <p:sp>
+        <p:nvSpPr>
+          <p:cNvPr id="17" name="TextBox 16"/>
+          <p:cNvSpPr txBox="1"/>
+          <p:nvPr/>
+        </p:nvSpPr>
+        <p:spPr>
+          <a:xfrm>
+            <a:off x="868680" y="5669280"/>
+            <a:ext cx="10515600" cy="365760"/>
+          </a:xfrm>
+          <a:prstGeom prst="rect">
+            <a:avLst/>
+          </a:prstGeom>
+          <a:noFill/>
+        </p:spPr>
+        <p:txBody>
+          <a:bodyPr wrap="square" lIns="0" rIns="0" tIns="0" bIns="0" anchor="t">
+            <a:spAutoFit/>
+          </a:bodyPr>
+          <a:lstStyle/>
+          <a:p>
+            <a:pPr algn="l"/>
+            <a:r>
+              <a:rPr sz="1200" b="0">
+                <a:solidFill>
+                  <a:srgbClr val="6B665C"/>
+                </a:solidFill>
+                <a:latin typeface="Calibri"/>
+              </a:rPr>
+              <a:t>Start small in Phase 1. Every later phase compounds the closet you've already built. No throwaway work.</a:t>
+            </a:r>
+          </a:p>
+        </p:txBody>
+      </p:sp>
+      <p:sp>
+        <p:nvSpPr>
+          <p:cNvPr id="18" name="TextBox 17"/>
+          <p:cNvSpPr txBox="1"/>
+          <p:nvPr/>
+        </p:nvSpPr>
+        <p:spPr>
+          <a:xfrm>
+            <a:off x="548640" y="6446520"/>
+            <a:ext cx="5486400" cy="274320"/>
+          </a:xfrm>
+          <a:prstGeom prst="rect">
+            <a:avLst/>
+          </a:prstGeom>
+          <a:noFill/>
+        </p:spPr>
+        <p:txBody>
+          <a:bodyPr wrap="square" lIns="0" rIns="0" tIns="0" bIns="0" anchor="t">
+            <a:spAutoFit/>
+          </a:bodyPr>
+          <a:lstStyle/>
+          <a:p>
+            <a:pPr algn="l"/>
+            <a:r>
+              <a:rPr sz="900" b="0">
+                <a:solidFill>
+                  <a:srgbClr val="6B665C"/>
+                </a:solidFill>
+                <a:latin typeface="Calibri"/>
+              </a:rPr>
+              <a:t>Erth to Erth · Mobile App Pitch</a:t>
+            </a:r>
+          </a:p>
+        </p:txBody>
+      </p:sp>
+      <p:sp>
+        <p:nvSpPr>
+          <p:cNvPr id="19" name="TextBox 18"/>
+          <p:cNvSpPr txBox="1"/>
+          <p:nvPr/>
+        </p:nvSpPr>
+        <p:spPr>
+          <a:xfrm>
+            <a:off x="10698480" y="6446520"/>
+            <a:ext cx="914400" cy="274320"/>
+          </a:xfrm>
+          <a:prstGeom prst="rect">
+            <a:avLst/>
+          </a:prstGeom>
+          <a:noFill/>
+        </p:spPr>
+        <p:txBody>
+          <a:bodyPr wrap="square" lIns="0" rIns="0" tIns="0" bIns="0" anchor="t">
+            <a:spAutoFit/>
+          </a:bodyPr>
+          <a:lstStyle/>
+          <a:p>
+            <a:pPr algn="r"/>
+            <a:r>
+              <a:rPr sz="900" b="0">
+                <a:solidFill>
+                  <a:srgbClr val="6B665C"/>
+                </a:solidFill>
+                <a:latin typeface="Calibri"/>
+              </a:rPr>
+              <a:t>22 / 23</a:t>
+            </a:r>
+          </a:p>
+        </p:txBody>
+      </p:sp>
+    </p:spTree>
+  </p:cSld>
+  <p:clrMapOvr>
+    <a:masterClrMapping/>
+  </p:clrMapOvr>
+</p:sld>
+</file>
+
+<file path=ppt/slides/slide23.xml><?xml version="1.0" encoding="utf-8"?>
+<p:sld xmlns:a="http://schemas.openxmlformats.org/drawingml/2006/main" xmlns:p="http://schemas.openxmlformats.org/presentationml/2006/main" xmlns:r="http://schemas.openxmlformats.org/officeDocument/2006/relationships">
+  <p:cSld>
+    <p:spTree>
+      <p:nvGrpSpPr>
+        <p:cNvPr id="1" name=""/>
+        <p:cNvGrpSpPr/>
+        <p:nvPr/>
+      </p:nvGrpSpPr>
+      <p:grpSpPr/>
+      <p:sp>
+        <p:nvSpPr>
+          <p:cNvPr id="2" name="Rectangle 1"/>
+          <p:cNvSpPr/>
+          <p:nvPr/>
+        </p:nvSpPr>
+        <p:spPr>
+          <a:xfrm>
+            <a:off x="0" y="0"/>
+            <a:ext cx="12191695" cy="6858000"/>
+          </a:xfrm>
+          <a:prstGeom prst="rect">
+            <a:avLst/>
+          </a:prstGeom>
+          <a:solidFill>
+            <a:srgbClr val="F3EFE7"/>
+          </a:solidFill>
+          <a:ln>
+            <a:noFill/>
+          </a:ln>
+          <a:effectLst/>
+        </p:spPr>
+        <p:style>
+          <a:lnRef idx="1">
+            <a:schemeClr val="accent1"/>
+          </a:lnRef>
+          <a:fillRef idx="3">
+            <a:schemeClr val="accent1"/>
+          </a:fillRef>
+          <a:effectRef idx="2">
+            <a:schemeClr val="accent1"/>
+          </a:effectRef>
+          <a:fontRef idx="minor">
+            <a:schemeClr val="lt1"/>
+          </a:fontRef>
+        </p:style>
+        <p:txBody>
+          <a:bodyPr rtlCol="0" anchor="ctr"/>
+          <a:lstStyle/>
+          <a:p>
+            <a:pPr algn="ctr"/>
+          </a:p>
+        </p:txBody>
+      </p:sp>
+      <p:sp>
+        <p:nvSpPr>
+          <p:cNvPr id="3" name="Rectangle 2"/>
+          <p:cNvSpPr/>
+          <p:nvPr/>
+        </p:nvSpPr>
+        <p:spPr>
+          <a:xfrm>
+            <a:off x="0" y="0"/>
+            <a:ext cx="12191695" cy="6858000"/>
+          </a:xfrm>
+          <a:prstGeom prst="rect">
+            <a:avLst/>
+          </a:prstGeom>
+          <a:solidFill>
+            <a:srgbClr val="2F4A36"/>
+          </a:solidFill>
+          <a:ln>
+            <a:noFill/>
+          </a:ln>
+          <a:effectLst/>
+        </p:spPr>
+        <p:style>
+          <a:lnRef idx="1">
+            <a:schemeClr val="accent1"/>
+          </a:lnRef>
+          <a:fillRef idx="3">
+            <a:schemeClr val="accent1"/>
+          </a:fillRef>
+          <a:effectRef idx="2">
+            <a:schemeClr val="accent1"/>
+          </a:effectRef>
+          <a:fontRef idx="minor">
+            <a:schemeClr val="lt1"/>
+          </a:fontRef>
+        </p:style>
+        <p:txBody>
+          <a:bodyPr rtlCol="0" anchor="ctr"/>
+          <a:lstStyle/>
+          <a:p>
+            <a:pPr algn="ctr"/>
+          </a:p>
+        </p:txBody>
+      </p:sp>
+      <p:sp>
+        <p:nvSpPr>
           <p:cNvPr id="4" name="TextBox 3"/>
           <p:cNvSpPr txBox="1"/>
           <p:nvPr/>
@@ -19706,7 +20549,7 @@
                 </a:solidFill>
                 <a:latin typeface="Calibri"/>
               </a:rPr>
-              <a:t>22 / 22</a:t>
+              <a:t>23 / 23</a:t>
             </a:r>
           </a:p>
         </p:txBody>
@@ -19776,7 +20619,7 @@
                 </a:solidFill>
                 <a:latin typeface="Calibri"/>
               </a:rPr>
-              <a:t>22 / 22</a:t>
+              <a:t>23 / 23</a:t>
             </a:r>
           </a:p>
         </p:txBody>
@@ -20174,7 +21017,7 @@
                 </a:solidFill>
                 <a:latin typeface="Calibri"/>
               </a:rPr>
-              <a:t>3 / 22</a:t>
+              <a:t>3 / 23</a:t>
             </a:r>
           </a:p>
         </p:txBody>
@@ -20306,7 +21149,7 @@
                 </a:solidFill>
                 <a:latin typeface="Georgia"/>
               </a:rPr>
-              <a:t>Three pillars.</a:t>
+              <a:t>Four pillars — three customer-facing, one internal.</a:t>
             </a:r>
           </a:p>
         </p:txBody>
@@ -20363,7 +21206,7 @@
         <p:spPr>
           <a:xfrm>
             <a:off x="548640" y="2103120"/>
-            <a:ext cx="3657600" cy="4206240"/>
+            <a:ext cx="2697480" cy="4206240"/>
           </a:xfrm>
           <a:prstGeom prst="roundRect">
             <a:avLst>
@@ -20410,8 +21253,8 @@
         </p:nvSpPr>
         <p:spPr>
           <a:xfrm>
-            <a:off x="914400" y="2468880"/>
-            <a:ext cx="548640" cy="548640"/>
+            <a:off x="822960" y="2377440"/>
+            <a:ext cx="502920" cy="502920"/>
           </a:xfrm>
           <a:prstGeom prst="roundRect">
             <a:avLst>
@@ -20456,8 +21299,8 @@
         </p:nvSpPr>
         <p:spPr>
           <a:xfrm>
-            <a:off x="914400" y="2468880"/>
-            <a:ext cx="548640" cy="548640"/>
+            <a:off x="822960" y="2377440"/>
+            <a:ext cx="502920" cy="502920"/>
           </a:xfrm>
           <a:prstGeom prst="rect">
             <a:avLst/>
@@ -20472,7 +21315,7 @@
           <a:p>
             <a:pPr algn="ctr"/>
             <a:r>
-              <a:rPr sz="2200" b="1">
+              <a:rPr sz="2000" b="1">
                 <a:solidFill>
                   <a:srgbClr val="2F4A36"/>
                 </a:solidFill>
@@ -20491,23 +21334,23 @@
         </p:nvSpPr>
         <p:spPr>
           <a:xfrm>
-            <a:off x="914400" y="3154680"/>
-            <a:ext cx="2926080" cy="457200"/>
-          </a:xfrm>
-          <a:prstGeom prst="rect">
-            <a:avLst/>
-          </a:prstGeom>
-          <a:noFill/>
-        </p:spPr>
-        <p:txBody>
-          <a:bodyPr wrap="square" lIns="0" rIns="0" tIns="0" bIns="0" anchor="t">
-            <a:spAutoFit/>
-          </a:bodyPr>
-          <a:lstStyle/>
-          <a:p>
-            <a:pPr algn="l"/>
-            <a:r>
-              <a:rPr sz="2200" b="0">
+            <a:off x="822960" y="3017520"/>
+            <a:ext cx="2148840" cy="457200"/>
+          </a:xfrm>
+          <a:prstGeom prst="rect">
+            <a:avLst/>
+          </a:prstGeom>
+          <a:noFill/>
+        </p:spPr>
+        <p:txBody>
+          <a:bodyPr wrap="square" lIns="0" rIns="0" tIns="0" bIns="0" anchor="t">
+            <a:spAutoFit/>
+          </a:bodyPr>
+          <a:lstStyle/>
+          <a:p>
+            <a:pPr algn="l"/>
+            <a:r>
+              <a:rPr sz="2000" b="0">
                 <a:solidFill>
                   <a:srgbClr val="1F1D18"/>
                 </a:solidFill>
@@ -20526,23 +21369,23 @@
         </p:nvSpPr>
         <p:spPr>
           <a:xfrm>
-            <a:off x="914400" y="3657600"/>
-            <a:ext cx="2926080" cy="1463040"/>
-          </a:xfrm>
-          <a:prstGeom prst="rect">
-            <a:avLst/>
-          </a:prstGeom>
-          <a:noFill/>
-        </p:spPr>
-        <p:txBody>
-          <a:bodyPr wrap="square" lIns="0" rIns="0" tIns="0" bIns="0" anchor="t">
-            <a:spAutoFit/>
-          </a:bodyPr>
-          <a:lstStyle/>
-          <a:p>
-            <a:pPr algn="l"/>
-            <a:r>
-              <a:rPr sz="1200" b="0">
+            <a:off x="822960" y="3520440"/>
+            <a:ext cx="2148840" cy="1463040"/>
+          </a:xfrm>
+          <a:prstGeom prst="rect">
+            <a:avLst/>
+          </a:prstGeom>
+          <a:noFill/>
+        </p:spPr>
+        <p:txBody>
+          <a:bodyPr wrap="square" lIns="0" rIns="0" tIns="0" bIns="0" anchor="t">
+            <a:spAutoFit/>
+          </a:bodyPr>
+          <a:lstStyle/>
+          <a:p>
+            <a:pPr algn="l"/>
+            <a:r>
+              <a:rPr sz="1100" b="0">
                 <a:solidFill>
                   <a:srgbClr val="6B665C"/>
                 </a:solidFill>
@@ -20561,23 +21404,23 @@
         </p:nvSpPr>
         <p:spPr>
           <a:xfrm>
-            <a:off x="914400" y="5120640"/>
-            <a:ext cx="2926080" cy="274320"/>
-          </a:xfrm>
-          <a:prstGeom prst="rect">
-            <a:avLst/>
-          </a:prstGeom>
-          <a:noFill/>
-        </p:spPr>
-        <p:txBody>
-          <a:bodyPr wrap="square" lIns="0" rIns="0" tIns="0" bIns="0" anchor="t">
-            <a:spAutoFit/>
-          </a:bodyPr>
-          <a:lstStyle/>
-          <a:p>
-            <a:pPr algn="l"/>
-            <a:r>
-              <a:rPr sz="1100" b="0">
+            <a:off x="822960" y="5120640"/>
+            <a:ext cx="2148840" cy="274320"/>
+          </a:xfrm>
+          <a:prstGeom prst="rect">
+            <a:avLst/>
+          </a:prstGeom>
+          <a:noFill/>
+        </p:spPr>
+        <p:txBody>
+          <a:bodyPr wrap="square" lIns="0" rIns="0" tIns="0" bIns="0" anchor="t">
+            <a:spAutoFit/>
+          </a:bodyPr>
+          <a:lstStyle/>
+          <a:p>
+            <a:pPr algn="l"/>
+            <a:r>
+              <a:rPr sz="1000" b="0">
                 <a:solidFill>
                   <a:srgbClr val="1F1D18"/>
                 </a:solidFill>
@@ -20596,23 +21439,23 @@
         </p:nvSpPr>
         <p:spPr>
           <a:xfrm>
-            <a:off x="914400" y="5486400"/>
-            <a:ext cx="2926080" cy="274320"/>
-          </a:xfrm>
-          <a:prstGeom prst="rect">
-            <a:avLst/>
-          </a:prstGeom>
-          <a:noFill/>
-        </p:spPr>
-        <p:txBody>
-          <a:bodyPr wrap="square" lIns="0" rIns="0" tIns="0" bIns="0" anchor="t">
-            <a:spAutoFit/>
-          </a:bodyPr>
-          <a:lstStyle/>
-          <a:p>
-            <a:pPr algn="l"/>
-            <a:r>
-              <a:rPr sz="1100" b="0">
+            <a:off x="822960" y="5449824"/>
+            <a:ext cx="2148840" cy="274320"/>
+          </a:xfrm>
+          <a:prstGeom prst="rect">
+            <a:avLst/>
+          </a:prstGeom>
+          <a:noFill/>
+        </p:spPr>
+        <p:txBody>
+          <a:bodyPr wrap="square" lIns="0" rIns="0" tIns="0" bIns="0" anchor="t">
+            <a:spAutoFit/>
+          </a:bodyPr>
+          <a:lstStyle/>
+          <a:p>
+            <a:pPr algn="l"/>
+            <a:r>
+              <a:rPr sz="1000" b="0">
                 <a:solidFill>
                   <a:srgbClr val="1F1D18"/>
                 </a:solidFill>
@@ -20631,23 +21474,23 @@
         </p:nvSpPr>
         <p:spPr>
           <a:xfrm>
-            <a:off x="914400" y="5852160"/>
-            <a:ext cx="2926080" cy="274320"/>
-          </a:xfrm>
-          <a:prstGeom prst="rect">
-            <a:avLst/>
-          </a:prstGeom>
-          <a:noFill/>
-        </p:spPr>
-        <p:txBody>
-          <a:bodyPr wrap="square" lIns="0" rIns="0" tIns="0" bIns="0" anchor="t">
-            <a:spAutoFit/>
-          </a:bodyPr>
-          <a:lstStyle/>
-          <a:p>
-            <a:pPr algn="l"/>
-            <a:r>
-              <a:rPr sz="1100" b="0">
+            <a:off x="822960" y="5779008"/>
+            <a:ext cx="2148840" cy="274320"/>
+          </a:xfrm>
+          <a:prstGeom prst="rect">
+            <a:avLst/>
+          </a:prstGeom>
+          <a:noFill/>
+        </p:spPr>
+        <p:txBody>
+          <a:bodyPr wrap="square" lIns="0" rIns="0" tIns="0" bIns="0" anchor="t">
+            <a:spAutoFit/>
+          </a:bodyPr>
+          <a:lstStyle/>
+          <a:p>
+            <a:pPr algn="l"/>
+            <a:r>
+              <a:rPr sz="1000" b="0">
                 <a:solidFill>
                   <a:srgbClr val="1F1D18"/>
                 </a:solidFill>
@@ -20666,8 +21509,8 @@
         </p:nvSpPr>
         <p:spPr>
           <a:xfrm>
-            <a:off x="4389120" y="2103120"/>
-            <a:ext cx="3657600" cy="4206240"/>
+            <a:off x="3383280" y="2103120"/>
+            <a:ext cx="2697480" cy="4206240"/>
           </a:xfrm>
           <a:prstGeom prst="roundRect">
             <a:avLst>
@@ -20714,8 +21557,8 @@
         </p:nvSpPr>
         <p:spPr>
           <a:xfrm>
-            <a:off x="4754880" y="2468880"/>
-            <a:ext cx="548640" cy="548640"/>
+            <a:off x="3657600" y="2377440"/>
+            <a:ext cx="502920" cy="502920"/>
           </a:xfrm>
           <a:prstGeom prst="roundRect">
             <a:avLst>
@@ -20760,8 +21603,8 @@
         </p:nvSpPr>
         <p:spPr>
           <a:xfrm>
-            <a:off x="4754880" y="2468880"/>
-            <a:ext cx="548640" cy="548640"/>
+            <a:off x="3657600" y="2377440"/>
+            <a:ext cx="502920" cy="502920"/>
           </a:xfrm>
           <a:prstGeom prst="rect">
             <a:avLst/>
@@ -20776,7 +21619,7 @@
           <a:p>
             <a:pPr algn="ctr"/>
             <a:r>
-              <a:rPr sz="2200" b="1">
+              <a:rPr sz="2000" b="1">
                 <a:solidFill>
                   <a:srgbClr val="2F4A36"/>
                 </a:solidFill>
@@ -20795,23 +21638,23 @@
         </p:nvSpPr>
         <p:spPr>
           <a:xfrm>
-            <a:off x="4754880" y="3154680"/>
-            <a:ext cx="2926080" cy="457200"/>
-          </a:xfrm>
-          <a:prstGeom prst="rect">
-            <a:avLst/>
-          </a:prstGeom>
-          <a:noFill/>
-        </p:spPr>
-        <p:txBody>
-          <a:bodyPr wrap="square" lIns="0" rIns="0" tIns="0" bIns="0" anchor="t">
-            <a:spAutoFit/>
-          </a:bodyPr>
-          <a:lstStyle/>
-          <a:p>
-            <a:pPr algn="l"/>
-            <a:r>
-              <a:rPr sz="2200" b="0">
+            <a:off x="3657600" y="3017520"/>
+            <a:ext cx="2148840" cy="457200"/>
+          </a:xfrm>
+          <a:prstGeom prst="rect">
+            <a:avLst/>
+          </a:prstGeom>
+          <a:noFill/>
+        </p:spPr>
+        <p:txBody>
+          <a:bodyPr wrap="square" lIns="0" rIns="0" tIns="0" bIns="0" anchor="t">
+            <a:spAutoFit/>
+          </a:bodyPr>
+          <a:lstStyle/>
+          <a:p>
+            <a:pPr algn="l"/>
+            <a:r>
+              <a:rPr sz="2000" b="0">
                 <a:solidFill>
                   <a:srgbClr val="1F1D18"/>
                 </a:solidFill>
@@ -20830,23 +21673,23 @@
         </p:nvSpPr>
         <p:spPr>
           <a:xfrm>
-            <a:off x="4754880" y="3657600"/>
-            <a:ext cx="2926080" cy="1463040"/>
-          </a:xfrm>
-          <a:prstGeom prst="rect">
-            <a:avLst/>
-          </a:prstGeom>
-          <a:noFill/>
-        </p:spPr>
-        <p:txBody>
-          <a:bodyPr wrap="square" lIns="0" rIns="0" tIns="0" bIns="0" anchor="t">
-            <a:spAutoFit/>
-          </a:bodyPr>
-          <a:lstStyle/>
-          <a:p>
-            <a:pPr algn="l"/>
-            <a:r>
-              <a:rPr sz="1200" b="0">
+            <a:off x="3657600" y="3520440"/>
+            <a:ext cx="2148840" cy="1463040"/>
+          </a:xfrm>
+          <a:prstGeom prst="rect">
+            <a:avLst/>
+          </a:prstGeom>
+          <a:noFill/>
+        </p:spPr>
+        <p:txBody>
+          <a:bodyPr wrap="square" lIns="0" rIns="0" tIns="0" bIns="0" anchor="t">
+            <a:spAutoFit/>
+          </a:bodyPr>
+          <a:lstStyle/>
+          <a:p>
+            <a:pPr algn="l"/>
+            <a:r>
+              <a:rPr sz="1100" b="0">
                 <a:solidFill>
                   <a:srgbClr val="6B665C"/>
                 </a:solidFill>
@@ -20865,23 +21708,23 @@
         </p:nvSpPr>
         <p:spPr>
           <a:xfrm>
-            <a:off x="4754880" y="5120640"/>
-            <a:ext cx="2926080" cy="274320"/>
-          </a:xfrm>
-          <a:prstGeom prst="rect">
-            <a:avLst/>
-          </a:prstGeom>
-          <a:noFill/>
-        </p:spPr>
-        <p:txBody>
-          <a:bodyPr wrap="square" lIns="0" rIns="0" tIns="0" bIns="0" anchor="t">
-            <a:spAutoFit/>
-          </a:bodyPr>
-          <a:lstStyle/>
-          <a:p>
-            <a:pPr algn="l"/>
-            <a:r>
-              <a:rPr sz="1100" b="0">
+            <a:off x="3657600" y="5120640"/>
+            <a:ext cx="2148840" cy="274320"/>
+          </a:xfrm>
+          <a:prstGeom prst="rect">
+            <a:avLst/>
+          </a:prstGeom>
+          <a:noFill/>
+        </p:spPr>
+        <p:txBody>
+          <a:bodyPr wrap="square" lIns="0" rIns="0" tIns="0" bIns="0" anchor="t">
+            <a:spAutoFit/>
+          </a:bodyPr>
+          <a:lstStyle/>
+          <a:p>
+            <a:pPr algn="l"/>
+            <a:r>
+              <a:rPr sz="1000" b="0">
                 <a:solidFill>
                   <a:srgbClr val="1F1D18"/>
                 </a:solidFill>
@@ -20900,23 +21743,23 @@
         </p:nvSpPr>
         <p:spPr>
           <a:xfrm>
-            <a:off x="4754880" y="5486400"/>
-            <a:ext cx="2926080" cy="274320"/>
-          </a:xfrm>
-          <a:prstGeom prst="rect">
-            <a:avLst/>
-          </a:prstGeom>
-          <a:noFill/>
-        </p:spPr>
-        <p:txBody>
-          <a:bodyPr wrap="square" lIns="0" rIns="0" tIns="0" bIns="0" anchor="t">
-            <a:spAutoFit/>
-          </a:bodyPr>
-          <a:lstStyle/>
-          <a:p>
-            <a:pPr algn="l"/>
-            <a:r>
-              <a:rPr sz="1100" b="0">
+            <a:off x="3657600" y="5449824"/>
+            <a:ext cx="2148840" cy="274320"/>
+          </a:xfrm>
+          <a:prstGeom prst="rect">
+            <a:avLst/>
+          </a:prstGeom>
+          <a:noFill/>
+        </p:spPr>
+        <p:txBody>
+          <a:bodyPr wrap="square" lIns="0" rIns="0" tIns="0" bIns="0" anchor="t">
+            <a:spAutoFit/>
+          </a:bodyPr>
+          <a:lstStyle/>
+          <a:p>
+            <a:pPr algn="l"/>
+            <a:r>
+              <a:rPr sz="1000" b="0">
                 <a:solidFill>
                   <a:srgbClr val="1F1D18"/>
                 </a:solidFill>
@@ -20935,23 +21778,23 @@
         </p:nvSpPr>
         <p:spPr>
           <a:xfrm>
-            <a:off x="4754880" y="5852160"/>
-            <a:ext cx="2926080" cy="274320"/>
-          </a:xfrm>
-          <a:prstGeom prst="rect">
-            <a:avLst/>
-          </a:prstGeom>
-          <a:noFill/>
-        </p:spPr>
-        <p:txBody>
-          <a:bodyPr wrap="square" lIns="0" rIns="0" tIns="0" bIns="0" anchor="t">
-            <a:spAutoFit/>
-          </a:bodyPr>
-          <a:lstStyle/>
-          <a:p>
-            <a:pPr algn="l"/>
-            <a:r>
-              <a:rPr sz="1100" b="0">
+            <a:off x="3657600" y="5779008"/>
+            <a:ext cx="2148840" cy="274320"/>
+          </a:xfrm>
+          <a:prstGeom prst="rect">
+            <a:avLst/>
+          </a:prstGeom>
+          <a:noFill/>
+        </p:spPr>
+        <p:txBody>
+          <a:bodyPr wrap="square" lIns="0" rIns="0" tIns="0" bIns="0" anchor="t">
+            <a:spAutoFit/>
+          </a:bodyPr>
+          <a:lstStyle/>
+          <a:p>
+            <a:pPr algn="l"/>
+            <a:r>
+              <a:rPr sz="1000" b="0">
                 <a:solidFill>
                   <a:srgbClr val="1F1D18"/>
                 </a:solidFill>
@@ -20970,8 +21813,8 @@
         </p:nvSpPr>
         <p:spPr>
           <a:xfrm>
-            <a:off x="8229600" y="2103120"/>
-            <a:ext cx="3657600" cy="4206240"/>
+            <a:off x="6217920" y="2103120"/>
+            <a:ext cx="2697480" cy="4206240"/>
           </a:xfrm>
           <a:prstGeom prst="roundRect">
             <a:avLst>
@@ -21018,8 +21861,8 @@
         </p:nvSpPr>
         <p:spPr>
           <a:xfrm>
-            <a:off x="8595360" y="2468880"/>
-            <a:ext cx="548640" cy="548640"/>
+            <a:off x="6492240" y="2377440"/>
+            <a:ext cx="502920" cy="502920"/>
           </a:xfrm>
           <a:prstGeom prst="roundRect">
             <a:avLst>
@@ -21064,8 +21907,8 @@
         </p:nvSpPr>
         <p:spPr>
           <a:xfrm>
-            <a:off x="8595360" y="2468880"/>
-            <a:ext cx="548640" cy="548640"/>
+            <a:off x="6492240" y="2377440"/>
+            <a:ext cx="502920" cy="502920"/>
           </a:xfrm>
           <a:prstGeom prst="rect">
             <a:avLst/>
@@ -21080,7 +21923,7 @@
           <a:p>
             <a:pPr algn="ctr"/>
             <a:r>
-              <a:rPr sz="2200" b="1">
+              <a:rPr sz="2000" b="1">
                 <a:solidFill>
                   <a:srgbClr val="2F4A36"/>
                 </a:solidFill>
@@ -21099,23 +21942,23 @@
         </p:nvSpPr>
         <p:spPr>
           <a:xfrm>
-            <a:off x="8595360" y="3154680"/>
-            <a:ext cx="2926080" cy="457200"/>
-          </a:xfrm>
-          <a:prstGeom prst="rect">
-            <a:avLst/>
-          </a:prstGeom>
-          <a:noFill/>
-        </p:spPr>
-        <p:txBody>
-          <a:bodyPr wrap="square" lIns="0" rIns="0" tIns="0" bIns="0" anchor="t">
-            <a:spAutoFit/>
-          </a:bodyPr>
-          <a:lstStyle/>
-          <a:p>
-            <a:pPr algn="l"/>
-            <a:r>
-              <a:rPr sz="2200" b="0">
+            <a:off x="6492240" y="3017520"/>
+            <a:ext cx="2148840" cy="457200"/>
+          </a:xfrm>
+          <a:prstGeom prst="rect">
+            <a:avLst/>
+          </a:prstGeom>
+          <a:noFill/>
+        </p:spPr>
+        <p:txBody>
+          <a:bodyPr wrap="square" lIns="0" rIns="0" tIns="0" bIns="0" anchor="t">
+            <a:spAutoFit/>
+          </a:bodyPr>
+          <a:lstStyle/>
+          <a:p>
+            <a:pPr algn="l"/>
+            <a:r>
+              <a:rPr sz="2000" b="0">
                 <a:solidFill>
                   <a:srgbClr val="1F1D18"/>
                 </a:solidFill>
@@ -21134,23 +21977,23 @@
         </p:nvSpPr>
         <p:spPr>
           <a:xfrm>
-            <a:off x="8595360" y="3657600"/>
-            <a:ext cx="2926080" cy="1463040"/>
-          </a:xfrm>
-          <a:prstGeom prst="rect">
-            <a:avLst/>
-          </a:prstGeom>
-          <a:noFill/>
-        </p:spPr>
-        <p:txBody>
-          <a:bodyPr wrap="square" lIns="0" rIns="0" tIns="0" bIns="0" anchor="t">
-            <a:spAutoFit/>
-          </a:bodyPr>
-          <a:lstStyle/>
-          <a:p>
-            <a:pPr algn="l"/>
-            <a:r>
-              <a:rPr sz="1200" b="0">
+            <a:off x="6492240" y="3520440"/>
+            <a:ext cx="2148840" cy="1463040"/>
+          </a:xfrm>
+          <a:prstGeom prst="rect">
+            <a:avLst/>
+          </a:prstGeom>
+          <a:noFill/>
+        </p:spPr>
+        <p:txBody>
+          <a:bodyPr wrap="square" lIns="0" rIns="0" tIns="0" bIns="0" anchor="t">
+            <a:spAutoFit/>
+          </a:bodyPr>
+          <a:lstStyle/>
+          <a:p>
+            <a:pPr algn="l"/>
+            <a:r>
+              <a:rPr sz="1100" b="0">
                 <a:solidFill>
                   <a:srgbClr val="6B665C"/>
                 </a:solidFill>
@@ -21169,8 +22012,277 @@
         </p:nvSpPr>
         <p:spPr>
           <a:xfrm>
-            <a:off x="8595360" y="5120640"/>
-            <a:ext cx="2926080" cy="274320"/>
+            <a:off x="6492240" y="5120640"/>
+            <a:ext cx="2148840" cy="274320"/>
+          </a:xfrm>
+          <a:prstGeom prst="rect">
+            <a:avLst/>
+          </a:prstGeom>
+          <a:noFill/>
+        </p:spPr>
+        <p:txBody>
+          <a:bodyPr wrap="square" lIns="0" rIns="0" tIns="0" bIns="0" anchor="t">
+            <a:spAutoFit/>
+          </a:bodyPr>
+          <a:lstStyle/>
+          <a:p>
+            <a:pPr algn="l"/>
+            <a:r>
+              <a:rPr sz="1000" b="0">
+                <a:solidFill>
+                  <a:srgbClr val="1F1D18"/>
+                </a:solidFill>
+                <a:latin typeface="Calibri"/>
+              </a:rPr>
+              <a:t>•  Soil → Compost → Bloom tiers</a:t>
+            </a:r>
+          </a:p>
+        </p:txBody>
+      </p:sp>
+      <p:sp>
+        <p:nvSpPr>
+          <p:cNvPr id="28" name="TextBox 27"/>
+          <p:cNvSpPr txBox="1"/>
+          <p:nvPr/>
+        </p:nvSpPr>
+        <p:spPr>
+          <a:xfrm>
+            <a:off x="6492240" y="5449824"/>
+            <a:ext cx="2148840" cy="274320"/>
+          </a:xfrm>
+          <a:prstGeom prst="rect">
+            <a:avLst/>
+          </a:prstGeom>
+          <a:noFill/>
+        </p:spPr>
+        <p:txBody>
+          <a:bodyPr wrap="square" lIns="0" rIns="0" tIns="0" bIns="0" anchor="t">
+            <a:spAutoFit/>
+          </a:bodyPr>
+          <a:lstStyle/>
+          <a:p>
+            <a:pPr algn="l"/>
+            <a:r>
+              <a:rPr sz="1000" b="0">
+                <a:solidFill>
+                  <a:srgbClr val="1F1D18"/>
+                </a:solidFill>
+                <a:latin typeface="Calibri"/>
+              </a:rPr>
+              <a:t>•  Earn for circular actions</a:t>
+            </a:r>
+          </a:p>
+        </p:txBody>
+      </p:sp>
+      <p:sp>
+        <p:nvSpPr>
+          <p:cNvPr id="29" name="TextBox 28"/>
+          <p:cNvSpPr txBox="1"/>
+          <p:nvPr/>
+        </p:nvSpPr>
+        <p:spPr>
+          <a:xfrm>
+            <a:off x="6492240" y="5779008"/>
+            <a:ext cx="2148840" cy="274320"/>
+          </a:xfrm>
+          <a:prstGeom prst="rect">
+            <a:avLst/>
+          </a:prstGeom>
+          <a:noFill/>
+        </p:spPr>
+        <p:txBody>
+          <a:bodyPr wrap="square" lIns="0" rIns="0" tIns="0" bIns="0" anchor="t">
+            <a:spAutoFit/>
+          </a:bodyPr>
+          <a:lstStyle/>
+          <a:p>
+            <a:pPr algn="l"/>
+            <a:r>
+              <a:rPr sz="1000" b="0">
+                <a:solidFill>
+                  <a:srgbClr val="1F1D18"/>
+                </a:solidFill>
+                <a:latin typeface="Calibri"/>
+              </a:rPr>
+              <a:t>•  Redeem on new pieces</a:t>
+            </a:r>
+          </a:p>
+        </p:txBody>
+      </p:sp>
+      <p:sp>
+        <p:nvSpPr>
+          <p:cNvPr id="30" name="Rounded Rectangle 29"/>
+          <p:cNvSpPr/>
+          <p:nvPr/>
+        </p:nvSpPr>
+        <p:spPr>
+          <a:xfrm>
+            <a:off x="9052560" y="2103120"/>
+            <a:ext cx="2697480" cy="4206240"/>
+          </a:xfrm>
+          <a:prstGeom prst="roundRect">
+            <a:avLst>
+              <a:gd name="adj" fmla="val 12000"/>
+            </a:avLst>
+          </a:prstGeom>
+          <a:solidFill>
+            <a:srgbClr val="FFFFFF"/>
+          </a:solidFill>
+          <a:ln w="9525">
+            <a:solidFill>
+              <a:srgbClr val="D9D2C4"/>
+            </a:solidFill>
+          </a:ln>
+          <a:effectLst/>
+        </p:spPr>
+        <p:style>
+          <a:lnRef idx="1">
+            <a:schemeClr val="accent1"/>
+          </a:lnRef>
+          <a:fillRef idx="3">
+            <a:schemeClr val="accent1"/>
+          </a:fillRef>
+          <a:effectRef idx="2">
+            <a:schemeClr val="accent1"/>
+          </a:effectRef>
+          <a:fontRef idx="minor">
+            <a:schemeClr val="lt1"/>
+          </a:fontRef>
+        </p:style>
+        <p:txBody>
+          <a:bodyPr rtlCol="0" anchor="ctr"/>
+          <a:lstStyle/>
+          <a:p>
+            <a:pPr algn="ctr"/>
+          </a:p>
+        </p:txBody>
+      </p:sp>
+      <p:sp>
+        <p:nvSpPr>
+          <p:cNvPr id="31" name="Rounded Rectangle 30"/>
+          <p:cNvSpPr/>
+          <p:nvPr/>
+        </p:nvSpPr>
+        <p:spPr>
+          <a:xfrm>
+            <a:off x="9326880" y="2377440"/>
+            <a:ext cx="502920" cy="502920"/>
+          </a:xfrm>
+          <a:prstGeom prst="roundRect">
+            <a:avLst>
+              <a:gd name="adj" fmla="val 12000"/>
+            </a:avLst>
+          </a:prstGeom>
+          <a:solidFill>
+            <a:srgbClr val="1F1D18"/>
+          </a:solidFill>
+          <a:ln>
+            <a:noFill/>
+          </a:ln>
+          <a:effectLst/>
+        </p:spPr>
+        <p:style>
+          <a:lnRef idx="1">
+            <a:schemeClr val="accent1"/>
+          </a:lnRef>
+          <a:fillRef idx="3">
+            <a:schemeClr val="accent1"/>
+          </a:fillRef>
+          <a:effectRef idx="2">
+            <a:schemeClr val="accent1"/>
+          </a:effectRef>
+          <a:fontRef idx="minor">
+            <a:schemeClr val="lt1"/>
+          </a:fontRef>
+        </p:style>
+        <p:txBody>
+          <a:bodyPr rtlCol="0" anchor="ctr"/>
+          <a:lstStyle/>
+          <a:p>
+            <a:pPr algn="ctr"/>
+          </a:p>
+        </p:txBody>
+      </p:sp>
+      <p:sp>
+        <p:nvSpPr>
+          <p:cNvPr id="32" name="TextBox 31"/>
+          <p:cNvSpPr txBox="1"/>
+          <p:nvPr/>
+        </p:nvSpPr>
+        <p:spPr>
+          <a:xfrm>
+            <a:off x="9326880" y="2377440"/>
+            <a:ext cx="502920" cy="502920"/>
+          </a:xfrm>
+          <a:prstGeom prst="rect">
+            <a:avLst/>
+          </a:prstGeom>
+          <a:noFill/>
+        </p:spPr>
+        <p:txBody>
+          <a:bodyPr wrap="square" lIns="0" rIns="0" tIns="0" bIns="0" anchor="ctr">
+            <a:spAutoFit/>
+          </a:bodyPr>
+          <a:lstStyle/>
+          <a:p>
+            <a:pPr algn="ctr"/>
+            <a:r>
+              <a:rPr sz="2000" b="1">
+                <a:solidFill>
+                  <a:srgbClr val="FFFFFF"/>
+                </a:solidFill>
+                <a:latin typeface="Georgia"/>
+              </a:rPr>
+              <a:t>4</a:t>
+            </a:r>
+          </a:p>
+        </p:txBody>
+      </p:sp>
+      <p:sp>
+        <p:nvSpPr>
+          <p:cNvPr id="33" name="TextBox 32"/>
+          <p:cNvSpPr txBox="1"/>
+          <p:nvPr/>
+        </p:nvSpPr>
+        <p:spPr>
+          <a:xfrm>
+            <a:off x="9326880" y="3017520"/>
+            <a:ext cx="2148840" cy="457200"/>
+          </a:xfrm>
+          <a:prstGeom prst="rect">
+            <a:avLst/>
+          </a:prstGeom>
+          <a:noFill/>
+        </p:spPr>
+        <p:txBody>
+          <a:bodyPr wrap="square" lIns="0" rIns="0" tIns="0" bIns="0" anchor="t">
+            <a:spAutoFit/>
+          </a:bodyPr>
+          <a:lstStyle/>
+          <a:p>
+            <a:pPr algn="l"/>
+            <a:r>
+              <a:rPr sz="2000" b="0">
+                <a:solidFill>
+                  <a:srgbClr val="1F1D18"/>
+                </a:solidFill>
+                <a:latin typeface="Georgia"/>
+              </a:rPr>
+              <a:t>The Studio</a:t>
+            </a:r>
+          </a:p>
+        </p:txBody>
+      </p:sp>
+      <p:sp>
+        <p:nvSpPr>
+          <p:cNvPr id="34" name="TextBox 33"/>
+          <p:cNvSpPr txBox="1"/>
+          <p:nvPr/>
+        </p:nvSpPr>
+        <p:spPr>
+          <a:xfrm>
+            <a:off x="9326880" y="3520440"/>
+            <a:ext cx="2148840" cy="1463040"/>
           </a:xfrm>
           <a:prstGeom prst="rect">
             <a:avLst/>
@@ -21187,88 +22299,123 @@
             <a:r>
               <a:rPr sz="1100" b="0">
                 <a:solidFill>
+                  <a:srgbClr val="6B665C"/>
+                </a:solidFill>
+                <a:latin typeface="Calibri"/>
+              </a:rPr>
+              <a:t>Internal-facing web admin portal — passport editor, repair queue, drop scheduler, sustainability report.</a:t>
+            </a:r>
+          </a:p>
+        </p:txBody>
+      </p:sp>
+      <p:sp>
+        <p:nvSpPr>
+          <p:cNvPr id="35" name="TextBox 34"/>
+          <p:cNvSpPr txBox="1"/>
+          <p:nvPr/>
+        </p:nvSpPr>
+        <p:spPr>
+          <a:xfrm>
+            <a:off x="9326880" y="5120640"/>
+            <a:ext cx="2148840" cy="274320"/>
+          </a:xfrm>
+          <a:prstGeom prst="rect">
+            <a:avLst/>
+          </a:prstGeom>
+          <a:noFill/>
+        </p:spPr>
+        <p:txBody>
+          <a:bodyPr wrap="square" lIns="0" rIns="0" tIns="0" bIns="0" anchor="t">
+            <a:spAutoFit/>
+          </a:bodyPr>
+          <a:lstStyle/>
+          <a:p>
+            <a:pPr algn="l"/>
+            <a:r>
+              <a:rPr sz="1000" b="0">
+                <a:solidFill>
                   <a:srgbClr val="1F1D18"/>
                 </a:solidFill>
                 <a:latin typeface="Calibri"/>
               </a:rPr>
-              <a:t>•  Soil → Compost → Bloom tiers</a:t>
-            </a:r>
-          </a:p>
-        </p:txBody>
-      </p:sp>
-      <p:sp>
-        <p:nvSpPr>
-          <p:cNvPr id="28" name="TextBox 27"/>
-          <p:cNvSpPr txBox="1"/>
-          <p:nvPr/>
-        </p:nvSpPr>
-        <p:spPr>
-          <a:xfrm>
-            <a:off x="8595360" y="5486400"/>
-            <a:ext cx="2926080" cy="274320"/>
-          </a:xfrm>
-          <a:prstGeom prst="rect">
-            <a:avLst/>
-          </a:prstGeom>
-          <a:noFill/>
-        </p:spPr>
-        <p:txBody>
-          <a:bodyPr wrap="square" lIns="0" rIns="0" tIns="0" bIns="0" anchor="t">
-            <a:spAutoFit/>
-          </a:bodyPr>
-          <a:lstStyle/>
-          <a:p>
-            <a:pPr algn="l"/>
-            <a:r>
-              <a:rPr sz="1100" b="0">
+              <a:t>•  Built for ops &amp; editorial</a:t>
+            </a:r>
+          </a:p>
+        </p:txBody>
+      </p:sp>
+      <p:sp>
+        <p:nvSpPr>
+          <p:cNvPr id="36" name="TextBox 35"/>
+          <p:cNvSpPr txBox="1"/>
+          <p:nvPr/>
+        </p:nvSpPr>
+        <p:spPr>
+          <a:xfrm>
+            <a:off x="9326880" y="5449824"/>
+            <a:ext cx="2148840" cy="274320"/>
+          </a:xfrm>
+          <a:prstGeom prst="rect">
+            <a:avLst/>
+          </a:prstGeom>
+          <a:noFill/>
+        </p:spPr>
+        <p:txBody>
+          <a:bodyPr wrap="square" lIns="0" rIns="0" tIns="0" bIns="0" anchor="t">
+            <a:spAutoFit/>
+          </a:bodyPr>
+          <a:lstStyle/>
+          <a:p>
+            <a:pPr algn="l"/>
+            <a:r>
+              <a:rPr sz="1000" b="0">
                 <a:solidFill>
                   <a:srgbClr val="1F1D18"/>
                 </a:solidFill>
                 <a:latin typeface="Calibri"/>
               </a:rPr>
-              <a:t>•  Earn for circular actions</a:t>
-            </a:r>
-          </a:p>
-        </p:txBody>
-      </p:sp>
-      <p:sp>
-        <p:nvSpPr>
-          <p:cNvPr id="29" name="TextBox 28"/>
-          <p:cNvSpPr txBox="1"/>
-          <p:nvPr/>
-        </p:nvSpPr>
-        <p:spPr>
-          <a:xfrm>
-            <a:off x="8595360" y="5852160"/>
-            <a:ext cx="2926080" cy="274320"/>
-          </a:xfrm>
-          <a:prstGeom prst="rect">
-            <a:avLst/>
-          </a:prstGeom>
-          <a:noFill/>
-        </p:spPr>
-        <p:txBody>
-          <a:bodyPr wrap="square" lIns="0" rIns="0" tIns="0" bIns="0" anchor="t">
-            <a:spAutoFit/>
-          </a:bodyPr>
-          <a:lstStyle/>
-          <a:p>
-            <a:pPr algn="l"/>
-            <a:r>
-              <a:rPr sz="1100" b="0">
+              <a:t>•  Same brand palette</a:t>
+            </a:r>
+          </a:p>
+        </p:txBody>
+      </p:sp>
+      <p:sp>
+        <p:nvSpPr>
+          <p:cNvPr id="37" name="TextBox 36"/>
+          <p:cNvSpPr txBox="1"/>
+          <p:nvPr/>
+        </p:nvSpPr>
+        <p:spPr>
+          <a:xfrm>
+            <a:off x="9326880" y="5779008"/>
+            <a:ext cx="2148840" cy="274320"/>
+          </a:xfrm>
+          <a:prstGeom prst="rect">
+            <a:avLst/>
+          </a:prstGeom>
+          <a:noFill/>
+        </p:spPr>
+        <p:txBody>
+          <a:bodyPr wrap="square" lIns="0" rIns="0" tIns="0" bIns="0" anchor="t">
+            <a:spAutoFit/>
+          </a:bodyPr>
+          <a:lstStyle/>
+          <a:p>
+            <a:pPr algn="l"/>
+            <a:r>
+              <a:rPr sz="1000" b="0">
                 <a:solidFill>
                   <a:srgbClr val="1F1D18"/>
                 </a:solidFill>
                 <a:latin typeface="Calibri"/>
               </a:rPr>
-              <a:t>•  Redeem on new pieces</a:t>
-            </a:r>
-          </a:p>
-        </p:txBody>
-      </p:sp>
-      <p:sp>
-        <p:nvSpPr>
-          <p:cNvPr id="30" name="TextBox 29"/>
+              <a:t>•  Audit-ready reporting</a:t>
+            </a:r>
+          </a:p>
+        </p:txBody>
+      </p:sp>
+      <p:sp>
+        <p:nvSpPr>
+          <p:cNvPr id="38" name="TextBox 37"/>
           <p:cNvSpPr txBox="1"/>
           <p:nvPr/>
         </p:nvSpPr>
@@ -21303,7 +22450,7 @@
       </p:sp>
       <p:sp>
         <p:nvSpPr>
-          <p:cNvPr id="31" name="TextBox 30"/>
+          <p:cNvPr id="39" name="TextBox 38"/>
           <p:cNvSpPr txBox="1"/>
           <p:nvPr/>
         </p:nvSpPr>
@@ -21331,7 +22478,7 @@
                 </a:solidFill>
                 <a:latin typeface="Calibri"/>
               </a:rPr>
-              <a:t>4 / 22</a:t>
+              <a:t>4 / 23</a:t>
             </a:r>
           </a:p>
         </p:txBody>
@@ -22923,7 +24070,7 @@
                 </a:solidFill>
                 <a:latin typeface="Calibri"/>
               </a:rPr>
-              <a:t>5 / 22</a:t>
+              <a:t>5 / 23</a:t>
             </a:r>
           </a:p>
         </p:txBody>
@@ -24515,7 +25662,7 @@
                 </a:solidFill>
                 <a:latin typeface="Calibri"/>
               </a:rPr>
-              <a:t>6 / 22</a:t>
+              <a:t>6 / 23</a:t>
             </a:r>
           </a:p>
         </p:txBody>
@@ -26107,7 +27254,7 @@
                 </a:solidFill>
                 <a:latin typeface="Calibri"/>
               </a:rPr>
-              <a:t>7 / 22</a:t>
+              <a:t>7 / 23</a:t>
             </a:r>
           </a:p>
         </p:txBody>
@@ -27423,7 +28570,7 @@
                 </a:solidFill>
                 <a:latin typeface="Calibri"/>
               </a:rPr>
-              <a:t>8 / 22</a:t>
+              <a:t>8 / 23</a:t>
             </a:r>
           </a:p>
         </p:txBody>
@@ -28874,7 +30021,7 @@
                 </a:solidFill>
                 <a:latin typeface="Calibri"/>
               </a:rPr>
-              <a:t>9 / 22</a:t>
+              <a:t>9 / 23</a:t>
             </a:r>
           </a:p>
         </p:txBody>
